--- a/materials/Презентация.pptx
+++ b/materials/Презентация.pptx
@@ -24,12 +24,12 @@
   <p:notesSz cx="6858000" cy="9144000"/>
   <p:embeddedFontLst>
     <p:embeddedFont>
-      <p:font typeface="Manrope" panose="020B0604020202020204" charset="0"/>
+      <p:font typeface="Manrope Light" panose="020B0604020202020204" charset="0"/>
       <p:regular r:id="rId14"/>
       <p:bold r:id="rId15"/>
     </p:embeddedFont>
     <p:embeddedFont>
-      <p:font typeface="Manrope Light" panose="020B0604020202020204" charset="0"/>
+      <p:font typeface="Manrope" panose="020B0604020202020204" charset="0"/>
       <p:regular r:id="rId16"/>
       <p:bold r:id="rId17"/>
     </p:embeddedFont>
@@ -10564,41 +10564,13 @@
             </a:pPr>
             <a:r>
               <a:rPr lang="ru-RU" dirty="0">
-                <a:solidFill>
-                  <a:srgbClr val="333333"/>
-                </a:solidFill>
-                <a:highlight>
-                  <a:srgbClr val="FFFF00"/>
-                </a:highlight>
-                <a:latin typeface="Manrope Light"/>
-                <a:ea typeface="Manrope"/>
-                <a:cs typeface="Manrope"/>
+                <a:latin typeface="Manrope Light" panose="020B0604020202020204" charset="0"/>
                 <a:sym typeface="Manrope Light"/>
               </a:rPr>
-              <a:t>Этап </a:t>
-            </a:r>
-            <a:r>
-              <a:rPr lang="en-US" dirty="0">
-                <a:solidFill>
-                  <a:srgbClr val="333333"/>
-                </a:solidFill>
-                <a:highlight>
-                  <a:srgbClr val="FFFF00"/>
-                </a:highlight>
-                <a:latin typeface="Manrope Light"/>
-                <a:ea typeface="Manrope"/>
-                <a:cs typeface="Manrope"/>
-                <a:sym typeface="Manrope Light"/>
-              </a:rPr>
-              <a:t>X</a:t>
+              <a:t>Изучение материалов, планирование</a:t>
             </a:r>
             <a:endParaRPr dirty="0">
-              <a:highlight>
-                <a:srgbClr val="FFFF00"/>
-              </a:highlight>
-              <a:latin typeface="Manrope"/>
-              <a:ea typeface="Manrope"/>
-              <a:cs typeface="Manrope"/>
+              <a:latin typeface="Manrope Light" panose="020B0604020202020204" charset="0"/>
               <a:sym typeface="Manrope"/>
             </a:endParaRPr>
           </a:p>
@@ -10629,55 +10601,20 @@
           </a:bodyPr>
           <a:lstStyle/>
           <a:p>
-            <a:pPr marL="0" marR="0" lvl="0" indent="0" algn="l" rtl="0">
+            <a:pPr>
               <a:lnSpc>
                 <a:spcPct val="160000"/>
               </a:lnSpc>
-              <a:spcBef>
-                <a:spcPts val="0"/>
-              </a:spcBef>
-              <a:spcAft>
-                <a:spcPts val="0"/>
-              </a:spcAft>
-              <a:buNone/>
             </a:pPr>
             <a:r>
               <a:rPr lang="ru-RU" dirty="0">
-                <a:solidFill>
-                  <a:srgbClr val="333333"/>
-                </a:solidFill>
-                <a:highlight>
-                  <a:srgbClr val="FFFF00"/>
-                </a:highlight>
-                <a:latin typeface="Manrope Light"/>
-                <a:ea typeface="Manrope"/>
-                <a:cs typeface="Manrope"/>
+                <a:latin typeface="Manrope Light" panose="020B0604020202020204" charset="0"/>
                 <a:sym typeface="Manrope Light"/>
               </a:rPr>
-              <a:t>Этап </a:t>
-            </a:r>
-            <a:r>
-              <a:rPr lang="en-GB" dirty="0">
-                <a:solidFill>
-                  <a:srgbClr val="333333"/>
-                </a:solidFill>
-                <a:highlight>
-                  <a:srgbClr val="FFFF00"/>
-                </a:highlight>
-                <a:latin typeface="Manrope Light"/>
-                <a:ea typeface="Manrope"/>
-                <a:cs typeface="Manrope"/>
-                <a:sym typeface="Manrope Light"/>
-              </a:rPr>
-              <a:t>X</a:t>
+              <a:t>Разработка программы базового алгоритма</a:t>
             </a:r>
             <a:endParaRPr lang="en-GB" dirty="0">
-              <a:highlight>
-                <a:srgbClr val="FFFF00"/>
-              </a:highlight>
-              <a:latin typeface="Manrope"/>
-              <a:ea typeface="Manrope"/>
-              <a:cs typeface="Manrope"/>
+              <a:latin typeface="Manrope Light" panose="020B0604020202020204" charset="0"/>
               <a:sym typeface="Manrope"/>
             </a:endParaRPr>
           </a:p>
@@ -10708,55 +10645,22 @@
           </a:bodyPr>
           <a:lstStyle/>
           <a:p>
-            <a:pPr marL="0" marR="0" lvl="0" indent="0" algn="l" rtl="0">
+            <a:pPr marL="0" lvl="0" indent="0">
               <a:lnSpc>
                 <a:spcPct val="160000"/>
               </a:lnSpc>
-              <a:spcBef>
-                <a:spcPts val="0"/>
-              </a:spcBef>
-              <a:spcAft>
-                <a:spcPts val="0"/>
-              </a:spcAft>
+              <a:buFont typeface="Arial"/>
               <a:buNone/>
             </a:pPr>
             <a:r>
               <a:rPr lang="ru-RU" dirty="0">
-                <a:solidFill>
-                  <a:srgbClr val="333333"/>
-                </a:solidFill>
-                <a:highlight>
-                  <a:srgbClr val="FFFF00"/>
-                </a:highlight>
-                <a:latin typeface="Manrope Light"/>
-                <a:ea typeface="Manrope"/>
-                <a:cs typeface="Manrope"/>
+                <a:latin typeface="Manrope Light" panose="020B0604020202020204" charset="0"/>
                 <a:sym typeface="Manrope Light"/>
               </a:rPr>
-              <a:t>Этап </a:t>
-            </a:r>
-            <a:r>
-              <a:rPr lang="en-GB" dirty="0">
-                <a:solidFill>
-                  <a:srgbClr val="333333"/>
-                </a:solidFill>
-                <a:highlight>
-                  <a:srgbClr val="FFFF00"/>
-                </a:highlight>
-                <a:latin typeface="Manrope Light"/>
-                <a:ea typeface="Manrope"/>
-                <a:cs typeface="Manrope"/>
-                <a:sym typeface="Manrope Light"/>
-              </a:rPr>
-              <a:t>X</a:t>
+              <a:t>Имплементация алгоритмов-конкурентов</a:t>
             </a:r>
             <a:endParaRPr lang="en-GB" dirty="0">
-              <a:highlight>
-                <a:srgbClr val="FFFF00"/>
-              </a:highlight>
-              <a:latin typeface="Manrope"/>
-              <a:ea typeface="Manrope"/>
-              <a:cs typeface="Manrope"/>
+              <a:latin typeface="Manrope Light" panose="020B0604020202020204" charset="0"/>
               <a:sym typeface="Manrope"/>
             </a:endParaRPr>
           </a:p>
@@ -10787,55 +10691,20 @@
           </a:bodyPr>
           <a:lstStyle/>
           <a:p>
-            <a:pPr marL="0" marR="0" lvl="0" indent="0" algn="l" rtl="0">
+            <a:pPr>
               <a:lnSpc>
                 <a:spcPct val="160000"/>
               </a:lnSpc>
-              <a:spcBef>
-                <a:spcPts val="0"/>
-              </a:spcBef>
-              <a:spcAft>
-                <a:spcPts val="0"/>
-              </a:spcAft>
-              <a:buNone/>
             </a:pPr>
             <a:r>
               <a:rPr lang="ru-RU" dirty="0">
-                <a:solidFill>
-                  <a:srgbClr val="333333"/>
-                </a:solidFill>
-                <a:highlight>
-                  <a:srgbClr val="FFFF00"/>
-                </a:highlight>
-                <a:latin typeface="Manrope Light"/>
-                <a:ea typeface="Manrope"/>
-                <a:cs typeface="Manrope"/>
+                <a:latin typeface="Manrope Light" panose="020B0604020202020204" charset="0"/>
                 <a:sym typeface="Manrope Light"/>
               </a:rPr>
-              <a:t>Этап </a:t>
-            </a:r>
-            <a:r>
-              <a:rPr lang="en-GB" dirty="0">
-                <a:solidFill>
-                  <a:srgbClr val="333333"/>
-                </a:solidFill>
-                <a:highlight>
-                  <a:srgbClr val="FFFF00"/>
-                </a:highlight>
-                <a:latin typeface="Manrope Light"/>
-                <a:ea typeface="Manrope"/>
-                <a:cs typeface="Manrope"/>
-                <a:sym typeface="Manrope Light"/>
-              </a:rPr>
-              <a:t>X</a:t>
+              <a:t>Разработка новой модификации алгоритма</a:t>
             </a:r>
             <a:endParaRPr lang="en-GB" dirty="0">
-              <a:highlight>
-                <a:srgbClr val="FFFF00"/>
-              </a:highlight>
-              <a:latin typeface="Manrope"/>
-              <a:ea typeface="Manrope"/>
-              <a:cs typeface="Manrope"/>
+              <a:latin typeface="Manrope Light" panose="020B0604020202020204" charset="0"/>
               <a:sym typeface="Manrope"/>
             </a:endParaRPr>
           </a:p>
@@ -10866,55 +10735,22 @@
           </a:bodyPr>
           <a:lstStyle/>
           <a:p>
-            <a:pPr marL="0" marR="0" lvl="0" indent="0" algn="l" rtl="0">
+            <a:pPr marL="0" lvl="0" indent="0">
               <a:lnSpc>
                 <a:spcPct val="160000"/>
               </a:lnSpc>
-              <a:spcBef>
-                <a:spcPts val="0"/>
-              </a:spcBef>
-              <a:spcAft>
-                <a:spcPts val="0"/>
-              </a:spcAft>
+              <a:buFont typeface="Arial"/>
               <a:buNone/>
             </a:pPr>
             <a:r>
               <a:rPr lang="ru-RU" dirty="0">
-                <a:solidFill>
-                  <a:srgbClr val="333333"/>
-                </a:solidFill>
-                <a:highlight>
-                  <a:srgbClr val="FFFF00"/>
-                </a:highlight>
-                <a:latin typeface="Manrope Light"/>
-                <a:ea typeface="Manrope"/>
-                <a:cs typeface="Manrope"/>
+                <a:latin typeface="Manrope Light" panose="020B0604020202020204" charset="0"/>
                 <a:sym typeface="Manrope Light"/>
               </a:rPr>
-              <a:t>Этап </a:t>
-            </a:r>
-            <a:r>
-              <a:rPr lang="en-GB" dirty="0">
-                <a:solidFill>
-                  <a:srgbClr val="333333"/>
-                </a:solidFill>
-                <a:highlight>
-                  <a:srgbClr val="FFFF00"/>
-                </a:highlight>
-                <a:latin typeface="Manrope Light"/>
-                <a:ea typeface="Manrope"/>
-                <a:cs typeface="Manrope"/>
-                <a:sym typeface="Manrope Light"/>
-              </a:rPr>
-              <a:t>X</a:t>
+              <a:t>Сравнение алгоритмов, доработка модификации</a:t>
             </a:r>
             <a:endParaRPr lang="en-GB" dirty="0">
-              <a:highlight>
-                <a:srgbClr val="FFFF00"/>
-              </a:highlight>
-              <a:latin typeface="Manrope"/>
-              <a:ea typeface="Manrope"/>
-              <a:cs typeface="Manrope"/>
+              <a:latin typeface="Manrope Light" panose="020B0604020202020204" charset="0"/>
               <a:sym typeface="Manrope"/>
             </a:endParaRPr>
           </a:p>
@@ -11190,7 +11026,7 @@
               <a:buNone/>
             </a:pPr>
             <a:r>
-              <a:rPr lang="en" i="0" u="none" strike="noStrike" cap="none">
+              <a:rPr lang="en" i="0" u="none" strike="noStrike" cap="none" dirty="0">
                 <a:solidFill>
                   <a:srgbClr val="333333"/>
                 </a:solidFill>
@@ -11201,7 +11037,7 @@
               </a:rPr>
               <a:t>V</a:t>
             </a:r>
-            <a:endParaRPr>
+            <a:endParaRPr dirty="0">
               <a:latin typeface="Manrope"/>
               <a:ea typeface="Manrope"/>
               <a:cs typeface="Manrope"/>
@@ -11235,55 +11071,29 @@
           </a:bodyPr>
           <a:lstStyle/>
           <a:p>
-            <a:pPr marL="0" marR="0" lvl="0" indent="0" algn="r" rtl="0">
+            <a:pPr marL="0" lvl="0" indent="0" algn="r">
               <a:lnSpc>
                 <a:spcPct val="160000"/>
               </a:lnSpc>
-              <a:spcBef>
-                <a:spcPts val="0"/>
-              </a:spcBef>
-              <a:spcAft>
-                <a:spcPts val="0"/>
-              </a:spcAft>
+              <a:buFont typeface="Arial"/>
               <a:buNone/>
             </a:pPr>
             <a:r>
-              <a:rPr lang="ru-RU" dirty="0">
-                <a:solidFill>
-                  <a:srgbClr val="333333"/>
-                </a:solidFill>
-                <a:highlight>
-                  <a:srgbClr val="FFFF00"/>
-                </a:highlight>
-                <a:latin typeface="Manrope Medium"/>
-                <a:ea typeface="Manrope"/>
-                <a:cs typeface="Manrope"/>
+              <a:rPr lang="en-US" dirty="0">
+                <a:latin typeface="Manrope Light" panose="020B0604020202020204" charset="0"/>
                 <a:sym typeface="Manrope Medium"/>
               </a:rPr>
-              <a:t>Дата </a:t>
+              <a:t>7</a:t>
             </a:r>
             <a:r>
-              <a:rPr lang="en-US" dirty="0">
-                <a:solidFill>
-                  <a:srgbClr val="333333"/>
-                </a:solidFill>
-                <a:highlight>
-                  <a:srgbClr val="FFFF00"/>
-                </a:highlight>
-                <a:latin typeface="Manrope Medium"/>
-                <a:ea typeface="Manrope"/>
-                <a:cs typeface="Manrope"/>
+              <a:rPr lang="ru-RU" dirty="0">
+                <a:latin typeface="Manrope Light" panose="020B0604020202020204" charset="0"/>
                 <a:sym typeface="Manrope Medium"/>
               </a:rPr>
-              <a:t>X</a:t>
+              <a:t>.05</a:t>
             </a:r>
             <a:endParaRPr dirty="0">
-              <a:highlight>
-                <a:srgbClr val="FFFF00"/>
-              </a:highlight>
-              <a:latin typeface="Manrope"/>
-              <a:ea typeface="Manrope"/>
-              <a:cs typeface="Manrope"/>
+              <a:latin typeface="Manrope Light" panose="020B0604020202020204" charset="0"/>
               <a:sym typeface="Manrope"/>
             </a:endParaRPr>
           </a:p>
@@ -11321,41 +11131,13 @@
             </a:pPr>
             <a:r>
               <a:rPr lang="ru-RU" dirty="0">
-                <a:solidFill>
-                  <a:srgbClr val="333333"/>
-                </a:solidFill>
-                <a:highlight>
-                  <a:srgbClr val="FFFF00"/>
-                </a:highlight>
-                <a:latin typeface="Manrope Medium"/>
-                <a:ea typeface="Manrope"/>
-                <a:cs typeface="Manrope"/>
+                <a:latin typeface="Manrope Light" panose="020B0604020202020204" charset="0"/>
                 <a:sym typeface="Manrope Medium"/>
               </a:rPr>
-              <a:t>Дата </a:t>
-            </a:r>
-            <a:r>
-              <a:rPr lang="en-GB" dirty="0">
-                <a:solidFill>
-                  <a:srgbClr val="333333"/>
-                </a:solidFill>
-                <a:highlight>
-                  <a:srgbClr val="FFFF00"/>
-                </a:highlight>
-                <a:latin typeface="Manrope Medium"/>
-                <a:ea typeface="Manrope"/>
-                <a:cs typeface="Manrope"/>
-                <a:sym typeface="Manrope Medium"/>
-              </a:rPr>
-              <a:t>X</a:t>
+              <a:t>14.05</a:t>
             </a:r>
             <a:endParaRPr lang="en-GB" dirty="0">
-              <a:highlight>
-                <a:srgbClr val="FFFF00"/>
-              </a:highlight>
-              <a:latin typeface="Manrope"/>
-              <a:ea typeface="Manrope"/>
-              <a:cs typeface="Manrope"/>
+              <a:latin typeface="Manrope Light" panose="020B0604020202020204" charset="0"/>
               <a:sym typeface="Manrope"/>
             </a:endParaRPr>
           </a:p>
@@ -11389,7 +11171,106 @@
         </p:nvSpPr>
         <p:spPr>
           <a:xfrm>
-            <a:off x="8083177" y="2508897"/>
+            <a:off x="8905875" y="2147338"/>
+            <a:ext cx="670298" cy="344710"/>
+          </a:xfrm>
+          <a:prstGeom prst="rect">
+            <a:avLst/>
+          </a:prstGeom>
+          <a:noFill/>
+          <a:ln>
+            <a:noFill/>
+          </a:ln>
+        </p:spPr>
+        <p:txBody>
+          <a:bodyPr spcFirstLastPara="1" wrap="square" lIns="0" tIns="0" rIns="0" bIns="0" anchor="t" anchorCtr="0">
+            <a:spAutoFit/>
+          </a:bodyPr>
+          <a:lstStyle/>
+          <a:p>
+            <a:pPr marL="0" marR="0" lvl="0" indent="0" algn="r" rtl="0">
+              <a:lnSpc>
+                <a:spcPct val="160000"/>
+              </a:lnSpc>
+              <a:spcBef>
+                <a:spcPts val="0"/>
+              </a:spcBef>
+              <a:spcAft>
+                <a:spcPts val="0"/>
+              </a:spcAft>
+              <a:buNone/>
+            </a:pPr>
+            <a:r>
+              <a:rPr lang="ru-RU" dirty="0" smtClean="0">
+                <a:latin typeface="Manrope"/>
+                <a:ea typeface="Manrope"/>
+                <a:cs typeface="Manrope"/>
+                <a:sym typeface="Manrope"/>
+              </a:rPr>
+              <a:t>21.05</a:t>
+            </a:r>
+            <a:endParaRPr dirty="0">
+              <a:latin typeface="Manrope"/>
+              <a:ea typeface="Manrope"/>
+              <a:cs typeface="Manrope"/>
+              <a:sym typeface="Manrope"/>
+            </a:endParaRPr>
+          </a:p>
+        </p:txBody>
+      </p:sp>
+      <p:sp>
+        <p:nvSpPr>
+          <p:cNvPr id="276" name="Google Shape;276;p58"/>
+          <p:cNvSpPr txBox="1"/>
+          <p:nvPr/>
+        </p:nvSpPr>
+        <p:spPr>
+          <a:xfrm>
+            <a:off x="8083177" y="2495023"/>
+            <a:ext cx="670298" cy="344710"/>
+          </a:xfrm>
+          <a:prstGeom prst="rect">
+            <a:avLst/>
+          </a:prstGeom>
+          <a:noFill/>
+          <a:ln>
+            <a:noFill/>
+          </a:ln>
+        </p:spPr>
+        <p:txBody>
+          <a:bodyPr spcFirstLastPara="1" wrap="square" lIns="0" tIns="0" rIns="0" bIns="0" anchor="t" anchorCtr="0">
+            <a:spAutoFit/>
+          </a:bodyPr>
+          <a:lstStyle/>
+          <a:p>
+            <a:pPr algn="r">
+              <a:lnSpc>
+                <a:spcPct val="160000"/>
+              </a:lnSpc>
+            </a:pPr>
+            <a:r>
+              <a:rPr lang="ru-RU" dirty="0">
+                <a:latin typeface="Manrope Light" panose="020B0604020202020204" charset="0"/>
+                <a:sym typeface="Manrope Medium"/>
+              </a:rPr>
+              <a:t>28.05</a:t>
+            </a:r>
+            <a:endParaRPr dirty="0">
+              <a:latin typeface="Manrope Light" panose="020B0604020202020204" charset="0"/>
+              <a:sym typeface="Manrope"/>
+            </a:endParaRPr>
+          </a:p>
+        </p:txBody>
+      </p:sp>
+      <p:sp>
+        <p:nvSpPr>
+          <p:cNvPr id="277" name="Google Shape;277;p58"/>
+          <p:cNvSpPr txBox="1"/>
+          <p:nvPr/>
+        </p:nvSpPr>
+        <p:spPr>
+          <a:xfrm>
+            <a:off x="8905875" y="2775119"/>
             <a:ext cx="670298" cy="689420"/>
           </a:xfrm>
           <a:prstGeom prst="rect">
@@ -11412,7 +11293,7 @@
               </a:lnSpc>
             </a:pPr>
             <a:r>
-              <a:rPr lang="ru-RU" dirty="0">
+              <a:rPr lang="ru-RU" dirty="0" smtClean="0">
                 <a:solidFill>
                   <a:srgbClr val="333333"/>
                 </a:solidFill>
@@ -11424,206 +11305,7 @@
                 <a:cs typeface="Manrope"/>
                 <a:sym typeface="Manrope Medium"/>
               </a:rPr>
-              <a:t>Дата </a:t>
-            </a:r>
-            <a:r>
-              <a:rPr lang="en-GB" dirty="0">
-                <a:solidFill>
-                  <a:srgbClr val="333333"/>
-                </a:solidFill>
-                <a:highlight>
-                  <a:srgbClr val="FFFF00"/>
-                </a:highlight>
-                <a:latin typeface="Manrope Medium"/>
-                <a:ea typeface="Manrope"/>
-                <a:cs typeface="Manrope"/>
-                <a:sym typeface="Manrope Medium"/>
-              </a:rPr>
-              <a:t>X</a:t>
-            </a:r>
-            <a:endParaRPr lang="en-GB" dirty="0">
-              <a:highlight>
-                <a:srgbClr val="FFFF00"/>
-              </a:highlight>
-              <a:latin typeface="Manrope"/>
-              <a:ea typeface="Manrope"/>
-              <a:cs typeface="Manrope"/>
-              <a:sym typeface="Manrope"/>
-            </a:endParaRPr>
-          </a:p>
-          <a:p>
-            <a:pPr marL="0" marR="0" lvl="0" indent="0" algn="r" rtl="0">
-              <a:lnSpc>
-                <a:spcPct val="160000"/>
-              </a:lnSpc>
-              <a:spcBef>
-                <a:spcPts val="0"/>
-              </a:spcBef>
-              <a:spcAft>
-                <a:spcPts val="0"/>
-              </a:spcAft>
-              <a:buNone/>
-            </a:pPr>
-            <a:endParaRPr dirty="0">
-              <a:latin typeface="Manrope"/>
-              <a:ea typeface="Manrope"/>
-              <a:cs typeface="Manrope"/>
-              <a:sym typeface="Manrope"/>
-            </a:endParaRPr>
-          </a:p>
-        </p:txBody>
-      </p:sp>
-      <p:sp>
-        <p:nvSpPr>
-          <p:cNvPr id="276" name="Google Shape;276;p58"/>
-          <p:cNvSpPr txBox="1"/>
-          <p:nvPr/>
-        </p:nvSpPr>
-        <p:spPr>
-          <a:xfrm>
-            <a:off x="8083177" y="3151147"/>
-            <a:ext cx="670298" cy="689420"/>
-          </a:xfrm>
-          <a:prstGeom prst="rect">
-            <a:avLst/>
-          </a:prstGeom>
-          <a:noFill/>
-          <a:ln>
-            <a:noFill/>
-          </a:ln>
-        </p:spPr>
-        <p:txBody>
-          <a:bodyPr spcFirstLastPara="1" wrap="square" lIns="0" tIns="0" rIns="0" bIns="0" anchor="t" anchorCtr="0">
-            <a:spAutoFit/>
-          </a:bodyPr>
-          <a:lstStyle/>
-          <a:p>
-            <a:pPr algn="r">
-              <a:lnSpc>
-                <a:spcPct val="160000"/>
-              </a:lnSpc>
-            </a:pPr>
-            <a:r>
-              <a:rPr lang="ru-RU" dirty="0">
-                <a:solidFill>
-                  <a:srgbClr val="333333"/>
-                </a:solidFill>
-                <a:highlight>
-                  <a:srgbClr val="FFFF00"/>
-                </a:highlight>
-                <a:latin typeface="Manrope Medium"/>
-                <a:ea typeface="Manrope"/>
-                <a:cs typeface="Manrope"/>
-                <a:sym typeface="Manrope Medium"/>
-              </a:rPr>
-              <a:t>Дата </a:t>
-            </a:r>
-            <a:r>
-              <a:rPr lang="en-GB" dirty="0">
-                <a:solidFill>
-                  <a:srgbClr val="333333"/>
-                </a:solidFill>
-                <a:highlight>
-                  <a:srgbClr val="FFFF00"/>
-                </a:highlight>
-                <a:latin typeface="Manrope Medium"/>
-                <a:ea typeface="Manrope"/>
-                <a:cs typeface="Manrope"/>
-                <a:sym typeface="Manrope Medium"/>
-              </a:rPr>
-              <a:t>X</a:t>
-            </a:r>
-            <a:endParaRPr lang="en-GB" dirty="0">
-              <a:highlight>
-                <a:srgbClr val="FFFF00"/>
-              </a:highlight>
-              <a:latin typeface="Manrope"/>
-              <a:ea typeface="Manrope"/>
-              <a:cs typeface="Manrope"/>
-              <a:sym typeface="Manrope"/>
-            </a:endParaRPr>
-          </a:p>
-          <a:p>
-            <a:pPr marL="0" marR="0" lvl="0" indent="0" algn="r" rtl="0">
-              <a:lnSpc>
-                <a:spcPct val="160000"/>
-              </a:lnSpc>
-              <a:spcBef>
-                <a:spcPts val="0"/>
-              </a:spcBef>
-              <a:spcAft>
-                <a:spcPts val="0"/>
-              </a:spcAft>
-              <a:buNone/>
-            </a:pPr>
-            <a:endParaRPr dirty="0">
-              <a:latin typeface="Manrope"/>
-              <a:ea typeface="Manrope"/>
-              <a:cs typeface="Manrope"/>
-              <a:sym typeface="Manrope"/>
-            </a:endParaRPr>
-          </a:p>
-        </p:txBody>
-      </p:sp>
-      <p:sp>
-        <p:nvSpPr>
-          <p:cNvPr id="277" name="Google Shape;277;p58"/>
-          <p:cNvSpPr txBox="1"/>
-          <p:nvPr/>
-        </p:nvSpPr>
-        <p:spPr>
-          <a:xfrm>
-            <a:off x="8083177" y="3793397"/>
-            <a:ext cx="670298" cy="689420"/>
-          </a:xfrm>
-          <a:prstGeom prst="rect">
-            <a:avLst/>
-          </a:prstGeom>
-          <a:noFill/>
-          <a:ln>
-            <a:noFill/>
-          </a:ln>
-        </p:spPr>
-        <p:txBody>
-          <a:bodyPr spcFirstLastPara="1" wrap="square" lIns="0" tIns="0" rIns="0" bIns="0" anchor="t" anchorCtr="0">
-            <a:spAutoFit/>
-          </a:bodyPr>
-          <a:lstStyle/>
-          <a:p>
-            <a:pPr algn="r">
-              <a:lnSpc>
-                <a:spcPct val="160000"/>
-              </a:lnSpc>
-            </a:pPr>
-            <a:r>
-              <a:rPr lang="ru-RU" dirty="0">
-                <a:solidFill>
-                  <a:srgbClr val="333333"/>
-                </a:solidFill>
-                <a:highlight>
-                  <a:srgbClr val="FFFF00"/>
-                </a:highlight>
-                <a:latin typeface="Manrope Medium"/>
-                <a:ea typeface="Manrope"/>
-                <a:cs typeface="Manrope"/>
-                <a:sym typeface="Manrope Medium"/>
-              </a:rPr>
-              <a:t>Дата </a:t>
-            </a:r>
-            <a:r>
-              <a:rPr lang="en-GB" dirty="0">
-                <a:solidFill>
-                  <a:srgbClr val="333333"/>
-                </a:solidFill>
-                <a:highlight>
-                  <a:srgbClr val="FFFF00"/>
-                </a:highlight>
-                <a:latin typeface="Manrope Medium"/>
-                <a:ea typeface="Manrope"/>
-                <a:cs typeface="Manrope"/>
-                <a:sym typeface="Manrope Medium"/>
-              </a:rPr>
-              <a:t>X</a:t>
+              <a:t>4.06</a:t>
             </a:r>
             <a:endParaRPr lang="en-GB" dirty="0">
               <a:highlight>
@@ -11715,11 +11397,543 @@
           </a:p>
         </p:txBody>
       </p:sp>
+      <p:sp>
+        <p:nvSpPr>
+          <p:cNvPr id="19" name="Google Shape;277;p58"/>
+          <p:cNvSpPr txBox="1"/>
+          <p:nvPr/>
+        </p:nvSpPr>
+        <p:spPr>
+          <a:xfrm>
+            <a:off x="8083177" y="3103977"/>
+            <a:ext cx="670298" cy="689420"/>
+          </a:xfrm>
+          <a:prstGeom prst="rect">
+            <a:avLst/>
+          </a:prstGeom>
+          <a:noFill/>
+          <a:ln>
+            <a:noFill/>
+          </a:ln>
+        </p:spPr>
+        <p:txBody>
+          <a:bodyPr spcFirstLastPara="1" wrap="square" lIns="0" tIns="0" rIns="0" bIns="0" anchor="t" anchorCtr="0">
+            <a:spAutoFit/>
+          </a:bodyPr>
+          <a:lstStyle/>
+          <a:p>
+            <a:pPr algn="r">
+              <a:lnSpc>
+                <a:spcPct val="160000"/>
+              </a:lnSpc>
+            </a:pPr>
+            <a:r>
+              <a:rPr lang="ru-RU" dirty="0">
+                <a:latin typeface="Manrope Light" panose="020B0604020202020204" charset="0"/>
+                <a:sym typeface="Manrope Medium"/>
+              </a:rPr>
+              <a:t>11.06</a:t>
+            </a:r>
+            <a:endParaRPr lang="en-GB" dirty="0">
+              <a:latin typeface="Manrope Light" panose="020B0604020202020204" charset="0"/>
+              <a:sym typeface="Manrope"/>
+            </a:endParaRPr>
+          </a:p>
+          <a:p>
+            <a:pPr marL="0" marR="0" lvl="0" indent="0" algn="r" rtl="0">
+              <a:lnSpc>
+                <a:spcPct val="160000"/>
+              </a:lnSpc>
+              <a:spcBef>
+                <a:spcPts val="0"/>
+              </a:spcBef>
+              <a:spcAft>
+                <a:spcPts val="0"/>
+              </a:spcAft>
+              <a:buNone/>
+            </a:pPr>
+            <a:endParaRPr dirty="0">
+              <a:latin typeface="Manrope"/>
+              <a:ea typeface="Manrope"/>
+              <a:cs typeface="Manrope"/>
+              <a:sym typeface="Manrope"/>
+            </a:endParaRPr>
+          </a:p>
+        </p:txBody>
+      </p:sp>
+      <p:sp>
+        <p:nvSpPr>
+          <p:cNvPr id="20" name="Google Shape;277;p58"/>
+          <p:cNvSpPr txBox="1"/>
+          <p:nvPr/>
+        </p:nvSpPr>
+        <p:spPr>
+          <a:xfrm>
+            <a:off x="8937381" y="3440491"/>
+            <a:ext cx="670298" cy="689420"/>
+          </a:xfrm>
+          <a:prstGeom prst="rect">
+            <a:avLst/>
+          </a:prstGeom>
+          <a:noFill/>
+          <a:ln>
+            <a:noFill/>
+          </a:ln>
+        </p:spPr>
+        <p:txBody>
+          <a:bodyPr spcFirstLastPara="1" wrap="square" lIns="0" tIns="0" rIns="0" bIns="0" anchor="t" anchorCtr="0">
+            <a:spAutoFit/>
+          </a:bodyPr>
+          <a:lstStyle/>
+          <a:p>
+            <a:pPr algn="r">
+              <a:lnSpc>
+                <a:spcPct val="160000"/>
+              </a:lnSpc>
+            </a:pPr>
+            <a:r>
+              <a:rPr lang="ru-RU" dirty="0" smtClean="0">
+                <a:solidFill>
+                  <a:srgbClr val="333333"/>
+                </a:solidFill>
+                <a:highlight>
+                  <a:srgbClr val="FFFF00"/>
+                </a:highlight>
+                <a:latin typeface="Manrope Medium"/>
+                <a:ea typeface="Manrope"/>
+                <a:cs typeface="Manrope"/>
+                <a:sym typeface="Manrope Medium"/>
+              </a:rPr>
+              <a:t>18.06</a:t>
+            </a:r>
+            <a:endParaRPr lang="en-GB" dirty="0">
+              <a:highlight>
+                <a:srgbClr val="FFFF00"/>
+              </a:highlight>
+              <a:latin typeface="Manrope"/>
+              <a:ea typeface="Manrope"/>
+              <a:cs typeface="Manrope"/>
+              <a:sym typeface="Manrope"/>
+            </a:endParaRPr>
+          </a:p>
+          <a:p>
+            <a:pPr marL="0" marR="0" lvl="0" indent="0" algn="r" rtl="0">
+              <a:lnSpc>
+                <a:spcPct val="160000"/>
+              </a:lnSpc>
+              <a:spcBef>
+                <a:spcPts val="0"/>
+              </a:spcBef>
+              <a:spcAft>
+                <a:spcPts val="0"/>
+              </a:spcAft>
+              <a:buNone/>
+            </a:pPr>
+            <a:endParaRPr dirty="0">
+              <a:latin typeface="Manrope"/>
+              <a:ea typeface="Manrope"/>
+              <a:cs typeface="Manrope"/>
+              <a:sym typeface="Manrope"/>
+            </a:endParaRPr>
+          </a:p>
+        </p:txBody>
+      </p:sp>
+      <p:sp>
+        <p:nvSpPr>
+          <p:cNvPr id="21" name="Google Shape;277;p58"/>
+          <p:cNvSpPr txBox="1"/>
+          <p:nvPr/>
+        </p:nvSpPr>
+        <p:spPr>
+          <a:xfrm>
+            <a:off x="9013752" y="3722447"/>
+            <a:ext cx="670298" cy="689420"/>
+          </a:xfrm>
+          <a:prstGeom prst="rect">
+            <a:avLst/>
+          </a:prstGeom>
+          <a:noFill/>
+          <a:ln>
+            <a:noFill/>
+          </a:ln>
+        </p:spPr>
+        <p:txBody>
+          <a:bodyPr spcFirstLastPara="1" wrap="square" lIns="0" tIns="0" rIns="0" bIns="0" anchor="t" anchorCtr="0">
+            <a:spAutoFit/>
+          </a:bodyPr>
+          <a:lstStyle/>
+          <a:p>
+            <a:pPr algn="r">
+              <a:lnSpc>
+                <a:spcPct val="160000"/>
+              </a:lnSpc>
+            </a:pPr>
+            <a:r>
+              <a:rPr lang="ru-RU" dirty="0" smtClean="0">
+                <a:solidFill>
+                  <a:srgbClr val="333333"/>
+                </a:solidFill>
+                <a:highlight>
+                  <a:srgbClr val="FFFF00"/>
+                </a:highlight>
+                <a:latin typeface="Manrope Medium"/>
+                <a:ea typeface="Manrope"/>
+                <a:cs typeface="Manrope"/>
+                <a:sym typeface="Manrope Medium"/>
+              </a:rPr>
+              <a:t>25.06</a:t>
+            </a:r>
+            <a:endParaRPr lang="en-GB" dirty="0">
+              <a:highlight>
+                <a:srgbClr val="FFFF00"/>
+              </a:highlight>
+              <a:latin typeface="Manrope"/>
+              <a:ea typeface="Manrope"/>
+              <a:cs typeface="Manrope"/>
+              <a:sym typeface="Manrope"/>
+            </a:endParaRPr>
+          </a:p>
+          <a:p>
+            <a:pPr marL="0" marR="0" lvl="0" indent="0" algn="r" rtl="0">
+              <a:lnSpc>
+                <a:spcPct val="160000"/>
+              </a:lnSpc>
+              <a:spcBef>
+                <a:spcPts val="0"/>
+              </a:spcBef>
+              <a:spcAft>
+                <a:spcPts val="0"/>
+              </a:spcAft>
+              <a:buNone/>
+            </a:pPr>
+            <a:endParaRPr dirty="0">
+              <a:latin typeface="Manrope"/>
+              <a:ea typeface="Manrope"/>
+              <a:cs typeface="Manrope"/>
+              <a:sym typeface="Manrope"/>
+            </a:endParaRPr>
+          </a:p>
+        </p:txBody>
+      </p:sp>
+      <p:sp>
+        <p:nvSpPr>
+          <p:cNvPr id="22" name="Google Shape;272;p58"/>
+          <p:cNvSpPr txBox="1"/>
+          <p:nvPr/>
+        </p:nvSpPr>
+        <p:spPr>
+          <a:xfrm>
+            <a:off x="2400055" y="4359822"/>
+            <a:ext cx="341100" cy="344710"/>
+          </a:xfrm>
+          <a:prstGeom prst="rect">
+            <a:avLst/>
+          </a:prstGeom>
+          <a:noFill/>
+          <a:ln>
+            <a:noFill/>
+          </a:ln>
+        </p:spPr>
+        <p:txBody>
+          <a:bodyPr spcFirstLastPara="1" wrap="square" lIns="0" tIns="0" rIns="0" bIns="0" anchor="t" anchorCtr="0">
+            <a:spAutoFit/>
+          </a:bodyPr>
+          <a:lstStyle/>
+          <a:p>
+            <a:pPr marL="0" marR="0" lvl="0" indent="0" algn="l" rtl="0">
+              <a:lnSpc>
+                <a:spcPct val="160000"/>
+              </a:lnSpc>
+              <a:spcBef>
+                <a:spcPts val="0"/>
+              </a:spcBef>
+              <a:spcAft>
+                <a:spcPts val="0"/>
+              </a:spcAft>
+              <a:buNone/>
+            </a:pPr>
+            <a:r>
+              <a:rPr lang="en-US" dirty="0" smtClean="0">
+                <a:solidFill>
+                  <a:srgbClr val="333333"/>
+                </a:solidFill>
+                <a:latin typeface="Manrope Medium"/>
+                <a:ea typeface="Manrope"/>
+                <a:cs typeface="Manrope"/>
+                <a:sym typeface="Manrope Medium"/>
+              </a:rPr>
+              <a:t>VI</a:t>
+            </a:r>
+            <a:endParaRPr dirty="0">
+              <a:latin typeface="Manrope"/>
+              <a:ea typeface="Manrope"/>
+              <a:cs typeface="Manrope"/>
+              <a:sym typeface="Manrope"/>
+            </a:endParaRPr>
+          </a:p>
+        </p:txBody>
+      </p:sp>
+      <p:sp>
+        <p:nvSpPr>
+          <p:cNvPr id="23" name="Google Shape;267;p58"/>
+          <p:cNvSpPr txBox="1"/>
+          <p:nvPr/>
+        </p:nvSpPr>
+        <p:spPr>
+          <a:xfrm>
+            <a:off x="3082354" y="4365466"/>
+            <a:ext cx="4240800" cy="344710"/>
+          </a:xfrm>
+          <a:prstGeom prst="rect">
+            <a:avLst/>
+          </a:prstGeom>
+          <a:noFill/>
+          <a:ln>
+            <a:noFill/>
+          </a:ln>
+        </p:spPr>
+        <p:txBody>
+          <a:bodyPr spcFirstLastPara="1" wrap="square" lIns="0" tIns="0" rIns="0" bIns="0" anchor="t" anchorCtr="0">
+            <a:spAutoFit/>
+          </a:bodyPr>
+          <a:lstStyle/>
+          <a:p>
+            <a:pPr>
+              <a:lnSpc>
+                <a:spcPct val="160000"/>
+              </a:lnSpc>
+            </a:pPr>
+            <a:r>
+              <a:rPr lang="ru-RU" dirty="0">
+                <a:latin typeface="Manrope Light" panose="020B0604020202020204" charset="0"/>
+                <a:sym typeface="Manrope"/>
+              </a:rPr>
+              <a:t>Оценка экспериментальных данных</a:t>
+            </a:r>
+            <a:endParaRPr lang="en-GB" dirty="0">
+              <a:latin typeface="Manrope Light" panose="020B0604020202020204" charset="0"/>
+              <a:sym typeface="Manrope"/>
+            </a:endParaRPr>
+          </a:p>
+        </p:txBody>
+      </p:sp>
+      <p:sp>
+        <p:nvSpPr>
+          <p:cNvPr id="24" name="Google Shape;277;p58"/>
+          <p:cNvSpPr txBox="1"/>
+          <p:nvPr/>
+        </p:nvSpPr>
+        <p:spPr>
+          <a:xfrm>
+            <a:off x="8073753" y="3793397"/>
+            <a:ext cx="670298" cy="689420"/>
+          </a:xfrm>
+          <a:prstGeom prst="rect">
+            <a:avLst/>
+          </a:prstGeom>
+          <a:noFill/>
+          <a:ln>
+            <a:noFill/>
+          </a:ln>
+        </p:spPr>
+        <p:txBody>
+          <a:bodyPr spcFirstLastPara="1" wrap="square" lIns="0" tIns="0" rIns="0" bIns="0" anchor="t" anchorCtr="0">
+            <a:spAutoFit/>
+          </a:bodyPr>
+          <a:lstStyle/>
+          <a:p>
+            <a:pPr algn="r">
+              <a:lnSpc>
+                <a:spcPct val="160000"/>
+              </a:lnSpc>
+            </a:pPr>
+            <a:r>
+              <a:rPr lang="ru-RU" dirty="0">
+                <a:latin typeface="Manrope Light" panose="020B0604020202020204" charset="0"/>
+                <a:sym typeface="Manrope Medium"/>
+              </a:rPr>
+              <a:t>02.07</a:t>
+            </a:r>
+            <a:endParaRPr lang="en-GB" dirty="0">
+              <a:latin typeface="Manrope Light" panose="020B0604020202020204" charset="0"/>
+              <a:sym typeface="Manrope"/>
+            </a:endParaRPr>
+          </a:p>
+          <a:p>
+            <a:pPr marL="0" marR="0" lvl="0" indent="0" algn="r" rtl="0">
+              <a:lnSpc>
+                <a:spcPct val="160000"/>
+              </a:lnSpc>
+              <a:spcBef>
+                <a:spcPts val="0"/>
+              </a:spcBef>
+              <a:spcAft>
+                <a:spcPts val="0"/>
+              </a:spcAft>
+              <a:buNone/>
+            </a:pPr>
+            <a:endParaRPr dirty="0">
+              <a:latin typeface="Manrope"/>
+              <a:ea typeface="Manrope"/>
+              <a:cs typeface="Manrope"/>
+              <a:sym typeface="Manrope"/>
+            </a:endParaRPr>
+          </a:p>
+        </p:txBody>
+      </p:sp>
+      <p:sp>
+        <p:nvSpPr>
+          <p:cNvPr id="25" name="Google Shape;277;p58"/>
+          <p:cNvSpPr txBox="1"/>
+          <p:nvPr/>
+        </p:nvSpPr>
+        <p:spPr>
+          <a:xfrm>
+            <a:off x="8042247" y="4359822"/>
+            <a:ext cx="670298" cy="689420"/>
+          </a:xfrm>
+          <a:prstGeom prst="rect">
+            <a:avLst/>
+          </a:prstGeom>
+          <a:noFill/>
+          <a:ln>
+            <a:noFill/>
+          </a:ln>
+        </p:spPr>
+        <p:txBody>
+          <a:bodyPr spcFirstLastPara="1" wrap="square" lIns="0" tIns="0" rIns="0" bIns="0" anchor="t" anchorCtr="0">
+            <a:spAutoFit/>
+          </a:bodyPr>
+          <a:lstStyle/>
+          <a:p>
+            <a:pPr algn="r">
+              <a:lnSpc>
+                <a:spcPct val="160000"/>
+              </a:lnSpc>
+            </a:pPr>
+            <a:r>
+              <a:rPr lang="ru-RU" dirty="0">
+                <a:latin typeface="Manrope Light" panose="020B0604020202020204" charset="0"/>
+                <a:sym typeface="Manrope Medium"/>
+              </a:rPr>
+              <a:t>16.07</a:t>
+            </a:r>
+            <a:endParaRPr lang="en-GB" dirty="0">
+              <a:latin typeface="Manrope Light" panose="020B0604020202020204" charset="0"/>
+              <a:sym typeface="Manrope"/>
+            </a:endParaRPr>
+          </a:p>
+          <a:p>
+            <a:pPr marL="0" marR="0" lvl="0" indent="0" algn="r" rtl="0">
+              <a:lnSpc>
+                <a:spcPct val="160000"/>
+              </a:lnSpc>
+              <a:spcBef>
+                <a:spcPts val="0"/>
+              </a:spcBef>
+              <a:spcAft>
+                <a:spcPts val="0"/>
+              </a:spcAft>
+              <a:buNone/>
+            </a:pPr>
+            <a:endParaRPr dirty="0">
+              <a:latin typeface="Manrope"/>
+              <a:ea typeface="Manrope"/>
+              <a:cs typeface="Manrope"/>
+              <a:sym typeface="Manrope"/>
+            </a:endParaRPr>
+          </a:p>
+        </p:txBody>
+      </p:sp>
+      <p:sp>
+        <p:nvSpPr>
+          <p:cNvPr id="26" name="Google Shape;277;p58"/>
+          <p:cNvSpPr txBox="1"/>
+          <p:nvPr/>
+        </p:nvSpPr>
+        <p:spPr>
+          <a:xfrm>
+            <a:off x="9001354" y="4273020"/>
+            <a:ext cx="670298" cy="689420"/>
+          </a:xfrm>
+          <a:prstGeom prst="rect">
+            <a:avLst/>
+          </a:prstGeom>
+          <a:noFill/>
+          <a:ln>
+            <a:noFill/>
+          </a:ln>
+        </p:spPr>
+        <p:txBody>
+          <a:bodyPr spcFirstLastPara="1" wrap="square" lIns="0" tIns="0" rIns="0" bIns="0" anchor="t" anchorCtr="0">
+            <a:spAutoFit/>
+          </a:bodyPr>
+          <a:lstStyle/>
+          <a:p>
+            <a:pPr algn="r">
+              <a:lnSpc>
+                <a:spcPct val="160000"/>
+              </a:lnSpc>
+            </a:pPr>
+            <a:r>
+              <a:rPr lang="ru-RU" dirty="0" smtClean="0">
+                <a:solidFill>
+                  <a:srgbClr val="333333"/>
+                </a:solidFill>
+                <a:highlight>
+                  <a:srgbClr val="FFFF00"/>
+                </a:highlight>
+                <a:latin typeface="Manrope Medium"/>
+                <a:ea typeface="Manrope"/>
+                <a:cs typeface="Manrope"/>
+                <a:sym typeface="Manrope Medium"/>
+              </a:rPr>
+              <a:t>-09.07</a:t>
+            </a:r>
+            <a:endParaRPr lang="en-GB" dirty="0">
+              <a:highlight>
+                <a:srgbClr val="FFFF00"/>
+              </a:highlight>
+              <a:latin typeface="Manrope"/>
+              <a:ea typeface="Manrope"/>
+              <a:cs typeface="Manrope"/>
+              <a:sym typeface="Manrope"/>
+            </a:endParaRPr>
+          </a:p>
+          <a:p>
+            <a:pPr marL="0" marR="0" lvl="0" indent="0" algn="r" rtl="0">
+              <a:lnSpc>
+                <a:spcPct val="160000"/>
+              </a:lnSpc>
+              <a:spcBef>
+                <a:spcPts val="0"/>
+              </a:spcBef>
+              <a:spcAft>
+                <a:spcPts val="0"/>
+              </a:spcAft>
+              <a:buNone/>
+            </a:pPr>
+            <a:endParaRPr dirty="0">
+              <a:latin typeface="Manrope"/>
+              <a:ea typeface="Manrope"/>
+              <a:cs typeface="Manrope"/>
+              <a:sym typeface="Manrope"/>
+            </a:endParaRPr>
+          </a:p>
+        </p:txBody>
+      </p:sp>
     </p:spTree>
   </p:cSld>
   <p:clrMapOvr>
     <a:masterClrMapping/>
   </p:clrMapOvr>
+  <p:timing>
+    <p:tnLst>
+      <p:par>
+        <p:cTn id="1" dur="indefinite" restart="never" nodeType="tmRoot"/>
+      </p:par>
+    </p:tnLst>
+  </p:timing>
 </p:sld>
 </file>
 

--- a/materials/Презентация.pptx
+++ b/materials/Презентация.pptx
@@ -24,12 +24,12 @@
   <p:notesSz cx="6858000" cy="9144000"/>
   <p:embeddedFontLst>
     <p:embeddedFont>
-      <p:font typeface="Manrope Light" panose="020B0604020202020204" charset="0"/>
+      <p:font typeface="Manrope" panose="020B0604020202020204" charset="0"/>
       <p:regular r:id="rId14"/>
       <p:bold r:id="rId15"/>
     </p:embeddedFont>
     <p:embeddedFont>
-      <p:font typeface="Manrope" panose="020B0604020202020204" charset="0"/>
+      <p:font typeface="Manrope Light" panose="020B0604020202020204" charset="0"/>
       <p:regular r:id="rId16"/>
       <p:bold r:id="rId17"/>
     </p:embeddedFont>
@@ -11054,7 +11054,7 @@
         </p:nvSpPr>
         <p:spPr>
           <a:xfrm>
-            <a:off x="8083177" y="1224397"/>
+            <a:off x="8064628" y="1234356"/>
             <a:ext cx="670298" cy="344710"/>
           </a:xfrm>
           <a:prstGeom prst="rect">
@@ -11079,18 +11079,11 @@
               <a:buNone/>
             </a:pPr>
             <a:r>
-              <a:rPr lang="en-US" dirty="0">
-                <a:latin typeface="Manrope Light" panose="020B0604020202020204" charset="0"/>
-                <a:sym typeface="Manrope Medium"/>
-              </a:rPr>
-              <a:t>7</a:t>
-            </a:r>
-            <a:r>
               <a:rPr lang="ru-RU" dirty="0">
                 <a:latin typeface="Manrope Light" panose="020B0604020202020204" charset="0"/>
-                <a:sym typeface="Manrope Medium"/>
+                <a:sym typeface="Manrope"/>
               </a:rPr>
-              <a:t>.05</a:t>
+              <a:t>март</a:t>
             </a:r>
             <a:endParaRPr dirty="0">
               <a:latin typeface="Manrope Light" panose="020B0604020202020204" charset="0"/>
@@ -11107,7 +11100,7 @@
         </p:nvSpPr>
         <p:spPr>
           <a:xfrm>
-            <a:off x="8083177" y="1866647"/>
+            <a:off x="8064628" y="1866647"/>
             <a:ext cx="670298" cy="689420"/>
           </a:xfrm>
           <a:prstGeom prst="rect">
@@ -11132,9 +11125,9 @@
             <a:r>
               <a:rPr lang="ru-RU" dirty="0">
                 <a:latin typeface="Manrope Light" panose="020B0604020202020204" charset="0"/>
-                <a:sym typeface="Manrope Medium"/>
+                <a:sym typeface="Manrope"/>
               </a:rPr>
-              <a:t>14.05</a:t>
+              <a:t>март</a:t>
             </a:r>
             <a:endParaRPr lang="en-GB" dirty="0">
               <a:latin typeface="Manrope Light" panose="020B0604020202020204" charset="0"/>
@@ -11154,61 +11147,6 @@
               </a:spcAft>
               <a:buNone/>
             </a:pPr>
-            <a:endParaRPr dirty="0">
-              <a:latin typeface="Manrope"/>
-              <a:ea typeface="Manrope"/>
-              <a:cs typeface="Manrope"/>
-              <a:sym typeface="Manrope"/>
-            </a:endParaRPr>
-          </a:p>
-        </p:txBody>
-      </p:sp>
-      <p:sp>
-        <p:nvSpPr>
-          <p:cNvPr id="275" name="Google Shape;275;p58"/>
-          <p:cNvSpPr txBox="1"/>
-          <p:nvPr/>
-        </p:nvSpPr>
-        <p:spPr>
-          <a:xfrm>
-            <a:off x="8905875" y="2147338"/>
-            <a:ext cx="670298" cy="344710"/>
-          </a:xfrm>
-          <a:prstGeom prst="rect">
-            <a:avLst/>
-          </a:prstGeom>
-          <a:noFill/>
-          <a:ln>
-            <a:noFill/>
-          </a:ln>
-        </p:spPr>
-        <p:txBody>
-          <a:bodyPr spcFirstLastPara="1" wrap="square" lIns="0" tIns="0" rIns="0" bIns="0" anchor="t" anchorCtr="0">
-            <a:spAutoFit/>
-          </a:bodyPr>
-          <a:lstStyle/>
-          <a:p>
-            <a:pPr marL="0" marR="0" lvl="0" indent="0" algn="r" rtl="0">
-              <a:lnSpc>
-                <a:spcPct val="160000"/>
-              </a:lnSpc>
-              <a:spcBef>
-                <a:spcPts val="0"/>
-              </a:spcBef>
-              <a:spcAft>
-                <a:spcPts val="0"/>
-              </a:spcAft>
-              <a:buNone/>
-            </a:pPr>
-            <a:r>
-              <a:rPr lang="ru-RU" dirty="0" smtClean="0">
-                <a:latin typeface="Manrope"/>
-                <a:ea typeface="Manrope"/>
-                <a:cs typeface="Manrope"/>
-                <a:sym typeface="Manrope"/>
-              </a:rPr>
-              <a:t>21.05</a:t>
-            </a:r>
             <a:endParaRPr dirty="0">
               <a:latin typeface="Manrope"/>
               <a:ea typeface="Manrope"/>
@@ -11226,7 +11164,7 @@
         </p:nvSpPr>
         <p:spPr>
           <a:xfrm>
-            <a:off x="8083177" y="2495023"/>
+            <a:off x="8064628" y="2444242"/>
             <a:ext cx="670298" cy="344710"/>
           </a:xfrm>
           <a:prstGeom prst="rect">
@@ -11251,89 +11189,12 @@
             <a:r>
               <a:rPr lang="ru-RU" dirty="0">
                 <a:latin typeface="Manrope Light" panose="020B0604020202020204" charset="0"/>
-                <a:sym typeface="Manrope Medium"/>
+                <a:sym typeface="Manrope"/>
               </a:rPr>
-              <a:t>28.05</a:t>
+              <a:t>апрель</a:t>
             </a:r>
             <a:endParaRPr dirty="0">
               <a:latin typeface="Manrope Light" panose="020B0604020202020204" charset="0"/>
-              <a:sym typeface="Manrope"/>
-            </a:endParaRPr>
-          </a:p>
-        </p:txBody>
-      </p:sp>
-      <p:sp>
-        <p:nvSpPr>
-          <p:cNvPr id="277" name="Google Shape;277;p58"/>
-          <p:cNvSpPr txBox="1"/>
-          <p:nvPr/>
-        </p:nvSpPr>
-        <p:spPr>
-          <a:xfrm>
-            <a:off x="8905875" y="2775119"/>
-            <a:ext cx="670298" cy="689420"/>
-          </a:xfrm>
-          <a:prstGeom prst="rect">
-            <a:avLst/>
-          </a:prstGeom>
-          <a:noFill/>
-          <a:ln>
-            <a:noFill/>
-          </a:ln>
-        </p:spPr>
-        <p:txBody>
-          <a:bodyPr spcFirstLastPara="1" wrap="square" lIns="0" tIns="0" rIns="0" bIns="0" anchor="t" anchorCtr="0">
-            <a:spAutoFit/>
-          </a:bodyPr>
-          <a:lstStyle/>
-          <a:p>
-            <a:pPr algn="r">
-              <a:lnSpc>
-                <a:spcPct val="160000"/>
-              </a:lnSpc>
-            </a:pPr>
-            <a:r>
-              <a:rPr lang="ru-RU" dirty="0" smtClean="0">
-                <a:solidFill>
-                  <a:srgbClr val="333333"/>
-                </a:solidFill>
-                <a:highlight>
-                  <a:srgbClr val="FFFF00"/>
-                </a:highlight>
-                <a:latin typeface="Manrope Medium"/>
-                <a:ea typeface="Manrope"/>
-                <a:cs typeface="Manrope"/>
-                <a:sym typeface="Manrope Medium"/>
-              </a:rPr>
-              <a:t>4.06</a:t>
-            </a:r>
-            <a:endParaRPr lang="en-GB" dirty="0">
-              <a:highlight>
-                <a:srgbClr val="FFFF00"/>
-              </a:highlight>
-              <a:latin typeface="Manrope"/>
-              <a:ea typeface="Manrope"/>
-              <a:cs typeface="Manrope"/>
-              <a:sym typeface="Manrope"/>
-            </a:endParaRPr>
-          </a:p>
-          <a:p>
-            <a:pPr marL="0" marR="0" lvl="0" indent="0" algn="r" rtl="0">
-              <a:lnSpc>
-                <a:spcPct val="160000"/>
-              </a:lnSpc>
-              <a:spcBef>
-                <a:spcPts val="0"/>
-              </a:spcBef>
-              <a:spcAft>
-                <a:spcPts val="0"/>
-              </a:spcAft>
-              <a:buNone/>
-            </a:pPr>
-            <a:endParaRPr dirty="0">
-              <a:latin typeface="Manrope"/>
-              <a:ea typeface="Manrope"/>
-              <a:cs typeface="Manrope"/>
               <a:sym typeface="Manrope"/>
             </a:endParaRPr>
           </a:p>
@@ -11405,7 +11266,7 @@
         </p:nvSpPr>
         <p:spPr>
           <a:xfrm>
-            <a:off x="8083177" y="3103977"/>
+            <a:off x="8083177" y="3152150"/>
             <a:ext cx="670298" cy="689420"/>
           </a:xfrm>
           <a:prstGeom prst="rect">
@@ -11430,166 +11291,12 @@
             <a:r>
               <a:rPr lang="ru-RU" dirty="0">
                 <a:latin typeface="Manrope Light" panose="020B0604020202020204" charset="0"/>
-                <a:sym typeface="Manrope Medium"/>
+                <a:sym typeface="Manrope"/>
               </a:rPr>
-              <a:t>11.06</a:t>
+              <a:t>апрель</a:t>
             </a:r>
             <a:endParaRPr lang="en-GB" dirty="0">
               <a:latin typeface="Manrope Light" panose="020B0604020202020204" charset="0"/>
-              <a:sym typeface="Manrope"/>
-            </a:endParaRPr>
-          </a:p>
-          <a:p>
-            <a:pPr marL="0" marR="0" lvl="0" indent="0" algn="r" rtl="0">
-              <a:lnSpc>
-                <a:spcPct val="160000"/>
-              </a:lnSpc>
-              <a:spcBef>
-                <a:spcPts val="0"/>
-              </a:spcBef>
-              <a:spcAft>
-                <a:spcPts val="0"/>
-              </a:spcAft>
-              <a:buNone/>
-            </a:pPr>
-            <a:endParaRPr dirty="0">
-              <a:latin typeface="Manrope"/>
-              <a:ea typeface="Manrope"/>
-              <a:cs typeface="Manrope"/>
-              <a:sym typeface="Manrope"/>
-            </a:endParaRPr>
-          </a:p>
-        </p:txBody>
-      </p:sp>
-      <p:sp>
-        <p:nvSpPr>
-          <p:cNvPr id="20" name="Google Shape;277;p58"/>
-          <p:cNvSpPr txBox="1"/>
-          <p:nvPr/>
-        </p:nvSpPr>
-        <p:spPr>
-          <a:xfrm>
-            <a:off x="8937381" y="3440491"/>
-            <a:ext cx="670298" cy="689420"/>
-          </a:xfrm>
-          <a:prstGeom prst="rect">
-            <a:avLst/>
-          </a:prstGeom>
-          <a:noFill/>
-          <a:ln>
-            <a:noFill/>
-          </a:ln>
-        </p:spPr>
-        <p:txBody>
-          <a:bodyPr spcFirstLastPara="1" wrap="square" lIns="0" tIns="0" rIns="0" bIns="0" anchor="t" anchorCtr="0">
-            <a:spAutoFit/>
-          </a:bodyPr>
-          <a:lstStyle/>
-          <a:p>
-            <a:pPr algn="r">
-              <a:lnSpc>
-                <a:spcPct val="160000"/>
-              </a:lnSpc>
-            </a:pPr>
-            <a:r>
-              <a:rPr lang="ru-RU" dirty="0" smtClean="0">
-                <a:solidFill>
-                  <a:srgbClr val="333333"/>
-                </a:solidFill>
-                <a:highlight>
-                  <a:srgbClr val="FFFF00"/>
-                </a:highlight>
-                <a:latin typeface="Manrope Medium"/>
-                <a:ea typeface="Manrope"/>
-                <a:cs typeface="Manrope"/>
-                <a:sym typeface="Manrope Medium"/>
-              </a:rPr>
-              <a:t>18.06</a:t>
-            </a:r>
-            <a:endParaRPr lang="en-GB" dirty="0">
-              <a:highlight>
-                <a:srgbClr val="FFFF00"/>
-              </a:highlight>
-              <a:latin typeface="Manrope"/>
-              <a:ea typeface="Manrope"/>
-              <a:cs typeface="Manrope"/>
-              <a:sym typeface="Manrope"/>
-            </a:endParaRPr>
-          </a:p>
-          <a:p>
-            <a:pPr marL="0" marR="0" lvl="0" indent="0" algn="r" rtl="0">
-              <a:lnSpc>
-                <a:spcPct val="160000"/>
-              </a:lnSpc>
-              <a:spcBef>
-                <a:spcPts val="0"/>
-              </a:spcBef>
-              <a:spcAft>
-                <a:spcPts val="0"/>
-              </a:spcAft>
-              <a:buNone/>
-            </a:pPr>
-            <a:endParaRPr dirty="0">
-              <a:latin typeface="Manrope"/>
-              <a:ea typeface="Manrope"/>
-              <a:cs typeface="Manrope"/>
-              <a:sym typeface="Manrope"/>
-            </a:endParaRPr>
-          </a:p>
-        </p:txBody>
-      </p:sp>
-      <p:sp>
-        <p:nvSpPr>
-          <p:cNvPr id="21" name="Google Shape;277;p58"/>
-          <p:cNvSpPr txBox="1"/>
-          <p:nvPr/>
-        </p:nvSpPr>
-        <p:spPr>
-          <a:xfrm>
-            <a:off x="9013752" y="3722447"/>
-            <a:ext cx="670298" cy="689420"/>
-          </a:xfrm>
-          <a:prstGeom prst="rect">
-            <a:avLst/>
-          </a:prstGeom>
-          <a:noFill/>
-          <a:ln>
-            <a:noFill/>
-          </a:ln>
-        </p:spPr>
-        <p:txBody>
-          <a:bodyPr spcFirstLastPara="1" wrap="square" lIns="0" tIns="0" rIns="0" bIns="0" anchor="t" anchorCtr="0">
-            <a:spAutoFit/>
-          </a:bodyPr>
-          <a:lstStyle/>
-          <a:p>
-            <a:pPr algn="r">
-              <a:lnSpc>
-                <a:spcPct val="160000"/>
-              </a:lnSpc>
-            </a:pPr>
-            <a:r>
-              <a:rPr lang="ru-RU" dirty="0" smtClean="0">
-                <a:solidFill>
-                  <a:srgbClr val="333333"/>
-                </a:solidFill>
-                <a:highlight>
-                  <a:srgbClr val="FFFF00"/>
-                </a:highlight>
-                <a:latin typeface="Manrope Medium"/>
-                <a:ea typeface="Manrope"/>
-                <a:cs typeface="Manrope"/>
-                <a:sym typeface="Manrope Medium"/>
-              </a:rPr>
-              <a:t>25.06</a:t>
-            </a:r>
-            <a:endParaRPr lang="en-GB" dirty="0">
-              <a:highlight>
-                <a:srgbClr val="FFFF00"/>
-              </a:highlight>
-              <a:latin typeface="Manrope"/>
-              <a:ea typeface="Manrope"/>
-              <a:cs typeface="Manrope"/>
               <a:sym typeface="Manrope"/>
             </a:endParaRPr>
           </a:p>
@@ -11653,7 +11360,7 @@
               <a:buNone/>
             </a:pPr>
             <a:r>
-              <a:rPr lang="en-US" dirty="0" smtClean="0">
+              <a:rPr lang="en-US" dirty="0">
                 <a:solidFill>
                   <a:srgbClr val="333333"/>
                 </a:solidFill>
@@ -11725,7 +11432,7 @@
         </p:nvSpPr>
         <p:spPr>
           <a:xfrm>
-            <a:off x="8073753" y="3793397"/>
+            <a:off x="8064628" y="3793397"/>
             <a:ext cx="670298" cy="689420"/>
           </a:xfrm>
           <a:prstGeom prst="rect">
@@ -11752,7 +11459,7 @@
                 <a:latin typeface="Manrope Light" panose="020B0604020202020204" charset="0"/>
                 <a:sym typeface="Manrope Medium"/>
               </a:rPr>
-              <a:t>02.07</a:t>
+              <a:t>май</a:t>
             </a:r>
             <a:endParaRPr lang="en-GB" dirty="0">
               <a:latin typeface="Manrope Light" panose="020B0604020202020204" charset="0"/>
@@ -11789,7 +11496,7 @@
         </p:nvSpPr>
         <p:spPr>
           <a:xfrm>
-            <a:off x="8042247" y="4359822"/>
+            <a:off x="8064628" y="4359822"/>
             <a:ext cx="670298" cy="689420"/>
           </a:xfrm>
           <a:prstGeom prst="rect">
@@ -11814,89 +11521,12 @@
             <a:r>
               <a:rPr lang="ru-RU" dirty="0">
                 <a:latin typeface="Manrope Light" panose="020B0604020202020204" charset="0"/>
-                <a:sym typeface="Manrope Medium"/>
+                <a:sym typeface="Manrope"/>
               </a:rPr>
-              <a:t>16.07</a:t>
+              <a:t>май</a:t>
             </a:r>
             <a:endParaRPr lang="en-GB" dirty="0">
               <a:latin typeface="Manrope Light" panose="020B0604020202020204" charset="0"/>
-              <a:sym typeface="Manrope"/>
-            </a:endParaRPr>
-          </a:p>
-          <a:p>
-            <a:pPr marL="0" marR="0" lvl="0" indent="0" algn="r" rtl="0">
-              <a:lnSpc>
-                <a:spcPct val="160000"/>
-              </a:lnSpc>
-              <a:spcBef>
-                <a:spcPts val="0"/>
-              </a:spcBef>
-              <a:spcAft>
-                <a:spcPts val="0"/>
-              </a:spcAft>
-              <a:buNone/>
-            </a:pPr>
-            <a:endParaRPr dirty="0">
-              <a:latin typeface="Manrope"/>
-              <a:ea typeface="Manrope"/>
-              <a:cs typeface="Manrope"/>
-              <a:sym typeface="Manrope"/>
-            </a:endParaRPr>
-          </a:p>
-        </p:txBody>
-      </p:sp>
-      <p:sp>
-        <p:nvSpPr>
-          <p:cNvPr id="26" name="Google Shape;277;p58"/>
-          <p:cNvSpPr txBox="1"/>
-          <p:nvPr/>
-        </p:nvSpPr>
-        <p:spPr>
-          <a:xfrm>
-            <a:off x="9001354" y="4273020"/>
-            <a:ext cx="670298" cy="689420"/>
-          </a:xfrm>
-          <a:prstGeom prst="rect">
-            <a:avLst/>
-          </a:prstGeom>
-          <a:noFill/>
-          <a:ln>
-            <a:noFill/>
-          </a:ln>
-        </p:spPr>
-        <p:txBody>
-          <a:bodyPr spcFirstLastPara="1" wrap="square" lIns="0" tIns="0" rIns="0" bIns="0" anchor="t" anchorCtr="0">
-            <a:spAutoFit/>
-          </a:bodyPr>
-          <a:lstStyle/>
-          <a:p>
-            <a:pPr algn="r">
-              <a:lnSpc>
-                <a:spcPct val="160000"/>
-              </a:lnSpc>
-            </a:pPr>
-            <a:r>
-              <a:rPr lang="ru-RU" dirty="0" smtClean="0">
-                <a:solidFill>
-                  <a:srgbClr val="333333"/>
-                </a:solidFill>
-                <a:highlight>
-                  <a:srgbClr val="FFFF00"/>
-                </a:highlight>
-                <a:latin typeface="Manrope Medium"/>
-                <a:ea typeface="Manrope"/>
-                <a:cs typeface="Manrope"/>
-                <a:sym typeface="Manrope Medium"/>
-              </a:rPr>
-              <a:t>-09.07</a:t>
-            </a:r>
-            <a:endParaRPr lang="en-GB" dirty="0">
-              <a:highlight>
-                <a:srgbClr val="FFFF00"/>
-              </a:highlight>
-              <a:latin typeface="Manrope"/>
-              <a:ea typeface="Manrope"/>
-              <a:cs typeface="Manrope"/>
               <a:sym typeface="Manrope"/>
             </a:endParaRPr>
           </a:p>
@@ -11927,13 +11557,6 @@
   <p:clrMapOvr>
     <a:masterClrMapping/>
   </p:clrMapOvr>
-  <p:timing>
-    <p:tnLst>
-      <p:par>
-        <p:cTn id="1" dur="indefinite" restart="never" nodeType="tmRoot"/>
-      </p:par>
-    </p:tnLst>
-  </p:timing>
 </p:sld>
 </file>
 

--- a/materials/Презентация.pptx
+++ b/materials/Презентация.pptx
@@ -9521,7 +9521,7 @@
         <p:spPr>
           <a:xfrm>
             <a:off x="452625" y="1763475"/>
-            <a:ext cx="3206100" cy="623248"/>
+            <a:ext cx="3206100" cy="830997"/>
           </a:xfrm>
           <a:prstGeom prst="rect">
             <a:avLst/>
@@ -9655,7 +9655,77 @@
               </a:rPr>
               <a:t>ArtemRomanov2017@yandex.ru</a:t>
             </a:r>
-            <a:endParaRPr sz="900" dirty="0">
+            <a:endParaRPr lang="en-US" sz="900" dirty="0">
+              <a:latin typeface="Manrope"/>
+              <a:ea typeface="Manrope"/>
+              <a:cs typeface="Manrope"/>
+              <a:sym typeface="Manrope"/>
+            </a:endParaRPr>
+          </a:p>
+          <a:p>
+            <a:pPr marL="171450" marR="0" lvl="0" indent="-171450" algn="l" rtl="0">
+              <a:lnSpc>
+                <a:spcPct val="150000"/>
+              </a:lnSpc>
+              <a:spcBef>
+                <a:spcPts val="0"/>
+              </a:spcBef>
+              <a:spcAft>
+                <a:spcPts val="0"/>
+              </a:spcAft>
+              <a:buFont typeface="Arial" panose="020B0604020202020204" pitchFamily="34" charset="0"/>
+              <a:buChar char="•"/>
+            </a:pPr>
+            <a:r>
+              <a:rPr lang="en-US" sz="900" dirty="0">
+                <a:latin typeface="Manrope"/>
+                <a:ea typeface="Manrope"/>
+                <a:cs typeface="Manrope"/>
+                <a:sym typeface="Manrope"/>
+              </a:rPr>
+              <a:t>GitHub: </a:t>
+            </a:r>
+            <a:r>
+              <a:rPr lang="en-US" sz="900" dirty="0">
+                <a:latin typeface="Manrope"/>
+                <a:ea typeface="Manrope"/>
+                <a:cs typeface="Manrope"/>
+                <a:sym typeface="Manrope"/>
+                <a:hlinkClick r:id="rId3"/>
+              </a:rPr>
+              <a:t>https://</a:t>
+            </a:r>
+            <a:r>
+              <a:rPr lang="en-US" sz="900" dirty="0" err="1">
+                <a:latin typeface="Manrope"/>
+                <a:ea typeface="Manrope"/>
+                <a:cs typeface="Manrope"/>
+                <a:sym typeface="Manrope"/>
+                <a:hlinkClick r:id="rId3"/>
+              </a:rPr>
+              <a:t>github.com</a:t>
+            </a:r>
+            <a:r>
+              <a:rPr lang="en-US" sz="900" dirty="0">
+                <a:latin typeface="Manrope"/>
+                <a:ea typeface="Manrope"/>
+                <a:cs typeface="Manrope"/>
+                <a:sym typeface="Manrope"/>
+                <a:hlinkClick r:id="rId3"/>
+              </a:rPr>
+              <a:t>/</a:t>
+            </a:r>
+            <a:r>
+              <a:rPr lang="en-US" sz="900" dirty="0" err="1">
+                <a:latin typeface="Manrope"/>
+                <a:ea typeface="Manrope"/>
+                <a:cs typeface="Manrope"/>
+                <a:sym typeface="Manrope"/>
+                <a:hlinkClick r:id="rId3"/>
+              </a:rPr>
+              <a:t>Quaha</a:t>
+            </a:r>
+            <a:endParaRPr lang="en-US" sz="900" dirty="0">
               <a:latin typeface="Manrope"/>
               <a:ea typeface="Manrope"/>
               <a:cs typeface="Manrope"/>
@@ -9731,7 +9801,7 @@
         <p:spPr>
           <a:xfrm>
             <a:off x="452625" y="3089000"/>
-            <a:ext cx="3206100" cy="623248"/>
+            <a:ext cx="3206100" cy="830997"/>
           </a:xfrm>
           <a:prstGeom prst="rect">
             <a:avLst/>
@@ -9891,6 +9961,76 @@
                 <a:sym typeface="Manrope"/>
               </a:rPr>
               <a:t>sprojectiustech@gmail.com</a:t>
+            </a:r>
+            <a:endParaRPr lang="en-US" sz="900" dirty="0">
+              <a:latin typeface="Manrope"/>
+              <a:ea typeface="Manrope"/>
+              <a:cs typeface="Manrope"/>
+              <a:sym typeface="Manrope"/>
+            </a:endParaRPr>
+          </a:p>
+          <a:p>
+            <a:pPr marL="171450" marR="0" lvl="0" indent="-171450" algn="l" rtl="0">
+              <a:lnSpc>
+                <a:spcPct val="150000"/>
+              </a:lnSpc>
+              <a:spcBef>
+                <a:spcPts val="0"/>
+              </a:spcBef>
+              <a:spcAft>
+                <a:spcPts val="0"/>
+              </a:spcAft>
+              <a:buFont typeface="Arial" panose="020B0604020202020204" pitchFamily="34" charset="0"/>
+              <a:buChar char="•"/>
+            </a:pPr>
+            <a:r>
+              <a:rPr lang="en-US" sz="900" dirty="0">
+                <a:latin typeface="Manrope"/>
+                <a:ea typeface="Manrope"/>
+                <a:cs typeface="Manrope"/>
+                <a:sym typeface="Manrope"/>
+              </a:rPr>
+              <a:t>GitHub: </a:t>
+            </a:r>
+            <a:r>
+              <a:rPr lang="en-US" sz="900" dirty="0">
+                <a:latin typeface="Manrope"/>
+                <a:ea typeface="Manrope"/>
+                <a:cs typeface="Manrope"/>
+                <a:sym typeface="Manrope"/>
+                <a:hlinkClick r:id="rId4"/>
+              </a:rPr>
+              <a:t>https://</a:t>
+            </a:r>
+            <a:r>
+              <a:rPr lang="en-US" sz="900" dirty="0" err="1">
+                <a:latin typeface="Manrope"/>
+                <a:ea typeface="Manrope"/>
+                <a:cs typeface="Manrope"/>
+                <a:sym typeface="Manrope"/>
+                <a:hlinkClick r:id="rId4"/>
+              </a:rPr>
+              <a:t>github.com</a:t>
+            </a:r>
+            <a:r>
+              <a:rPr lang="en-US" sz="900" dirty="0">
+                <a:latin typeface="Manrope"/>
+                <a:ea typeface="Manrope"/>
+                <a:cs typeface="Manrope"/>
+                <a:sym typeface="Manrope"/>
+                <a:hlinkClick r:id="rId4"/>
+              </a:rPr>
+              <a:t>/</a:t>
+            </a:r>
+            <a:r>
+              <a:rPr lang="en-US" sz="900" dirty="0" err="1">
+                <a:latin typeface="Manrope"/>
+                <a:ea typeface="Manrope"/>
+                <a:cs typeface="Manrope"/>
+                <a:sym typeface="Manrope"/>
+                <a:hlinkClick r:id="rId4"/>
+              </a:rPr>
+              <a:t>Projectius</a:t>
             </a:r>
             <a:endParaRPr lang="ru-RU" sz="900" dirty="0">
               <a:latin typeface="Manrope"/>
@@ -9968,7 +10108,7 @@
         <p:spPr>
           <a:xfrm>
             <a:off x="4439975" y="1763475"/>
-            <a:ext cx="3206100" cy="623248"/>
+            <a:ext cx="3206100" cy="830997"/>
           </a:xfrm>
           <a:prstGeom prst="rect">
             <a:avLst/>
@@ -10123,10 +10263,80 @@
               </a:rPr>
               <a:t>alexix222@yandex.ru</a:t>
             </a:r>
-            <a:endParaRPr lang="ru-RU" sz="900" dirty="0">
+            <a:endParaRPr lang="en-US" sz="900" dirty="0">
               <a:highlight>
                 <a:srgbClr val="FFFF00"/>
               </a:highlight>
+              <a:latin typeface="Manrope"/>
+              <a:ea typeface="Manrope"/>
+              <a:cs typeface="Manrope"/>
+              <a:sym typeface="Manrope"/>
+            </a:endParaRPr>
+          </a:p>
+          <a:p>
+            <a:pPr marL="171450" marR="0" lvl="0" indent="-171450" algn="l" rtl="0">
+              <a:lnSpc>
+                <a:spcPct val="150000"/>
+              </a:lnSpc>
+              <a:spcBef>
+                <a:spcPts val="0"/>
+              </a:spcBef>
+              <a:spcAft>
+                <a:spcPts val="0"/>
+              </a:spcAft>
+              <a:buFont typeface="Arial" panose="020B0604020202020204" pitchFamily="34" charset="0"/>
+              <a:buChar char="•"/>
+            </a:pPr>
+            <a:r>
+              <a:rPr lang="en-US" sz="900" dirty="0">
+                <a:latin typeface="Manrope"/>
+                <a:ea typeface="Manrope"/>
+                <a:cs typeface="Manrope"/>
+                <a:sym typeface="Manrope"/>
+              </a:rPr>
+              <a:t>GitHub: </a:t>
+            </a:r>
+            <a:r>
+              <a:rPr lang="en-US" sz="900" dirty="0">
+                <a:latin typeface="Manrope"/>
+                <a:ea typeface="Manrope"/>
+                <a:cs typeface="Manrope"/>
+                <a:sym typeface="Manrope"/>
+                <a:hlinkClick r:id="rId5"/>
+              </a:rPr>
+              <a:t>https://</a:t>
+            </a:r>
+            <a:r>
+              <a:rPr lang="en-US" sz="900" dirty="0" err="1">
+                <a:latin typeface="Manrope"/>
+                <a:ea typeface="Manrope"/>
+                <a:cs typeface="Manrope"/>
+                <a:sym typeface="Manrope"/>
+                <a:hlinkClick r:id="rId5"/>
+              </a:rPr>
+              <a:t>github.com</a:t>
+            </a:r>
+            <a:r>
+              <a:rPr lang="en-US" sz="900" dirty="0">
+                <a:latin typeface="Manrope"/>
+                <a:ea typeface="Manrope"/>
+                <a:cs typeface="Manrope"/>
+                <a:sym typeface="Manrope"/>
+                <a:hlinkClick r:id="rId5"/>
+              </a:rPr>
+              <a:t>/</a:t>
+            </a:r>
+            <a:r>
+              <a:rPr lang="en-US" sz="900" dirty="0" err="1">
+                <a:latin typeface="Manrope"/>
+                <a:ea typeface="Manrope"/>
+                <a:cs typeface="Manrope"/>
+                <a:sym typeface="Manrope"/>
+                <a:hlinkClick r:id="rId5"/>
+              </a:rPr>
+              <a:t>AlexixRugis</a:t>
+            </a:r>
+            <a:endParaRPr lang="en-GB" sz="900" dirty="0">
               <a:latin typeface="Manrope"/>
               <a:ea typeface="Manrope"/>
               <a:cs typeface="Manrope"/>
@@ -10214,7 +10424,7 @@
         <p:spPr>
           <a:xfrm>
             <a:off x="4439975" y="3089000"/>
-            <a:ext cx="3206100" cy="623248"/>
+            <a:ext cx="3206100" cy="830997"/>
           </a:xfrm>
           <a:prstGeom prst="rect">
             <a:avLst/>
@@ -10384,10 +10594,77 @@
               </a:rPr>
               <a:t>d4n11gol@yandex.ru</a:t>
             </a:r>
+            <a:endParaRPr lang="en-US" sz="900" dirty="0">
+              <a:latin typeface="Manrope"/>
+              <a:ea typeface="Manrope"/>
+              <a:cs typeface="Manrope"/>
+              <a:sym typeface="Manrope"/>
+            </a:endParaRPr>
+          </a:p>
+          <a:p>
+            <a:pPr marL="171450" marR="0" lvl="0" indent="-171450" algn="l" rtl="0">
+              <a:lnSpc>
+                <a:spcPct val="150000"/>
+              </a:lnSpc>
+              <a:spcBef>
+                <a:spcPts val="0"/>
+              </a:spcBef>
+              <a:spcAft>
+                <a:spcPts val="0"/>
+              </a:spcAft>
+              <a:buFont typeface="Arial" panose="020B0604020202020204" pitchFamily="34" charset="0"/>
+              <a:buChar char="•"/>
+            </a:pPr>
+            <a:r>
+              <a:rPr lang="en-US" sz="900" dirty="0">
+                <a:latin typeface="Manrope"/>
+                <a:ea typeface="Manrope"/>
+                <a:cs typeface="Manrope"/>
+                <a:sym typeface="Manrope"/>
+              </a:rPr>
+              <a:t>GitHub: </a:t>
+            </a:r>
+            <a:r>
+              <a:rPr lang="en-US" sz="900" dirty="0">
+                <a:latin typeface="Manrope"/>
+                <a:ea typeface="Manrope"/>
+                <a:cs typeface="Manrope"/>
+                <a:sym typeface="Manrope"/>
+                <a:hlinkClick r:id="rId6"/>
+              </a:rPr>
+              <a:t>https://</a:t>
+            </a:r>
+            <a:r>
+              <a:rPr lang="en-US" sz="900" dirty="0" err="1">
+                <a:latin typeface="Manrope"/>
+                <a:ea typeface="Manrope"/>
+                <a:cs typeface="Manrope"/>
+                <a:sym typeface="Manrope"/>
+                <a:hlinkClick r:id="rId6"/>
+              </a:rPr>
+              <a:t>github.com</a:t>
+            </a:r>
+            <a:r>
+              <a:rPr lang="en-US" sz="900" dirty="0">
+                <a:latin typeface="Manrope"/>
+                <a:ea typeface="Manrope"/>
+                <a:cs typeface="Manrope"/>
+                <a:sym typeface="Manrope"/>
+                <a:hlinkClick r:id="rId6"/>
+              </a:rPr>
+              <a:t>/</a:t>
+            </a:r>
+            <a:r>
+              <a:rPr lang="en-US" sz="900" dirty="0" err="1">
+                <a:latin typeface="Manrope"/>
+                <a:ea typeface="Manrope"/>
+                <a:cs typeface="Manrope"/>
+                <a:sym typeface="Manrope"/>
+                <a:hlinkClick r:id="rId6"/>
+              </a:rPr>
+              <a:t>DtheMakeeeR</a:t>
+            </a:r>
             <a:endParaRPr lang="ru-RU" sz="900" dirty="0">
-              <a:highlight>
-                <a:srgbClr val="FFFF00"/>
-              </a:highlight>
               <a:latin typeface="Manrope"/>
               <a:ea typeface="Manrope"/>
               <a:cs typeface="Manrope"/>

--- a/materials/Презентация.pptx
+++ b/materials/Презентация.pptx
@@ -6,7 +6,7 @@
     <p:sldMasterId id="2147483699" r:id="rId2"/>
   </p:sldMasterIdLst>
   <p:notesMasterIdLst>
-    <p:notesMasterId r:id="rId13"/>
+    <p:notesMasterId r:id="rId14"/>
   </p:notesMasterIdLst>
   <p:sldIdLst>
     <p:sldId id="258" r:id="rId3"/>
@@ -14,29 +14,34 @@
     <p:sldId id="269" r:id="rId5"/>
     <p:sldId id="259" r:id="rId6"/>
     <p:sldId id="262" r:id="rId7"/>
-    <p:sldId id="263" r:id="rId8"/>
-    <p:sldId id="273" r:id="rId9"/>
-    <p:sldId id="264" r:id="rId10"/>
-    <p:sldId id="265" r:id="rId11"/>
-    <p:sldId id="272" r:id="rId12"/>
+    <p:sldId id="274" r:id="rId8"/>
+    <p:sldId id="275" r:id="rId9"/>
+    <p:sldId id="273" r:id="rId10"/>
+    <p:sldId id="264" r:id="rId11"/>
+    <p:sldId id="265" r:id="rId12"/>
+    <p:sldId id="272" r:id="rId13"/>
   </p:sldIdLst>
   <p:sldSz cx="9144000" cy="5143500" type="screen16x9"/>
   <p:notesSz cx="6858000" cy="9144000"/>
   <p:embeddedFontLst>
     <p:embeddedFont>
-      <p:font typeface="Manrope" panose="020B0604020202020204" charset="0"/>
-      <p:regular r:id="rId14"/>
-      <p:bold r:id="rId15"/>
+      <p:font typeface="Cambria Math" panose="02040503050406030204" pitchFamily="18" charset="0"/>
+      <p:regular r:id="rId15"/>
     </p:embeddedFont>
     <p:embeddedFont>
-      <p:font typeface="Manrope Light" panose="020B0604020202020204" charset="0"/>
+      <p:font typeface="Manrope" panose="020B0604020202020204" charset="0"/>
       <p:regular r:id="rId16"/>
       <p:bold r:id="rId17"/>
     </p:embeddedFont>
     <p:embeddedFont>
-      <p:font typeface="Manrope Medium" panose="020B0604020202020204" charset="0"/>
+      <p:font typeface="Manrope Light" panose="020B0604020202020204" charset="0"/>
       <p:regular r:id="rId18"/>
       <p:bold r:id="rId19"/>
+    </p:embeddedFont>
+    <p:embeddedFont>
+      <p:font typeface="Manrope Medium" panose="020B0604020202020204" charset="0"/>
+      <p:regular r:id="rId20"/>
+      <p:bold r:id="rId21"/>
     </p:embeddedFont>
   </p:embeddedFontLst>
   <p:defaultTextStyle>
@@ -837,6 +842,110 @@
   <p:cSld>
     <p:spTree>
       <p:nvGrpSpPr>
+        <p:cNvPr id="1" name="Shape 326"/>
+        <p:cNvGrpSpPr/>
+        <p:nvPr/>
+      </p:nvGrpSpPr>
+      <p:grpSpPr>
+        <a:xfrm>
+          <a:off x="0" y="0"/>
+          <a:ext cx="0" cy="0"/>
+          <a:chOff x="0" y="0"/>
+          <a:chExt cx="0" cy="0"/>
+        </a:xfrm>
+      </p:grpSpPr>
+      <p:sp>
+        <p:nvSpPr>
+          <p:cNvPr id="327" name="Google Shape;327;g260a8deabce_0_51:notes"/>
+          <p:cNvSpPr txBox="1">
+            <a:spLocks noGrp="1"/>
+          </p:cNvSpPr>
+          <p:nvPr>
+            <p:ph type="body" idx="1"/>
+          </p:nvPr>
+        </p:nvSpPr>
+        <p:spPr>
+          <a:xfrm>
+            <a:off x="685800" y="4343400"/>
+            <a:ext cx="5486400" cy="4114800"/>
+          </a:xfrm>
+          <a:prstGeom prst="rect">
+            <a:avLst/>
+          </a:prstGeom>
+        </p:spPr>
+        <p:txBody>
+          <a:bodyPr spcFirstLastPara="1" wrap="square" lIns="91425" tIns="91425" rIns="91425" bIns="91425" anchor="t" anchorCtr="0">
+            <a:noAutofit/>
+          </a:bodyPr>
+          <a:lstStyle/>
+          <a:p>
+            <a:pPr marL="0" lvl="0" indent="0" algn="l" rtl="0">
+              <a:spcBef>
+                <a:spcPts val="0"/>
+              </a:spcBef>
+              <a:spcAft>
+                <a:spcPts val="0"/>
+              </a:spcAft>
+              <a:buNone/>
+            </a:pPr>
+            <a:endParaRPr/>
+          </a:p>
+        </p:txBody>
+      </p:sp>
+      <p:sp>
+        <p:nvSpPr>
+          <p:cNvPr id="328" name="Google Shape;328;g260a8deabce_0_51:notes"/>
+          <p:cNvSpPr>
+            <a:spLocks noGrp="1" noRot="1" noChangeAspect="1"/>
+          </p:cNvSpPr>
+          <p:nvPr>
+            <p:ph type="sldImg" idx="2"/>
+          </p:nvPr>
+        </p:nvSpPr>
+        <p:spPr>
+          <a:xfrm>
+            <a:off x="381000" y="685800"/>
+            <a:ext cx="6096000" cy="3429000"/>
+          </a:xfrm>
+          <a:custGeom>
+            <a:avLst/>
+            <a:gdLst/>
+            <a:ahLst/>
+            <a:cxnLst/>
+            <a:rect l="l" t="t" r="r" b="b"/>
+            <a:pathLst>
+              <a:path w="120000" h="120000" extrusionOk="0">
+                <a:moveTo>
+                  <a:pt x="0" y="0"/>
+                </a:moveTo>
+                <a:lnTo>
+                  <a:pt x="120000" y="0"/>
+                </a:lnTo>
+                <a:lnTo>
+                  <a:pt x="120000" y="120000"/>
+                </a:lnTo>
+                <a:lnTo>
+                  <a:pt x="0" y="120000"/>
+                </a:lnTo>
+                <a:close/>
+              </a:path>
+            </a:pathLst>
+          </a:custGeom>
+        </p:spPr>
+      </p:sp>
+    </p:spTree>
+  </p:cSld>
+  <p:clrMapOvr>
+    <a:masterClrMapping/>
+  </p:clrMapOvr>
+</p:notes>
+</file>
+
+<file path=ppt/notesSlides/notesSlide11.xml><?xml version="1.0" encoding="utf-8"?>
+<p:notes xmlns:a="http://schemas.openxmlformats.org/drawingml/2006/main" xmlns:r="http://schemas.openxmlformats.org/officeDocument/2006/relationships" xmlns:p="http://schemas.openxmlformats.org/presentationml/2006/main" showMasterSp="0" showMasterPhAnim="0">
+  <p:cSld>
+    <p:spTree>
+      <p:nvGrpSpPr>
         <p:cNvPr id="1" name="Shape 470"/>
         <p:cNvGrpSpPr/>
         <p:nvPr/>
@@ -1461,6 +1570,115 @@
   <p:cSld>
     <p:spTree>
       <p:nvGrpSpPr>
+        <p:cNvPr id="1" name="Shape 308"/>
+        <p:cNvGrpSpPr/>
+        <p:nvPr/>
+      </p:nvGrpSpPr>
+      <p:grpSpPr>
+        <a:xfrm>
+          <a:off x="0" y="0"/>
+          <a:ext cx="0" cy="0"/>
+          <a:chOff x="0" y="0"/>
+          <a:chExt cx="0" cy="0"/>
+        </a:xfrm>
+      </p:grpSpPr>
+      <p:sp>
+        <p:nvSpPr>
+          <p:cNvPr id="309" name="Google Shape;309;g260a8deabce_2_144:notes"/>
+          <p:cNvSpPr txBox="1">
+            <a:spLocks noGrp="1"/>
+          </p:cNvSpPr>
+          <p:nvPr>
+            <p:ph type="body" idx="1"/>
+          </p:nvPr>
+        </p:nvSpPr>
+        <p:spPr>
+          <a:xfrm>
+            <a:off x="685800" y="4343400"/>
+            <a:ext cx="5486400" cy="4114800"/>
+          </a:xfrm>
+          <a:prstGeom prst="rect">
+            <a:avLst/>
+          </a:prstGeom>
+        </p:spPr>
+        <p:txBody>
+          <a:bodyPr spcFirstLastPara="1" wrap="square" lIns="91425" tIns="91425" rIns="91425" bIns="91425" anchor="t" anchorCtr="0">
+            <a:noAutofit/>
+          </a:bodyPr>
+          <a:lstStyle/>
+          <a:p>
+            <a:pPr marL="0" lvl="0" indent="0" algn="l" rtl="0">
+              <a:spcBef>
+                <a:spcPts val="0"/>
+              </a:spcBef>
+              <a:spcAft>
+                <a:spcPts val="0"/>
+              </a:spcAft>
+              <a:buNone/>
+            </a:pPr>
+            <a:endParaRPr/>
+          </a:p>
+        </p:txBody>
+      </p:sp>
+      <p:sp>
+        <p:nvSpPr>
+          <p:cNvPr id="310" name="Google Shape;310;g260a8deabce_2_144:notes"/>
+          <p:cNvSpPr>
+            <a:spLocks noGrp="1" noRot="1" noChangeAspect="1"/>
+          </p:cNvSpPr>
+          <p:nvPr>
+            <p:ph type="sldImg" idx="2"/>
+          </p:nvPr>
+        </p:nvSpPr>
+        <p:spPr>
+          <a:xfrm>
+            <a:off x="381000" y="685800"/>
+            <a:ext cx="6096000" cy="3429000"/>
+          </a:xfrm>
+          <a:custGeom>
+            <a:avLst/>
+            <a:gdLst/>
+            <a:ahLst/>
+            <a:cxnLst/>
+            <a:rect l="l" t="t" r="r" b="b"/>
+            <a:pathLst>
+              <a:path w="120000" h="120000" extrusionOk="0">
+                <a:moveTo>
+                  <a:pt x="0" y="0"/>
+                </a:moveTo>
+                <a:lnTo>
+                  <a:pt x="120000" y="0"/>
+                </a:lnTo>
+                <a:lnTo>
+                  <a:pt x="120000" y="120000"/>
+                </a:lnTo>
+                <a:lnTo>
+                  <a:pt x="0" y="120000"/>
+                </a:lnTo>
+                <a:close/>
+              </a:path>
+            </a:pathLst>
+          </a:custGeom>
+        </p:spPr>
+      </p:sp>
+    </p:spTree>
+    <p:extLst>
+      <p:ext uri="{BB962C8B-B14F-4D97-AF65-F5344CB8AC3E}">
+        <p14:creationId xmlns:p14="http://schemas.microsoft.com/office/powerpoint/2010/main" val="2178914263"/>
+      </p:ext>
+    </p:extLst>
+  </p:cSld>
+  <p:clrMapOvr>
+    <a:masterClrMapping/>
+  </p:clrMapOvr>
+</p:notes>
+</file>
+
+<file path=ppt/notesSlides/notesSlide8.xml><?xml version="1.0" encoding="utf-8"?>
+<p:notes xmlns:a="http://schemas.openxmlformats.org/drawingml/2006/main" xmlns:r="http://schemas.openxmlformats.org/officeDocument/2006/relationships" xmlns:p="http://schemas.openxmlformats.org/presentationml/2006/main" showMasterSp="0" showMasterPhAnim="0">
+  <p:cSld>
+    <p:spTree>
+      <p:nvGrpSpPr>
         <p:cNvPr id="1" name="Shape 243"/>
         <p:cNvGrpSpPr/>
         <p:nvPr/>
@@ -1565,7 +1783,7 @@
 </p:notes>
 </file>
 
-<file path=ppt/notesSlides/notesSlide8.xml><?xml version="1.0" encoding="utf-8"?>
+<file path=ppt/notesSlides/notesSlide9.xml><?xml version="1.0" encoding="utf-8"?>
 <p:notes xmlns:a="http://schemas.openxmlformats.org/drawingml/2006/main" xmlns:r="http://schemas.openxmlformats.org/officeDocument/2006/relationships" xmlns:p="http://schemas.openxmlformats.org/presentationml/2006/main" showMasterSp="0" showMasterPhAnim="0">
   <p:cSld>
     <p:spTree>
@@ -1623,110 +1841,6 @@
       <p:sp>
         <p:nvSpPr>
           <p:cNvPr id="318" name="Google Shape;318;g260a8deabce_0_36:notes"/>
-          <p:cNvSpPr>
-            <a:spLocks noGrp="1" noRot="1" noChangeAspect="1"/>
-          </p:cNvSpPr>
-          <p:nvPr>
-            <p:ph type="sldImg" idx="2"/>
-          </p:nvPr>
-        </p:nvSpPr>
-        <p:spPr>
-          <a:xfrm>
-            <a:off x="381000" y="685800"/>
-            <a:ext cx="6096000" cy="3429000"/>
-          </a:xfrm>
-          <a:custGeom>
-            <a:avLst/>
-            <a:gdLst/>
-            <a:ahLst/>
-            <a:cxnLst/>
-            <a:rect l="l" t="t" r="r" b="b"/>
-            <a:pathLst>
-              <a:path w="120000" h="120000" extrusionOk="0">
-                <a:moveTo>
-                  <a:pt x="0" y="0"/>
-                </a:moveTo>
-                <a:lnTo>
-                  <a:pt x="120000" y="0"/>
-                </a:lnTo>
-                <a:lnTo>
-                  <a:pt x="120000" y="120000"/>
-                </a:lnTo>
-                <a:lnTo>
-                  <a:pt x="0" y="120000"/>
-                </a:lnTo>
-                <a:close/>
-              </a:path>
-            </a:pathLst>
-          </a:custGeom>
-        </p:spPr>
-      </p:sp>
-    </p:spTree>
-  </p:cSld>
-  <p:clrMapOvr>
-    <a:masterClrMapping/>
-  </p:clrMapOvr>
-</p:notes>
-</file>
-
-<file path=ppt/notesSlides/notesSlide9.xml><?xml version="1.0" encoding="utf-8"?>
-<p:notes xmlns:a="http://schemas.openxmlformats.org/drawingml/2006/main" xmlns:r="http://schemas.openxmlformats.org/officeDocument/2006/relationships" xmlns:p="http://schemas.openxmlformats.org/presentationml/2006/main" showMasterSp="0" showMasterPhAnim="0">
-  <p:cSld>
-    <p:spTree>
-      <p:nvGrpSpPr>
-        <p:cNvPr id="1" name="Shape 326"/>
-        <p:cNvGrpSpPr/>
-        <p:nvPr/>
-      </p:nvGrpSpPr>
-      <p:grpSpPr>
-        <a:xfrm>
-          <a:off x="0" y="0"/>
-          <a:ext cx="0" cy="0"/>
-          <a:chOff x="0" y="0"/>
-          <a:chExt cx="0" cy="0"/>
-        </a:xfrm>
-      </p:grpSpPr>
-      <p:sp>
-        <p:nvSpPr>
-          <p:cNvPr id="327" name="Google Shape;327;g260a8deabce_0_51:notes"/>
-          <p:cNvSpPr txBox="1">
-            <a:spLocks noGrp="1"/>
-          </p:cNvSpPr>
-          <p:nvPr>
-            <p:ph type="body" idx="1"/>
-          </p:nvPr>
-        </p:nvSpPr>
-        <p:spPr>
-          <a:xfrm>
-            <a:off x="685800" y="4343400"/>
-            <a:ext cx="5486400" cy="4114800"/>
-          </a:xfrm>
-          <a:prstGeom prst="rect">
-            <a:avLst/>
-          </a:prstGeom>
-        </p:spPr>
-        <p:txBody>
-          <a:bodyPr spcFirstLastPara="1" wrap="square" lIns="91425" tIns="91425" rIns="91425" bIns="91425" anchor="t" anchorCtr="0">
-            <a:noAutofit/>
-          </a:bodyPr>
-          <a:lstStyle/>
-          <a:p>
-            <a:pPr marL="0" lvl="0" indent="0" algn="l" rtl="0">
-              <a:spcBef>
-                <a:spcPts val="0"/>
-              </a:spcBef>
-              <a:spcAft>
-                <a:spcPts val="0"/>
-              </a:spcAft>
-              <a:buNone/>
-            </a:pPr>
-            <a:endParaRPr/>
-          </a:p>
-        </p:txBody>
-      </p:sp>
-      <p:sp>
-        <p:nvSpPr>
-          <p:cNvPr id="328" name="Google Shape;328;g260a8deabce_0_51:notes"/>
           <p:cNvSpPr>
             <a:spLocks noGrp="1" noRot="1" noChangeAspect="1"/>
           </p:cNvSpPr>
@@ -8952,6 +9066,541 @@
 <file path=ppt/slides/slide10.xml><?xml version="1.0" encoding="utf-8"?>
 <p:sld xmlns:a="http://schemas.openxmlformats.org/drawingml/2006/main" xmlns:r="http://schemas.openxmlformats.org/officeDocument/2006/relationships" xmlns:p="http://schemas.openxmlformats.org/presentationml/2006/main">
   <p:cSld>
+    <p:spTree>
+      <p:nvGrpSpPr>
+        <p:cNvPr id="1" name="Shape 329"/>
+        <p:cNvGrpSpPr/>
+        <p:nvPr/>
+      </p:nvGrpSpPr>
+      <p:grpSpPr>
+        <a:xfrm>
+          <a:off x="0" y="0"/>
+          <a:ext cx="0" cy="0"/>
+          <a:chOff x="0" y="0"/>
+          <a:chExt cx="0" cy="0"/>
+        </a:xfrm>
+      </p:grpSpPr>
+      <p:sp>
+        <p:nvSpPr>
+          <p:cNvPr id="330" name="Google Shape;330;p64"/>
+          <p:cNvSpPr txBox="1">
+            <a:spLocks noGrp="1"/>
+          </p:cNvSpPr>
+          <p:nvPr>
+            <p:ph type="title"/>
+          </p:nvPr>
+        </p:nvSpPr>
+        <p:spPr>
+          <a:xfrm>
+            <a:off x="452625" y="575025"/>
+            <a:ext cx="5280900" cy="354600"/>
+          </a:xfrm>
+          <a:prstGeom prst="rect">
+            <a:avLst/>
+          </a:prstGeom>
+        </p:spPr>
+        <p:txBody>
+          <a:bodyPr spcFirstLastPara="1" wrap="square" lIns="0" tIns="91425" rIns="91425" bIns="91425" anchor="ctr" anchorCtr="0">
+            <a:normAutofit fontScale="90000"/>
+          </a:bodyPr>
+          <a:lstStyle/>
+          <a:p>
+            <a:pPr marL="0" lvl="0" indent="0" algn="l" rtl="0">
+              <a:spcBef>
+                <a:spcPts val="0"/>
+              </a:spcBef>
+              <a:spcAft>
+                <a:spcPts val="0"/>
+              </a:spcAft>
+              <a:buNone/>
+            </a:pPr>
+            <a:r>
+              <a:rPr lang="ru-RU" dirty="0"/>
+              <a:t>Функция </a:t>
+            </a:r>
+            <a:r>
+              <a:rPr lang="ru-RU" dirty="0" err="1"/>
+              <a:t>Растригина</a:t>
+            </a:r>
+            <a:endParaRPr dirty="0"/>
+          </a:p>
+        </p:txBody>
+      </p:sp>
+      <p:sp>
+        <p:nvSpPr>
+          <p:cNvPr id="331" name="Google Shape;331;p64"/>
+          <p:cNvSpPr txBox="1"/>
+          <p:nvPr/>
+        </p:nvSpPr>
+        <p:spPr>
+          <a:xfrm>
+            <a:off x="4396875" y="1632240"/>
+            <a:ext cx="3878400" cy="295466"/>
+          </a:xfrm>
+          <a:prstGeom prst="rect">
+            <a:avLst/>
+          </a:prstGeom>
+          <a:noFill/>
+          <a:ln>
+            <a:noFill/>
+          </a:ln>
+        </p:spPr>
+        <p:txBody>
+          <a:bodyPr spcFirstLastPara="1" wrap="square" lIns="0" tIns="0" rIns="0" bIns="0" anchor="t" anchorCtr="0">
+            <a:spAutoFit/>
+          </a:bodyPr>
+          <a:lstStyle/>
+          <a:p>
+            <a:pPr marL="0" marR="0" lvl="0" indent="0" algn="l" rtl="0">
+              <a:lnSpc>
+                <a:spcPct val="160000"/>
+              </a:lnSpc>
+              <a:spcBef>
+                <a:spcPts val="0"/>
+              </a:spcBef>
+              <a:spcAft>
+                <a:spcPts val="0"/>
+              </a:spcAft>
+              <a:buNone/>
+            </a:pPr>
+            <a:r>
+              <a:rPr lang="en-US" sz="1200" dirty="0">
+                <a:highlight>
+                  <a:srgbClr val="FFFF00"/>
+                </a:highlight>
+                <a:latin typeface="Manrope"/>
+                <a:ea typeface="Manrope"/>
+                <a:cs typeface="Manrope"/>
+                <a:sym typeface="Manrope"/>
+              </a:rPr>
+              <a:t>f(…) = … (</a:t>
+            </a:r>
+            <a:r>
+              <a:rPr lang="ru-RU" sz="1200" dirty="0">
+                <a:highlight>
+                  <a:srgbClr val="FFFF00"/>
+                </a:highlight>
+                <a:latin typeface="Manrope"/>
+                <a:ea typeface="Manrope"/>
+                <a:cs typeface="Manrope"/>
+                <a:sym typeface="Manrope"/>
+              </a:rPr>
+              <a:t>но нормальной формулой</a:t>
+            </a:r>
+            <a:r>
+              <a:rPr lang="en-US" sz="1200" dirty="0">
+                <a:highlight>
+                  <a:srgbClr val="FFFF00"/>
+                </a:highlight>
+                <a:latin typeface="Manrope"/>
+                <a:ea typeface="Manrope"/>
+                <a:cs typeface="Manrope"/>
+                <a:sym typeface="Manrope"/>
+              </a:rPr>
+              <a:t>, </a:t>
+            </a:r>
+            <a:r>
+              <a:rPr lang="ru-RU" sz="1200" dirty="0">
+                <a:highlight>
+                  <a:srgbClr val="FFFF00"/>
+                </a:highlight>
+                <a:latin typeface="Manrope"/>
+                <a:ea typeface="Manrope"/>
+                <a:cs typeface="Manrope"/>
+                <a:sym typeface="Manrope"/>
+              </a:rPr>
+              <a:t>а не текстом</a:t>
+            </a:r>
+            <a:r>
+              <a:rPr lang="en-US" sz="1200" dirty="0">
+                <a:highlight>
+                  <a:srgbClr val="FFFF00"/>
+                </a:highlight>
+                <a:latin typeface="Manrope"/>
+                <a:ea typeface="Manrope"/>
+                <a:cs typeface="Manrope"/>
+                <a:sym typeface="Manrope"/>
+              </a:rPr>
+              <a:t>)</a:t>
+            </a:r>
+            <a:endParaRPr lang="ru-RU" sz="1200" dirty="0">
+              <a:highlight>
+                <a:srgbClr val="FFFF00"/>
+              </a:highlight>
+              <a:latin typeface="Manrope"/>
+              <a:ea typeface="Manrope"/>
+              <a:cs typeface="Manrope"/>
+              <a:sym typeface="Manrope"/>
+            </a:endParaRPr>
+          </a:p>
+        </p:txBody>
+      </p:sp>
+      <p:sp>
+        <p:nvSpPr>
+          <p:cNvPr id="332" name="Google Shape;332;p64"/>
+          <p:cNvSpPr txBox="1"/>
+          <p:nvPr/>
+        </p:nvSpPr>
+        <p:spPr>
+          <a:xfrm>
+            <a:off x="4396878" y="2319858"/>
+            <a:ext cx="3878400" cy="1077218"/>
+          </a:xfrm>
+          <a:prstGeom prst="rect">
+            <a:avLst/>
+          </a:prstGeom>
+          <a:noFill/>
+          <a:ln>
+            <a:noFill/>
+          </a:ln>
+        </p:spPr>
+        <p:txBody>
+          <a:bodyPr spcFirstLastPara="1" wrap="square" lIns="0" tIns="0" rIns="0" bIns="0" anchor="t" anchorCtr="0">
+            <a:spAutoFit/>
+          </a:bodyPr>
+          <a:lstStyle/>
+          <a:p>
+            <a:pPr marL="254000" marR="0" lvl="1" indent="-114300" algn="l" rtl="0">
+              <a:lnSpc>
+                <a:spcPct val="150000"/>
+              </a:lnSpc>
+              <a:spcBef>
+                <a:spcPts val="1000"/>
+              </a:spcBef>
+              <a:spcAft>
+                <a:spcPts val="0"/>
+              </a:spcAft>
+              <a:buClr>
+                <a:srgbClr val="333333"/>
+              </a:buClr>
+              <a:buSzPts val="1000"/>
+              <a:buFont typeface="Manrope"/>
+              <a:buChar char="•"/>
+            </a:pPr>
+            <a:r>
+              <a:rPr lang="ru-RU" sz="1000" dirty="0" err="1">
+                <a:solidFill>
+                  <a:srgbClr val="333333"/>
+                </a:solidFill>
+                <a:highlight>
+                  <a:srgbClr val="FFFF00"/>
+                </a:highlight>
+                <a:latin typeface="Manrope"/>
+                <a:ea typeface="Manrope"/>
+                <a:cs typeface="Manrope"/>
+                <a:sym typeface="Manrope"/>
+              </a:rPr>
+              <a:t>Пункт1</a:t>
+            </a:r>
+            <a:r>
+              <a:rPr lang="en-US" sz="1000" dirty="0">
+                <a:solidFill>
+                  <a:srgbClr val="333333"/>
+                </a:solidFill>
+                <a:highlight>
+                  <a:srgbClr val="FFFF00"/>
+                </a:highlight>
+                <a:latin typeface="Manrope"/>
+                <a:ea typeface="Manrope"/>
+                <a:cs typeface="Manrope"/>
+                <a:sym typeface="Manrope"/>
+              </a:rPr>
+              <a:t>;</a:t>
+            </a:r>
+          </a:p>
+          <a:p>
+            <a:pPr marL="254000" marR="0" lvl="1" indent="-114300" algn="l" rtl="0">
+              <a:lnSpc>
+                <a:spcPct val="150000"/>
+              </a:lnSpc>
+              <a:spcBef>
+                <a:spcPts val="1000"/>
+              </a:spcBef>
+              <a:spcAft>
+                <a:spcPts val="0"/>
+              </a:spcAft>
+              <a:buClr>
+                <a:srgbClr val="333333"/>
+              </a:buClr>
+              <a:buSzPts val="1000"/>
+              <a:buFont typeface="Manrope"/>
+              <a:buChar char="•"/>
+            </a:pPr>
+            <a:r>
+              <a:rPr lang="ru-RU" sz="1000" dirty="0" err="1">
+                <a:solidFill>
+                  <a:srgbClr val="333333"/>
+                </a:solidFill>
+                <a:highlight>
+                  <a:srgbClr val="FFFF00"/>
+                </a:highlight>
+                <a:latin typeface="Manrope"/>
+                <a:ea typeface="Manrope"/>
+                <a:cs typeface="Manrope"/>
+                <a:sym typeface="Manrope"/>
+              </a:rPr>
+              <a:t>Пункт2</a:t>
+            </a:r>
+            <a:r>
+              <a:rPr lang="en-US" sz="1000" dirty="0">
+                <a:solidFill>
+                  <a:srgbClr val="333333"/>
+                </a:solidFill>
+                <a:highlight>
+                  <a:srgbClr val="FFFF00"/>
+                </a:highlight>
+                <a:latin typeface="Manrope"/>
+                <a:ea typeface="Manrope"/>
+                <a:cs typeface="Manrope"/>
+                <a:sym typeface="Manrope"/>
+              </a:rPr>
+              <a:t>;</a:t>
+            </a:r>
+          </a:p>
+          <a:p>
+            <a:pPr marL="254000" marR="0" lvl="1" indent="-114300" algn="l" rtl="0">
+              <a:lnSpc>
+                <a:spcPct val="150000"/>
+              </a:lnSpc>
+              <a:spcBef>
+                <a:spcPts val="1000"/>
+              </a:spcBef>
+              <a:spcAft>
+                <a:spcPts val="0"/>
+              </a:spcAft>
+              <a:buClr>
+                <a:srgbClr val="333333"/>
+              </a:buClr>
+              <a:buSzPts val="1000"/>
+              <a:buFont typeface="Manrope"/>
+              <a:buChar char="•"/>
+            </a:pPr>
+            <a:r>
+              <a:rPr lang="ru-RU" sz="1000" dirty="0" err="1">
+                <a:solidFill>
+                  <a:srgbClr val="333333"/>
+                </a:solidFill>
+                <a:highlight>
+                  <a:srgbClr val="FFFF00"/>
+                </a:highlight>
+                <a:latin typeface="Manrope"/>
+                <a:ea typeface="Manrope"/>
+                <a:cs typeface="Manrope"/>
+                <a:sym typeface="Manrope"/>
+              </a:rPr>
+              <a:t>Пункт3</a:t>
+            </a:r>
+            <a:r>
+              <a:rPr lang="en-US" sz="1000" dirty="0">
+                <a:solidFill>
+                  <a:srgbClr val="333333"/>
+                </a:solidFill>
+                <a:highlight>
+                  <a:srgbClr val="FFFF00"/>
+                </a:highlight>
+                <a:latin typeface="Manrope"/>
+                <a:ea typeface="Manrope"/>
+                <a:cs typeface="Manrope"/>
+                <a:sym typeface="Manrope"/>
+              </a:rPr>
+              <a:t>;</a:t>
+            </a:r>
+            <a:endParaRPr sz="1000" dirty="0">
+              <a:solidFill>
+                <a:srgbClr val="333333"/>
+              </a:solidFill>
+              <a:highlight>
+                <a:srgbClr val="FFFF00"/>
+              </a:highlight>
+              <a:latin typeface="Manrope"/>
+              <a:ea typeface="Manrope"/>
+              <a:cs typeface="Manrope"/>
+              <a:sym typeface="Manrope"/>
+            </a:endParaRPr>
+          </a:p>
+        </p:txBody>
+      </p:sp>
+      <p:sp>
+        <p:nvSpPr>
+          <p:cNvPr id="2" name="Google Shape;331;p64">
+            <a:extLst>
+              <a:ext uri="{FF2B5EF4-FFF2-40B4-BE49-F238E27FC236}">
+                <a16:creationId xmlns:a16="http://schemas.microsoft.com/office/drawing/2014/main" id="{6C02F778-99D4-1FA0-33A4-7882B5ADF2CA}"/>
+              </a:ext>
+            </a:extLst>
+          </p:cNvPr>
+          <p:cNvSpPr txBox="1"/>
+          <p:nvPr/>
+        </p:nvSpPr>
+        <p:spPr>
+          <a:xfrm>
+            <a:off x="4396875" y="1283764"/>
+            <a:ext cx="3878400" cy="295466"/>
+          </a:xfrm>
+          <a:prstGeom prst="rect">
+            <a:avLst/>
+          </a:prstGeom>
+          <a:noFill/>
+          <a:ln>
+            <a:noFill/>
+          </a:ln>
+        </p:spPr>
+        <p:txBody>
+          <a:bodyPr spcFirstLastPara="1" wrap="square" lIns="0" tIns="0" rIns="0" bIns="0" anchor="t" anchorCtr="0">
+            <a:spAutoFit/>
+          </a:bodyPr>
+          <a:lstStyle/>
+          <a:p>
+            <a:pPr marL="0" marR="0" lvl="0" indent="0" algn="l" rtl="0">
+              <a:lnSpc>
+                <a:spcPct val="160000"/>
+              </a:lnSpc>
+              <a:spcBef>
+                <a:spcPts val="0"/>
+              </a:spcBef>
+              <a:spcAft>
+                <a:spcPts val="0"/>
+              </a:spcAft>
+              <a:buNone/>
+            </a:pPr>
+            <a:r>
+              <a:rPr lang="ru-RU" sz="1200" dirty="0">
+                <a:highlight>
+                  <a:srgbClr val="FFFF00"/>
+                </a:highlight>
+                <a:latin typeface="Manrope"/>
+                <a:ea typeface="Manrope"/>
+                <a:cs typeface="Manrope"/>
+                <a:sym typeface="Manrope"/>
+              </a:rPr>
+              <a:t>Текст</a:t>
+            </a:r>
+          </a:p>
+        </p:txBody>
+      </p:sp>
+      <p:pic>
+        <p:nvPicPr>
+          <p:cNvPr id="8" name="Рисунок 7">
+            <a:extLst>
+              <a:ext uri="{FF2B5EF4-FFF2-40B4-BE49-F238E27FC236}">
+                <a16:creationId xmlns:a16="http://schemas.microsoft.com/office/drawing/2014/main" id="{AFA47CB7-E53D-9473-0555-34DD3074AA7E}"/>
+              </a:ext>
+            </a:extLst>
+          </p:cNvPr>
+          <p:cNvPicPr>
+            <a:picLocks noChangeAspect="1"/>
+          </p:cNvPicPr>
+          <p:nvPr/>
+        </p:nvPicPr>
+        <p:blipFill>
+          <a:blip r:embed="rId3"/>
+          <a:stretch>
+            <a:fillRect/>
+          </a:stretch>
+        </p:blipFill>
+        <p:spPr>
+          <a:xfrm>
+            <a:off x="260120" y="1243875"/>
+            <a:ext cx="3808447" cy="3103377"/>
+          </a:xfrm>
+          <a:prstGeom prst="rect">
+            <a:avLst/>
+          </a:prstGeom>
+          <a:effectLst>
+            <a:softEdge rad="266700"/>
+          </a:effectLst>
+        </p:spPr>
+      </p:pic>
+      <p:sp>
+        <p:nvSpPr>
+          <p:cNvPr id="9" name="Google Shape;331;p64">
+            <a:extLst>
+              <a:ext uri="{FF2B5EF4-FFF2-40B4-BE49-F238E27FC236}">
+                <a16:creationId xmlns:a16="http://schemas.microsoft.com/office/drawing/2014/main" id="{8413CDD0-0048-6393-5A61-E79532257A93}"/>
+              </a:ext>
+            </a:extLst>
+          </p:cNvPr>
+          <p:cNvSpPr txBox="1"/>
+          <p:nvPr/>
+        </p:nvSpPr>
+        <p:spPr>
+          <a:xfrm>
+            <a:off x="4396875" y="2024392"/>
+            <a:ext cx="3878400" cy="295466"/>
+          </a:xfrm>
+          <a:prstGeom prst="rect">
+            <a:avLst/>
+          </a:prstGeom>
+          <a:noFill/>
+          <a:ln>
+            <a:noFill/>
+          </a:ln>
+        </p:spPr>
+        <p:txBody>
+          <a:bodyPr spcFirstLastPara="1" wrap="square" lIns="0" tIns="0" rIns="0" bIns="0" anchor="t" anchorCtr="0">
+            <a:spAutoFit/>
+          </a:bodyPr>
+          <a:lstStyle/>
+          <a:p>
+            <a:pPr marL="0" marR="0" lvl="0" indent="0" algn="l" rtl="0">
+              <a:lnSpc>
+                <a:spcPct val="160000"/>
+              </a:lnSpc>
+              <a:spcBef>
+                <a:spcPts val="0"/>
+              </a:spcBef>
+              <a:spcAft>
+                <a:spcPts val="0"/>
+              </a:spcAft>
+              <a:buNone/>
+            </a:pPr>
+            <a:r>
+              <a:rPr lang="ru-RU" sz="1200" dirty="0">
+                <a:highlight>
+                  <a:srgbClr val="FFFF00"/>
+                </a:highlight>
+                <a:latin typeface="Manrope"/>
+                <a:ea typeface="Manrope"/>
+                <a:cs typeface="Manrope"/>
+                <a:sym typeface="Manrope"/>
+              </a:rPr>
+              <a:t>Особенности</a:t>
+            </a:r>
+            <a:r>
+              <a:rPr lang="en-US" sz="1200" dirty="0">
+                <a:highlight>
+                  <a:srgbClr val="FFFF00"/>
+                </a:highlight>
+                <a:latin typeface="Manrope"/>
+                <a:ea typeface="Manrope"/>
+                <a:cs typeface="Manrope"/>
+                <a:sym typeface="Manrope"/>
+              </a:rPr>
+              <a:t>:</a:t>
+            </a:r>
+            <a:endParaRPr lang="ru-RU" sz="1200" dirty="0">
+              <a:highlight>
+                <a:srgbClr val="FFFF00"/>
+              </a:highlight>
+              <a:latin typeface="Manrope"/>
+              <a:ea typeface="Manrope"/>
+              <a:cs typeface="Manrope"/>
+              <a:sym typeface="Manrope"/>
+            </a:endParaRPr>
+          </a:p>
+        </p:txBody>
+      </p:sp>
+    </p:spTree>
+  </p:cSld>
+  <p:clrMapOvr>
+    <a:masterClrMapping/>
+  </p:clrMapOvr>
+</p:sld>
+</file>
+
+<file path=ppt/slides/slide11.xml><?xml version="1.0" encoding="utf-8"?>
+<p:sld xmlns:a="http://schemas.openxmlformats.org/drawingml/2006/main" xmlns:r="http://schemas.openxmlformats.org/officeDocument/2006/relationships" xmlns:p="http://schemas.openxmlformats.org/presentationml/2006/main">
+  <p:cSld>
     <p:bg>
       <p:bgPr>
         <a:solidFill>
@@ -12336,276 +12985,1061 @@
           <a:chExt cx="0" cy="0"/>
         </a:xfrm>
       </p:grpSpPr>
-      <p:sp>
-        <p:nvSpPr>
-          <p:cNvPr id="312" name="Google Shape;312;p62"/>
-          <p:cNvSpPr txBox="1"/>
-          <p:nvPr/>
-        </p:nvSpPr>
-        <p:spPr>
-          <a:xfrm>
-            <a:off x="452626" y="1207200"/>
-            <a:ext cx="6375900" cy="295466"/>
-          </a:xfrm>
-          <a:prstGeom prst="rect">
-            <a:avLst/>
-          </a:prstGeom>
-          <a:noFill/>
-          <a:ln>
-            <a:noFill/>
-          </a:ln>
-        </p:spPr>
-        <p:txBody>
-          <a:bodyPr spcFirstLastPara="1" wrap="square" lIns="0" tIns="0" rIns="0" bIns="0" anchor="t" anchorCtr="0">
-            <a:spAutoFit/>
-          </a:bodyPr>
-          <a:lstStyle/>
-          <a:p>
-            <a:pPr marL="0" marR="0" lvl="0" indent="0" algn="l" rtl="0">
-              <a:lnSpc>
-                <a:spcPct val="160000"/>
-              </a:lnSpc>
-              <a:spcBef>
-                <a:spcPts val="0"/>
-              </a:spcBef>
-              <a:spcAft>
-                <a:spcPts val="0"/>
-              </a:spcAft>
-              <a:buNone/>
-            </a:pPr>
-            <a:r>
-              <a:rPr lang="ru-RU" sz="1200" i="0" u="none" strike="noStrike" cap="none" dirty="0">
-                <a:solidFill>
-                  <a:srgbClr val="333333"/>
-                </a:solidFill>
-                <a:highlight>
-                  <a:srgbClr val="FFFF00"/>
-                </a:highlight>
-                <a:latin typeface="Manrope Medium"/>
-                <a:ea typeface="Manrope Medium"/>
-                <a:cs typeface="Manrope Medium"/>
-                <a:sym typeface="Manrope Medium"/>
-              </a:rPr>
-              <a:t>Текст</a:t>
-            </a:r>
-            <a:endParaRPr sz="1200" dirty="0">
-              <a:highlight>
-                <a:srgbClr val="FFFF00"/>
-              </a:highlight>
-              <a:latin typeface="Manrope"/>
-              <a:ea typeface="Manrope"/>
-              <a:cs typeface="Manrope"/>
-              <a:sym typeface="Manrope"/>
-            </a:endParaRPr>
-          </a:p>
-        </p:txBody>
-      </p:sp>
-      <p:sp>
-        <p:nvSpPr>
-          <p:cNvPr id="313" name="Google Shape;313;p62"/>
-          <p:cNvSpPr txBox="1"/>
-          <p:nvPr/>
-        </p:nvSpPr>
-        <p:spPr>
-          <a:xfrm>
-            <a:off x="452628" y="2085108"/>
-            <a:ext cx="3878400" cy="507831"/>
-          </a:xfrm>
-          <a:prstGeom prst="rect">
-            <a:avLst/>
-          </a:prstGeom>
-          <a:noFill/>
-          <a:ln>
-            <a:noFill/>
-          </a:ln>
-        </p:spPr>
-        <p:txBody>
-          <a:bodyPr spcFirstLastPara="1" wrap="square" lIns="0" tIns="0" rIns="0" bIns="0" anchor="t" anchorCtr="0">
-            <a:spAutoFit/>
-          </a:bodyPr>
-          <a:lstStyle/>
-          <a:p>
-            <a:pPr marL="254000" marR="0" lvl="1" indent="-120650" algn="l" rtl="0">
-              <a:lnSpc>
-                <a:spcPct val="150000"/>
-              </a:lnSpc>
-              <a:spcBef>
-                <a:spcPts val="0"/>
-              </a:spcBef>
-              <a:spcAft>
-                <a:spcPts val="0"/>
-              </a:spcAft>
-              <a:buClr>
-                <a:srgbClr val="333333"/>
-              </a:buClr>
-              <a:buSzPts val="1100"/>
-              <a:buFont typeface="Manrope"/>
-              <a:buChar char="•"/>
-            </a:pPr>
-            <a:r>
-              <a:rPr lang="ru-RU" sz="1100" i="0" u="none" strike="noStrike" cap="none" dirty="0">
-                <a:solidFill>
-                  <a:srgbClr val="333333"/>
-                </a:solidFill>
-                <a:highlight>
-                  <a:srgbClr val="FFFF00"/>
-                </a:highlight>
-                <a:latin typeface="Manrope"/>
-                <a:ea typeface="Manrope"/>
-                <a:cs typeface="Manrope"/>
-                <a:sym typeface="Manrope"/>
-              </a:rPr>
-              <a:t>Текст</a:t>
-            </a:r>
-          </a:p>
-          <a:p>
-            <a:pPr marL="254000" marR="0" lvl="1" indent="-120650" algn="l" rtl="0">
-              <a:lnSpc>
-                <a:spcPct val="150000"/>
-              </a:lnSpc>
-              <a:spcBef>
-                <a:spcPts val="0"/>
-              </a:spcBef>
-              <a:spcAft>
-                <a:spcPts val="0"/>
-              </a:spcAft>
-              <a:buClr>
-                <a:srgbClr val="333333"/>
-              </a:buClr>
-              <a:buSzPts val="1100"/>
-              <a:buFont typeface="Manrope"/>
-              <a:buChar char="•"/>
-            </a:pPr>
-            <a:r>
-              <a:rPr lang="ru-RU" sz="1100" dirty="0">
-                <a:solidFill>
-                  <a:srgbClr val="333333"/>
-                </a:solidFill>
-                <a:highlight>
-                  <a:srgbClr val="FFFF00"/>
-                </a:highlight>
-                <a:latin typeface="Manrope"/>
-                <a:ea typeface="Manrope"/>
-                <a:cs typeface="Manrope"/>
-                <a:sym typeface="Manrope"/>
-              </a:rPr>
-              <a:t>Текст</a:t>
-            </a:r>
-            <a:endParaRPr sz="1100" dirty="0">
-              <a:highlight>
-                <a:srgbClr val="FFFF00"/>
-              </a:highlight>
-              <a:latin typeface="Manrope"/>
-              <a:ea typeface="Manrope"/>
-              <a:cs typeface="Manrope"/>
-              <a:sym typeface="Manrope"/>
-            </a:endParaRPr>
-          </a:p>
-        </p:txBody>
-      </p:sp>
-      <p:sp>
-        <p:nvSpPr>
-          <p:cNvPr id="314" name="Google Shape;314;p62"/>
-          <p:cNvSpPr txBox="1"/>
-          <p:nvPr/>
-        </p:nvSpPr>
-        <p:spPr>
-          <a:xfrm>
-            <a:off x="4594200" y="2085108"/>
-            <a:ext cx="3828000" cy="507831"/>
-          </a:xfrm>
-          <a:prstGeom prst="rect">
-            <a:avLst/>
-          </a:prstGeom>
-          <a:noFill/>
-          <a:ln>
-            <a:noFill/>
-          </a:ln>
-        </p:spPr>
-        <p:txBody>
-          <a:bodyPr spcFirstLastPara="1" wrap="square" lIns="0" tIns="0" rIns="0" bIns="0" anchor="t" anchorCtr="0">
-            <a:spAutoFit/>
-          </a:bodyPr>
-          <a:lstStyle/>
-          <a:p>
-            <a:pPr marL="254000" marR="0" lvl="1" indent="-120650" algn="l" rtl="0">
-              <a:lnSpc>
-                <a:spcPct val="150000"/>
-              </a:lnSpc>
-              <a:spcBef>
-                <a:spcPts val="0"/>
-              </a:spcBef>
-              <a:spcAft>
-                <a:spcPts val="0"/>
-              </a:spcAft>
-              <a:buClr>
-                <a:srgbClr val="333333"/>
-              </a:buClr>
-              <a:buSzPts val="1100"/>
-              <a:buFont typeface="Manrope"/>
-              <a:buChar char="•"/>
-            </a:pPr>
-            <a:r>
-              <a:rPr lang="ru-RU" sz="1100" i="0" u="none" strike="noStrike" cap="none" dirty="0">
-                <a:solidFill>
-                  <a:srgbClr val="333333"/>
-                </a:solidFill>
-                <a:highlight>
-                  <a:srgbClr val="FFFF00"/>
-                </a:highlight>
-                <a:latin typeface="Manrope"/>
-                <a:ea typeface="Manrope"/>
-                <a:cs typeface="Manrope"/>
-                <a:sym typeface="Manrope"/>
-              </a:rPr>
-              <a:t>Текст</a:t>
-            </a:r>
-          </a:p>
-          <a:p>
-            <a:pPr marL="254000" marR="0" lvl="1" indent="-120650" algn="l" rtl="0">
-              <a:lnSpc>
-                <a:spcPct val="150000"/>
-              </a:lnSpc>
-              <a:spcBef>
-                <a:spcPts val="0"/>
-              </a:spcBef>
-              <a:spcAft>
-                <a:spcPts val="0"/>
-              </a:spcAft>
-              <a:buClr>
-                <a:srgbClr val="333333"/>
-              </a:buClr>
-              <a:buSzPts val="1100"/>
-              <a:buFont typeface="Manrope"/>
-              <a:buChar char="•"/>
-            </a:pPr>
-            <a:r>
-              <a:rPr lang="ru-RU" sz="1100" dirty="0">
-                <a:solidFill>
-                  <a:srgbClr val="333333"/>
-                </a:solidFill>
-                <a:highlight>
-                  <a:srgbClr val="FFFF00"/>
-                </a:highlight>
-                <a:latin typeface="Manrope"/>
-                <a:ea typeface="Manrope"/>
-                <a:cs typeface="Manrope"/>
-                <a:sym typeface="Manrope"/>
-              </a:rPr>
-              <a:t>Текст</a:t>
-            </a:r>
-            <a:endParaRPr sz="1100" dirty="0">
-              <a:highlight>
-                <a:srgbClr val="FFFF00"/>
-              </a:highlight>
-              <a:latin typeface="Manrope"/>
-              <a:ea typeface="Manrope"/>
-              <a:cs typeface="Manrope"/>
-              <a:sym typeface="Manrope"/>
-            </a:endParaRPr>
-          </a:p>
-        </p:txBody>
-      </p:sp>
+      <mc:AlternateContent xmlns:mc="http://schemas.openxmlformats.org/markup-compatibility/2006">
+        <mc:Choice xmlns:a14="http://schemas.microsoft.com/office/drawing/2010/main" Requires="a14">
+          <p:sp>
+            <p:nvSpPr>
+              <p:cNvPr id="312" name="Google Shape;312;p62"/>
+              <p:cNvSpPr txBox="1"/>
+              <p:nvPr/>
+            </p:nvSpPr>
+            <p:spPr>
+              <a:xfrm>
+                <a:off x="452625" y="1042516"/>
+                <a:ext cx="6375900" cy="591957"/>
+              </a:xfrm>
+              <a:prstGeom prst="rect">
+                <a:avLst/>
+              </a:prstGeom>
+              <a:noFill/>
+              <a:ln>
+                <a:noFill/>
+              </a:ln>
+            </p:spPr>
+            <p:txBody>
+              <a:bodyPr spcFirstLastPara="1" wrap="square" lIns="0" tIns="0" rIns="0" bIns="0" anchor="t" anchorCtr="0">
+                <a:spAutoFit/>
+              </a:bodyPr>
+              <a:lstStyle/>
+              <a:p>
+                <a:pPr lvl="0">
+                  <a:lnSpc>
+                    <a:spcPct val="160000"/>
+                  </a:lnSpc>
+                </a:pPr>
+                <a:r>
+                  <a:rPr lang="ru-RU" sz="1200" dirty="0">
+                    <a:solidFill>
+                      <a:srgbClr val="333333"/>
+                    </a:solidFill>
+                    <a:latin typeface="Manrope Medium"/>
+                    <a:ea typeface="Manrope"/>
+                    <a:cs typeface="Manrope"/>
+                    <a:sym typeface="Manrope Medium"/>
+                  </a:rPr>
+                  <a:t>Заданы </a:t>
+                </a:r>
+                <a:r>
+                  <a:rPr lang="en-US" sz="1200" dirty="0">
+                    <a:solidFill>
+                      <a:srgbClr val="333333"/>
+                    </a:solidFill>
+                    <a:latin typeface="Manrope Medium"/>
+                    <a:ea typeface="Manrope"/>
+                    <a:cs typeface="Manrope"/>
+                    <a:sym typeface="Manrope Medium"/>
+                  </a:rPr>
+                  <a:t>n-</a:t>
+                </a:r>
+                <a:r>
+                  <a:rPr lang="ru-RU" sz="1200" dirty="0">
+                    <a:solidFill>
+                      <a:srgbClr val="333333"/>
+                    </a:solidFill>
+                    <a:latin typeface="Manrope Medium"/>
+                    <a:ea typeface="Manrope"/>
+                    <a:cs typeface="Manrope"/>
+                    <a:sym typeface="Manrope Medium"/>
+                  </a:rPr>
+                  <a:t>мерный параллелепипед </a:t>
+                </a:r>
+                <a14:m>
+                  <m:oMath xmlns:m="http://schemas.openxmlformats.org/officeDocument/2006/math">
+                    <m:r>
+                      <m:rPr>
+                        <m:sty m:val="p"/>
+                      </m:rPr>
+                      <a:rPr lang="en-US" sz="1200" b="0" i="0" smtClean="0">
+                        <a:solidFill>
+                          <a:srgbClr val="333333"/>
+                        </a:solidFill>
+                        <a:latin typeface="Cambria Math" panose="02040503050406030204" pitchFamily="18" charset="0"/>
+                        <a:ea typeface="Manrope"/>
+                        <a:cs typeface="Manrope"/>
+                        <a:sym typeface="Manrope Medium"/>
+                      </a:rPr>
+                      <m:t>Π</m:t>
+                    </m:r>
+                    <m:r>
+                      <a:rPr lang="en-US" sz="1200" b="0" i="1" smtClean="0">
+                        <a:solidFill>
+                          <a:srgbClr val="333333"/>
+                        </a:solidFill>
+                        <a:latin typeface="Cambria Math" panose="02040503050406030204" pitchFamily="18" charset="0"/>
+                        <a:ea typeface="Manrope"/>
+                        <a:cs typeface="Manrope"/>
+                        <a:sym typeface="Manrope Medium"/>
+                      </a:rPr>
+                      <m:t>=</m:t>
+                    </m:r>
+                    <m:r>
+                      <m:rPr>
+                        <m:lit/>
+                      </m:rPr>
+                      <a:rPr lang="en-US" sz="1200" b="0" i="1" smtClean="0">
+                        <a:solidFill>
+                          <a:srgbClr val="333333"/>
+                        </a:solidFill>
+                        <a:latin typeface="Cambria Math" panose="02040503050406030204" pitchFamily="18" charset="0"/>
+                        <a:ea typeface="Manrope"/>
+                        <a:cs typeface="Manrope"/>
+                        <a:sym typeface="Manrope Medium"/>
+                      </a:rPr>
+                      <m:t>{</m:t>
+                    </m:r>
+                    <m:r>
+                      <a:rPr lang="ru-RU" sz="1200" b="0" i="0" smtClean="0">
+                        <a:solidFill>
+                          <a:srgbClr val="333333"/>
+                        </a:solidFill>
+                        <a:latin typeface="Cambria Math" panose="02040503050406030204" pitchFamily="18" charset="0"/>
+                        <a:ea typeface="Manrope"/>
+                        <a:cs typeface="Manrope"/>
+                        <a:sym typeface="Manrope Medium"/>
+                      </a:rPr>
+                      <m:t> </m:t>
+                    </m:r>
+                    <m:r>
+                      <a:rPr lang="ru-RU" sz="1200">
+                        <a:latin typeface="Cambria Math" panose="02040503050406030204" pitchFamily="18" charset="0"/>
+                      </a:rPr>
+                      <m:t>𝐱</m:t>
+                    </m:r>
+                    <m:r>
+                      <a:rPr lang="en-US" sz="1200" b="0" i="1" smtClean="0">
+                        <a:solidFill>
+                          <a:srgbClr val="333333"/>
+                        </a:solidFill>
+                        <a:latin typeface="Cambria Math" panose="02040503050406030204" pitchFamily="18" charset="0"/>
+                        <a:ea typeface="Manrope"/>
+                        <a:cs typeface="Manrope"/>
+                        <a:sym typeface="Manrope Medium"/>
+                      </a:rPr>
+                      <m:t>=</m:t>
+                    </m:r>
+                    <m:d>
+                      <m:dPr>
+                        <m:ctrlPr>
+                          <a:rPr lang="en-US" sz="1200" b="0" i="1" smtClean="0">
+                            <a:solidFill>
+                              <a:srgbClr val="333333"/>
+                            </a:solidFill>
+                            <a:latin typeface="Cambria Math" panose="02040503050406030204" pitchFamily="18" charset="0"/>
+                            <a:ea typeface="Manrope"/>
+                            <a:cs typeface="Manrope"/>
+                            <a:sym typeface="Manrope Medium"/>
+                          </a:rPr>
+                        </m:ctrlPr>
+                      </m:dPr>
+                      <m:e>
+                        <m:sSub>
+                          <m:sSubPr>
+                            <m:ctrlPr>
+                              <a:rPr lang="en-US" sz="1200" b="0" i="1" smtClean="0">
+                                <a:solidFill>
+                                  <a:srgbClr val="333333"/>
+                                </a:solidFill>
+                                <a:latin typeface="Cambria Math" panose="02040503050406030204" pitchFamily="18" charset="0"/>
+                                <a:ea typeface="Manrope"/>
+                                <a:cs typeface="Manrope"/>
+                                <a:sym typeface="Manrope Medium"/>
+                              </a:rPr>
+                            </m:ctrlPr>
+                          </m:sSubPr>
+                          <m:e>
+                            <m:r>
+                              <a:rPr lang="en-US" sz="1200" b="0" i="1" smtClean="0">
+                                <a:solidFill>
+                                  <a:srgbClr val="333333"/>
+                                </a:solidFill>
+                                <a:latin typeface="Cambria Math" panose="02040503050406030204" pitchFamily="18" charset="0"/>
+                                <a:ea typeface="Manrope"/>
+                                <a:cs typeface="Manrope"/>
+                                <a:sym typeface="Manrope Medium"/>
+                              </a:rPr>
+                              <m:t>𝑥</m:t>
+                            </m:r>
+                          </m:e>
+                          <m:sub>
+                            <m:r>
+                              <a:rPr lang="en-US" sz="1200" b="0" i="1" smtClean="0">
+                                <a:solidFill>
+                                  <a:srgbClr val="333333"/>
+                                </a:solidFill>
+                                <a:latin typeface="Cambria Math" panose="02040503050406030204" pitchFamily="18" charset="0"/>
+                                <a:ea typeface="Manrope"/>
+                                <a:cs typeface="Manrope"/>
+                                <a:sym typeface="Manrope Medium"/>
+                              </a:rPr>
+                              <m:t>1</m:t>
+                            </m:r>
+                          </m:sub>
+                        </m:sSub>
+                        <m:r>
+                          <a:rPr lang="en-US" sz="1200" b="0" i="1" smtClean="0">
+                            <a:solidFill>
+                              <a:srgbClr val="333333"/>
+                            </a:solidFill>
+                            <a:latin typeface="Cambria Math" panose="02040503050406030204" pitchFamily="18" charset="0"/>
+                            <a:ea typeface="Manrope"/>
+                            <a:cs typeface="Manrope"/>
+                            <a:sym typeface="Manrope Medium"/>
+                          </a:rPr>
+                          <m:t>,</m:t>
+                        </m:r>
+                        <m:sSub>
+                          <m:sSubPr>
+                            <m:ctrlPr>
+                              <a:rPr lang="en-US" sz="1200" b="0" i="1" smtClean="0">
+                                <a:solidFill>
+                                  <a:srgbClr val="333333"/>
+                                </a:solidFill>
+                                <a:latin typeface="Cambria Math" panose="02040503050406030204" pitchFamily="18" charset="0"/>
+                                <a:ea typeface="Manrope"/>
+                                <a:cs typeface="Manrope"/>
+                                <a:sym typeface="Manrope Medium"/>
+                              </a:rPr>
+                            </m:ctrlPr>
+                          </m:sSubPr>
+                          <m:e>
+                            <m:r>
+                              <a:rPr lang="en-US" sz="1200" b="0" i="1" smtClean="0">
+                                <a:solidFill>
+                                  <a:srgbClr val="333333"/>
+                                </a:solidFill>
+                                <a:latin typeface="Cambria Math" panose="02040503050406030204" pitchFamily="18" charset="0"/>
+                                <a:ea typeface="Manrope"/>
+                                <a:cs typeface="Manrope"/>
+                                <a:sym typeface="Manrope Medium"/>
+                              </a:rPr>
+                              <m:t>𝑥</m:t>
+                            </m:r>
+                          </m:e>
+                          <m:sub>
+                            <m:r>
+                              <a:rPr lang="en-US" sz="1200" b="0" i="1" smtClean="0">
+                                <a:solidFill>
+                                  <a:srgbClr val="333333"/>
+                                </a:solidFill>
+                                <a:latin typeface="Cambria Math" panose="02040503050406030204" pitchFamily="18" charset="0"/>
+                                <a:ea typeface="Manrope"/>
+                                <a:cs typeface="Manrope"/>
+                                <a:sym typeface="Manrope Medium"/>
+                              </a:rPr>
+                              <m:t>2</m:t>
+                            </m:r>
+                          </m:sub>
+                        </m:sSub>
+                        <m:r>
+                          <a:rPr lang="en-US" sz="1200" b="0" i="1" smtClean="0">
+                            <a:solidFill>
+                              <a:srgbClr val="333333"/>
+                            </a:solidFill>
+                            <a:latin typeface="Cambria Math" panose="02040503050406030204" pitchFamily="18" charset="0"/>
+                            <a:ea typeface="Manrope"/>
+                            <a:cs typeface="Manrope"/>
+                            <a:sym typeface="Manrope Medium"/>
+                          </a:rPr>
+                          <m:t>,…, </m:t>
+                        </m:r>
+                        <m:sSub>
+                          <m:sSubPr>
+                            <m:ctrlPr>
+                              <a:rPr lang="en-US" sz="1200" b="0" i="1" smtClean="0">
+                                <a:solidFill>
+                                  <a:srgbClr val="333333"/>
+                                </a:solidFill>
+                                <a:latin typeface="Cambria Math" panose="02040503050406030204" pitchFamily="18" charset="0"/>
+                                <a:ea typeface="Manrope"/>
+                                <a:cs typeface="Manrope"/>
+                                <a:sym typeface="Manrope Medium"/>
+                              </a:rPr>
+                            </m:ctrlPr>
+                          </m:sSubPr>
+                          <m:e>
+                            <m:r>
+                              <a:rPr lang="en-US" sz="1200" b="0" i="1" smtClean="0">
+                                <a:solidFill>
+                                  <a:srgbClr val="333333"/>
+                                </a:solidFill>
+                                <a:latin typeface="Cambria Math" panose="02040503050406030204" pitchFamily="18" charset="0"/>
+                                <a:ea typeface="Manrope"/>
+                                <a:cs typeface="Manrope"/>
+                                <a:sym typeface="Manrope Medium"/>
+                              </a:rPr>
+                              <m:t>𝑥</m:t>
+                            </m:r>
+                          </m:e>
+                          <m:sub>
+                            <m:r>
+                              <a:rPr lang="en-US" sz="1200" b="0" i="1" smtClean="0">
+                                <a:solidFill>
+                                  <a:srgbClr val="333333"/>
+                                </a:solidFill>
+                                <a:latin typeface="Cambria Math" panose="02040503050406030204" pitchFamily="18" charset="0"/>
+                                <a:ea typeface="Manrope"/>
+                                <a:cs typeface="Manrope"/>
+                                <a:sym typeface="Manrope Medium"/>
+                              </a:rPr>
+                              <m:t>𝑛</m:t>
+                            </m:r>
+                          </m:sub>
+                        </m:sSub>
+                      </m:e>
+                    </m:d>
+                    <m:r>
+                      <a:rPr lang="en-US" sz="1200" b="0" i="1" smtClean="0">
+                        <a:solidFill>
+                          <a:srgbClr val="333333"/>
+                        </a:solidFill>
+                        <a:latin typeface="Cambria Math" panose="02040503050406030204" pitchFamily="18" charset="0"/>
+                        <a:ea typeface="Manrope"/>
+                        <a:cs typeface="Manrope"/>
+                        <a:sym typeface="Manrope Medium"/>
+                      </a:rPr>
+                      <m:t>∈</m:t>
+                    </m:r>
+                    <m:sSup>
+                      <m:sSupPr>
+                        <m:ctrlPr>
+                          <a:rPr lang="en-US" sz="1200" b="0" i="1" smtClean="0">
+                            <a:solidFill>
+                              <a:srgbClr val="333333"/>
+                            </a:solidFill>
+                            <a:latin typeface="Cambria Math" panose="02040503050406030204" pitchFamily="18" charset="0"/>
+                            <a:ea typeface="Manrope"/>
+                            <a:cs typeface="Manrope"/>
+                            <a:sym typeface="Manrope Medium"/>
+                          </a:rPr>
+                        </m:ctrlPr>
+                      </m:sSupPr>
+                      <m:e>
+                        <m:r>
+                          <a:rPr lang="ru-RU" sz="1200">
+                            <a:latin typeface="Cambria Math" panose="02040503050406030204" pitchFamily="18" charset="0"/>
+                          </a:rPr>
+                          <m:t>ℝ</m:t>
+                        </m:r>
+                      </m:e>
+                      <m:sup>
+                        <m:r>
+                          <a:rPr lang="en-US" sz="1200" b="0" i="1" smtClean="0">
+                            <a:solidFill>
+                              <a:srgbClr val="333333"/>
+                            </a:solidFill>
+                            <a:latin typeface="Cambria Math" panose="02040503050406030204" pitchFamily="18" charset="0"/>
+                            <a:ea typeface="Manrope"/>
+                            <a:cs typeface="Manrope"/>
+                            <a:sym typeface="Manrope Medium"/>
+                          </a:rPr>
+                          <m:t>𝑛</m:t>
+                        </m:r>
+                      </m:sup>
+                    </m:sSup>
+                    <m:r>
+                      <a:rPr lang="en-US" sz="1200" b="0" i="1" smtClean="0">
+                        <a:solidFill>
+                          <a:srgbClr val="333333"/>
+                        </a:solidFill>
+                        <a:latin typeface="Cambria Math" panose="02040503050406030204" pitchFamily="18" charset="0"/>
+                        <a:ea typeface="Manrope"/>
+                        <a:cs typeface="Manrope"/>
+                        <a:sym typeface="Manrope Medium"/>
+                      </a:rPr>
+                      <m:t>∣</m:t>
+                    </m:r>
+                    <m:sSub>
+                      <m:sSubPr>
+                        <m:ctrlPr>
+                          <a:rPr lang="en-US" sz="1200" b="0" i="1" smtClean="0">
+                            <a:solidFill>
+                              <a:srgbClr val="333333"/>
+                            </a:solidFill>
+                            <a:latin typeface="Cambria Math" panose="02040503050406030204" pitchFamily="18" charset="0"/>
+                            <a:ea typeface="Manrope"/>
+                            <a:cs typeface="Manrope"/>
+                            <a:sym typeface="Manrope Medium"/>
+                          </a:rPr>
+                        </m:ctrlPr>
+                      </m:sSubPr>
+                      <m:e>
+                        <m:r>
+                          <a:rPr lang="en-US" sz="1200" b="0" i="1" smtClean="0">
+                            <a:solidFill>
+                              <a:srgbClr val="333333"/>
+                            </a:solidFill>
+                            <a:latin typeface="Cambria Math" panose="02040503050406030204" pitchFamily="18" charset="0"/>
+                            <a:ea typeface="Manrope"/>
+                            <a:cs typeface="Manrope"/>
+                            <a:sym typeface="Manrope Medium"/>
+                          </a:rPr>
+                          <m:t>𝑎</m:t>
+                        </m:r>
+                      </m:e>
+                      <m:sub>
+                        <m:r>
+                          <a:rPr lang="en-US" sz="1200" b="0" i="1" smtClean="0">
+                            <a:solidFill>
+                              <a:srgbClr val="333333"/>
+                            </a:solidFill>
+                            <a:latin typeface="Cambria Math" panose="02040503050406030204" pitchFamily="18" charset="0"/>
+                            <a:ea typeface="Manrope"/>
+                            <a:cs typeface="Manrope"/>
+                            <a:sym typeface="Manrope Medium"/>
+                          </a:rPr>
+                          <m:t>𝑖</m:t>
+                        </m:r>
+                      </m:sub>
+                    </m:sSub>
+                    <m:r>
+                      <a:rPr lang="en-US" sz="1200" b="0" i="1" smtClean="0">
+                        <a:solidFill>
+                          <a:srgbClr val="333333"/>
+                        </a:solidFill>
+                        <a:latin typeface="Cambria Math" panose="02040503050406030204" pitchFamily="18" charset="0"/>
+                        <a:ea typeface="Manrope"/>
+                        <a:cs typeface="Manrope"/>
+                        <a:sym typeface="Manrope Medium"/>
+                      </a:rPr>
+                      <m:t>≤</m:t>
+                    </m:r>
+                    <m:sSub>
+                      <m:sSubPr>
+                        <m:ctrlPr>
+                          <a:rPr lang="en-US" sz="1200" b="0" i="1" smtClean="0">
+                            <a:solidFill>
+                              <a:srgbClr val="333333"/>
+                            </a:solidFill>
+                            <a:latin typeface="Cambria Math" panose="02040503050406030204" pitchFamily="18" charset="0"/>
+                            <a:ea typeface="Manrope"/>
+                            <a:cs typeface="Manrope"/>
+                            <a:sym typeface="Manrope Medium"/>
+                          </a:rPr>
+                        </m:ctrlPr>
+                      </m:sSubPr>
+                      <m:e>
+                        <m:r>
+                          <a:rPr lang="en-US" sz="1200" b="0" i="1" smtClean="0">
+                            <a:solidFill>
+                              <a:srgbClr val="333333"/>
+                            </a:solidFill>
+                            <a:latin typeface="Cambria Math" panose="02040503050406030204" pitchFamily="18" charset="0"/>
+                            <a:ea typeface="Manrope"/>
+                            <a:cs typeface="Manrope"/>
+                            <a:sym typeface="Manrope Medium"/>
+                          </a:rPr>
+                          <m:t>𝑥</m:t>
+                        </m:r>
+                      </m:e>
+                      <m:sub>
+                        <m:r>
+                          <a:rPr lang="en-US" sz="1200" b="0" i="1" smtClean="0">
+                            <a:solidFill>
+                              <a:srgbClr val="333333"/>
+                            </a:solidFill>
+                            <a:latin typeface="Cambria Math" panose="02040503050406030204" pitchFamily="18" charset="0"/>
+                            <a:ea typeface="Manrope"/>
+                            <a:cs typeface="Manrope"/>
+                            <a:sym typeface="Manrope Medium"/>
+                          </a:rPr>
+                          <m:t>𝑖</m:t>
+                        </m:r>
+                      </m:sub>
+                    </m:sSub>
+                    <m:r>
+                      <a:rPr lang="en-US" sz="1200" b="0" i="1" smtClean="0">
+                        <a:solidFill>
+                          <a:srgbClr val="333333"/>
+                        </a:solidFill>
+                        <a:latin typeface="Cambria Math" panose="02040503050406030204" pitchFamily="18" charset="0"/>
+                        <a:ea typeface="Manrope"/>
+                        <a:cs typeface="Manrope"/>
+                        <a:sym typeface="Manrope Medium"/>
+                      </a:rPr>
+                      <m:t>≤</m:t>
+                    </m:r>
+                    <m:sSub>
+                      <m:sSubPr>
+                        <m:ctrlPr>
+                          <a:rPr lang="en-US" sz="1200" b="0" i="1" smtClean="0">
+                            <a:solidFill>
+                              <a:srgbClr val="333333"/>
+                            </a:solidFill>
+                            <a:latin typeface="Cambria Math" panose="02040503050406030204" pitchFamily="18" charset="0"/>
+                            <a:ea typeface="Manrope"/>
+                            <a:cs typeface="Manrope"/>
+                            <a:sym typeface="Manrope Medium"/>
+                          </a:rPr>
+                        </m:ctrlPr>
+                      </m:sSubPr>
+                      <m:e>
+                        <m:r>
+                          <a:rPr lang="en-US" sz="1200" b="0" i="1" smtClean="0">
+                            <a:solidFill>
+                              <a:srgbClr val="333333"/>
+                            </a:solidFill>
+                            <a:latin typeface="Cambria Math" panose="02040503050406030204" pitchFamily="18" charset="0"/>
+                            <a:ea typeface="Manrope"/>
+                            <a:cs typeface="Manrope"/>
+                            <a:sym typeface="Manrope Medium"/>
+                          </a:rPr>
+                          <m:t>𝑏</m:t>
+                        </m:r>
+                      </m:e>
+                      <m:sub>
+                        <m:r>
+                          <a:rPr lang="en-US" sz="1200" b="0" i="1" smtClean="0">
+                            <a:solidFill>
+                              <a:srgbClr val="333333"/>
+                            </a:solidFill>
+                            <a:latin typeface="Cambria Math" panose="02040503050406030204" pitchFamily="18" charset="0"/>
+                            <a:ea typeface="Manrope"/>
+                            <a:cs typeface="Manrope"/>
+                            <a:sym typeface="Manrope Medium"/>
+                          </a:rPr>
+                          <m:t>𝑖</m:t>
+                        </m:r>
+                      </m:sub>
+                    </m:sSub>
+                    <m:r>
+                      <a:rPr lang="en-US" sz="1200" b="0" i="1" smtClean="0">
+                        <a:solidFill>
+                          <a:srgbClr val="333333"/>
+                        </a:solidFill>
+                        <a:latin typeface="Cambria Math" panose="02040503050406030204" pitchFamily="18" charset="0"/>
+                        <a:ea typeface="Manrope"/>
+                        <a:cs typeface="Manrope"/>
+                        <a:sym typeface="Manrope Medium"/>
+                      </a:rPr>
+                      <m:t>,  </m:t>
+                    </m:r>
+                    <m:r>
+                      <a:rPr lang="en-US" sz="1200" b="0" i="1" smtClean="0">
+                        <a:solidFill>
+                          <a:srgbClr val="333333"/>
+                        </a:solidFill>
+                        <a:latin typeface="Cambria Math" panose="02040503050406030204" pitchFamily="18" charset="0"/>
+                        <a:ea typeface="Manrope"/>
+                        <a:cs typeface="Manrope"/>
+                        <a:sym typeface="Manrope Medium"/>
+                      </a:rPr>
+                      <m:t>𝑖</m:t>
+                    </m:r>
+                    <m:r>
+                      <a:rPr lang="en-US" sz="1200" b="0" i="1" smtClean="0">
+                        <a:solidFill>
+                          <a:srgbClr val="333333"/>
+                        </a:solidFill>
+                        <a:latin typeface="Cambria Math" panose="02040503050406030204" pitchFamily="18" charset="0"/>
+                        <a:ea typeface="Manrope"/>
+                        <a:cs typeface="Manrope"/>
+                        <a:sym typeface="Manrope Medium"/>
+                      </a:rPr>
+                      <m:t>=</m:t>
+                    </m:r>
+                    <m:acc>
+                      <m:accPr>
+                        <m:chr m:val="̅"/>
+                        <m:ctrlPr>
+                          <a:rPr lang="en-US" sz="1200" b="0" i="1" smtClean="0">
+                            <a:solidFill>
+                              <a:srgbClr val="333333"/>
+                            </a:solidFill>
+                            <a:latin typeface="Cambria Math" panose="02040503050406030204" pitchFamily="18" charset="0"/>
+                            <a:sym typeface="Manrope Medium"/>
+                          </a:rPr>
+                        </m:ctrlPr>
+                      </m:accPr>
+                      <m:e>
+                        <m:r>
+                          <a:rPr lang="en-US" sz="1200" b="0" i="1" smtClean="0">
+                            <a:solidFill>
+                              <a:srgbClr val="333333"/>
+                            </a:solidFill>
+                            <a:latin typeface="Cambria Math" panose="02040503050406030204" pitchFamily="18" charset="0"/>
+                            <a:sym typeface="Manrope Medium"/>
+                          </a:rPr>
+                          <m:t>1</m:t>
+                        </m:r>
+                        <m:r>
+                          <a:rPr lang="en-US" sz="1200" b="0" i="1" smtClean="0">
+                            <a:solidFill>
+                              <a:srgbClr val="333333"/>
+                            </a:solidFill>
+                            <a:latin typeface="Cambria Math" panose="02040503050406030204" pitchFamily="18" charset="0"/>
+                            <a:sym typeface="Manrope Medium"/>
+                          </a:rPr>
+                          <m:t>, </m:t>
+                        </m:r>
+                        <m:r>
+                          <a:rPr lang="en-US" sz="1200" b="0" i="1" smtClean="0">
+                            <a:solidFill>
+                              <a:srgbClr val="333333"/>
+                            </a:solidFill>
+                            <a:latin typeface="Cambria Math" panose="02040503050406030204" pitchFamily="18" charset="0"/>
+                            <a:sym typeface="Manrope Medium"/>
+                          </a:rPr>
+                          <m:t>𝑛</m:t>
+                        </m:r>
+                      </m:e>
+                    </m:acc>
+                    <m:r>
+                      <a:rPr lang="ru-RU" sz="1200" b="0" i="1" smtClean="0">
+                        <a:solidFill>
+                          <a:srgbClr val="333333"/>
+                        </a:solidFill>
+                        <a:latin typeface="Cambria Math" panose="02040503050406030204" pitchFamily="18" charset="0"/>
+                        <a:sym typeface="Manrope Medium"/>
+                      </a:rPr>
+                      <m:t> </m:t>
+                    </m:r>
+                    <m:r>
+                      <a:rPr lang="en-US" sz="1200" b="0" i="1" smtClean="0">
+                        <a:solidFill>
+                          <a:srgbClr val="333333"/>
+                        </a:solidFill>
+                        <a:latin typeface="Cambria Math" panose="02040503050406030204" pitchFamily="18" charset="0"/>
+                        <a:sym typeface="Manrope Medium"/>
+                      </a:rPr>
+                      <m:t>}</m:t>
+                    </m:r>
+                  </m:oMath>
+                </a14:m>
+                <a:r>
+                  <a:rPr lang="en-US" sz="1200" dirty="0">
+                    <a:latin typeface="Manrope"/>
+                    <a:ea typeface="Manrope"/>
+                    <a:cs typeface="Manrope"/>
+                    <a:sym typeface="Manrope"/>
+                  </a:rPr>
+                  <a:t>, </a:t>
+                </a:r>
+                <a:r>
+                  <a:rPr lang="ru-RU" sz="1200" dirty="0">
+                    <a:latin typeface="Manrope"/>
+                    <a:ea typeface="Manrope"/>
+                    <a:cs typeface="Manrope"/>
+                    <a:sym typeface="Manrope"/>
+                  </a:rPr>
+                  <a:t>где </a:t>
+                </a:r>
+                <a14:m>
+                  <m:oMath xmlns:m="http://schemas.openxmlformats.org/officeDocument/2006/math">
+                    <m:sSub>
+                      <m:sSubPr>
+                        <m:ctrlPr>
+                          <a:rPr lang="en-US" sz="1200" b="0" i="1" smtClean="0">
+                            <a:latin typeface="Cambria Math" panose="02040503050406030204" pitchFamily="18" charset="0"/>
+                            <a:ea typeface="Manrope"/>
+                            <a:cs typeface="Manrope"/>
+                            <a:sym typeface="Manrope"/>
+                          </a:rPr>
+                        </m:ctrlPr>
+                      </m:sSubPr>
+                      <m:e>
+                        <m:r>
+                          <a:rPr lang="en-US" sz="1200" b="0" i="1" smtClean="0">
+                            <a:latin typeface="Cambria Math" panose="02040503050406030204" pitchFamily="18" charset="0"/>
+                            <a:ea typeface="Manrope"/>
+                            <a:cs typeface="Manrope"/>
+                            <a:sym typeface="Manrope"/>
+                          </a:rPr>
+                          <m:t>𝑎</m:t>
+                        </m:r>
+                      </m:e>
+                      <m:sub>
+                        <m:r>
+                          <a:rPr lang="en-US" sz="1200" b="0" i="1" smtClean="0">
+                            <a:latin typeface="Cambria Math" panose="02040503050406030204" pitchFamily="18" charset="0"/>
+                            <a:ea typeface="Manrope"/>
+                            <a:cs typeface="Manrope"/>
+                            <a:sym typeface="Manrope"/>
+                          </a:rPr>
+                          <m:t>𝑖</m:t>
+                        </m:r>
+                      </m:sub>
+                    </m:sSub>
+                    <m:r>
+                      <a:rPr lang="en-US" sz="1200" b="0" i="1" smtClean="0">
+                        <a:latin typeface="Cambria Math" panose="02040503050406030204" pitchFamily="18" charset="0"/>
+                        <a:ea typeface="Manrope"/>
+                        <a:cs typeface="Manrope"/>
+                        <a:sym typeface="Manrope"/>
+                      </a:rPr>
+                      <m:t>,</m:t>
+                    </m:r>
+                    <m:sSub>
+                      <m:sSubPr>
+                        <m:ctrlPr>
+                          <a:rPr lang="en-US" sz="1200" b="0" i="1" smtClean="0">
+                            <a:latin typeface="Cambria Math" panose="02040503050406030204" pitchFamily="18" charset="0"/>
+                            <a:ea typeface="Manrope"/>
+                            <a:cs typeface="Manrope"/>
+                            <a:sym typeface="Manrope"/>
+                          </a:rPr>
+                        </m:ctrlPr>
+                      </m:sSubPr>
+                      <m:e>
+                        <m:r>
+                          <a:rPr lang="en-US" sz="1200" b="0" i="1" smtClean="0">
+                            <a:latin typeface="Cambria Math" panose="02040503050406030204" pitchFamily="18" charset="0"/>
+                            <a:ea typeface="Manrope"/>
+                            <a:cs typeface="Manrope"/>
+                            <a:sym typeface="Manrope"/>
+                          </a:rPr>
+                          <m:t>𝑏</m:t>
+                        </m:r>
+                      </m:e>
+                      <m:sub>
+                        <m:r>
+                          <a:rPr lang="en-US" sz="1200" b="0" i="1" smtClean="0">
+                            <a:latin typeface="Cambria Math" panose="02040503050406030204" pitchFamily="18" charset="0"/>
+                            <a:ea typeface="Manrope"/>
+                            <a:cs typeface="Manrope"/>
+                            <a:sym typeface="Manrope"/>
+                          </a:rPr>
+                          <m:t>𝑖</m:t>
+                        </m:r>
+                      </m:sub>
+                    </m:sSub>
+                    <m:r>
+                      <a:rPr lang="en-US" sz="1200" b="0" i="1" smtClean="0">
+                        <a:latin typeface="Cambria Math" panose="02040503050406030204" pitchFamily="18" charset="0"/>
+                        <a:ea typeface="Manrope"/>
+                        <a:cs typeface="Manrope"/>
+                        <a:sym typeface="Manrope"/>
+                      </a:rPr>
+                      <m:t>∈</m:t>
+                    </m:r>
+                    <m:r>
+                      <a:rPr lang="ru-RU" sz="1200">
+                        <a:latin typeface="Cambria Math" panose="02040503050406030204" pitchFamily="18" charset="0"/>
+                      </a:rPr>
+                      <m:t>ℝ</m:t>
+                    </m:r>
+                  </m:oMath>
+                </a14:m>
+                <a:r>
+                  <a:rPr lang="en-US" sz="1200" dirty="0">
+                    <a:latin typeface="Manrope"/>
+                    <a:ea typeface="Manrope"/>
+                    <a:cs typeface="Manrope"/>
+                    <a:sym typeface="Manrope"/>
+                  </a:rPr>
+                  <a:t> </a:t>
+                </a:r>
+                <a:r>
+                  <a:rPr lang="ru-RU" sz="1200" dirty="0">
+                    <a:latin typeface="Manrope"/>
+                    <a:ea typeface="Manrope"/>
+                    <a:cs typeface="Manrope"/>
+                    <a:sym typeface="Manrope"/>
+                  </a:rPr>
+                  <a:t>и </a:t>
+                </a:r>
+                <a14:m>
+                  <m:oMath xmlns:m="http://schemas.openxmlformats.org/officeDocument/2006/math">
+                    <m:sSub>
+                      <m:sSubPr>
+                        <m:ctrlPr>
+                          <a:rPr lang="en-US" sz="1200" b="0" i="1" smtClean="0">
+                            <a:latin typeface="Cambria Math" panose="02040503050406030204" pitchFamily="18" charset="0"/>
+                            <a:ea typeface="Manrope"/>
+                            <a:cs typeface="Manrope"/>
+                            <a:sym typeface="Manrope"/>
+                          </a:rPr>
+                        </m:ctrlPr>
+                      </m:sSubPr>
+                      <m:e>
+                        <m:r>
+                          <a:rPr lang="en-US" sz="1200" b="0" i="1" smtClean="0">
+                            <a:latin typeface="Cambria Math" panose="02040503050406030204" pitchFamily="18" charset="0"/>
+                            <a:ea typeface="Manrope"/>
+                            <a:cs typeface="Manrope"/>
+                            <a:sym typeface="Manrope"/>
+                          </a:rPr>
+                          <m:t>𝑎</m:t>
+                        </m:r>
+                      </m:e>
+                      <m:sub>
+                        <m:r>
+                          <a:rPr lang="en-US" sz="1200" b="0" i="1" smtClean="0">
+                            <a:latin typeface="Cambria Math" panose="02040503050406030204" pitchFamily="18" charset="0"/>
+                            <a:ea typeface="Manrope"/>
+                            <a:cs typeface="Manrope"/>
+                            <a:sym typeface="Manrope"/>
+                          </a:rPr>
+                          <m:t>𝑖</m:t>
+                        </m:r>
+                      </m:sub>
+                    </m:sSub>
+                    <m:r>
+                      <a:rPr lang="en-US" sz="1200" b="0" i="1" smtClean="0">
+                        <a:latin typeface="Cambria Math" panose="02040503050406030204" pitchFamily="18" charset="0"/>
+                        <a:ea typeface="Manrope"/>
+                        <a:cs typeface="Manrope"/>
+                        <a:sym typeface="Manrope"/>
+                      </a:rPr>
+                      <m:t>&lt;</m:t>
+                    </m:r>
+                    <m:sSub>
+                      <m:sSubPr>
+                        <m:ctrlPr>
+                          <a:rPr lang="en-US" sz="1200" b="0" i="1" smtClean="0">
+                            <a:latin typeface="Cambria Math" panose="02040503050406030204" pitchFamily="18" charset="0"/>
+                            <a:ea typeface="Manrope"/>
+                            <a:cs typeface="Manrope"/>
+                            <a:sym typeface="Manrope"/>
+                          </a:rPr>
+                        </m:ctrlPr>
+                      </m:sSubPr>
+                      <m:e>
+                        <m:r>
+                          <a:rPr lang="en-US" sz="1200" b="0" i="1" smtClean="0">
+                            <a:latin typeface="Cambria Math" panose="02040503050406030204" pitchFamily="18" charset="0"/>
+                            <a:ea typeface="Manrope"/>
+                            <a:cs typeface="Manrope"/>
+                            <a:sym typeface="Manrope"/>
+                          </a:rPr>
+                          <m:t>𝑏</m:t>
+                        </m:r>
+                      </m:e>
+                      <m:sub>
+                        <m:r>
+                          <a:rPr lang="en-US" sz="1200" b="0" i="1" smtClean="0">
+                            <a:latin typeface="Cambria Math" panose="02040503050406030204" pitchFamily="18" charset="0"/>
+                            <a:ea typeface="Manrope"/>
+                            <a:cs typeface="Manrope"/>
+                            <a:sym typeface="Manrope"/>
+                          </a:rPr>
+                          <m:t>𝑖</m:t>
+                        </m:r>
+                      </m:sub>
+                    </m:sSub>
+                  </m:oMath>
+                </a14:m>
+                <a:r>
+                  <a:rPr lang="en-US" sz="1200" dirty="0">
+                    <a:latin typeface="Manrope"/>
+                    <a:ea typeface="Manrope"/>
+                    <a:cs typeface="Manrope"/>
+                    <a:sym typeface="Manrope"/>
+                  </a:rPr>
+                  <a:t> </a:t>
+                </a:r>
+                <a:r>
+                  <a:rPr lang="ru-RU" sz="1200" dirty="0">
+                    <a:latin typeface="Manrope"/>
+                    <a:ea typeface="Manrope"/>
+                    <a:cs typeface="Manrope"/>
+                    <a:sym typeface="Manrope"/>
+                  </a:rPr>
+                  <a:t>для всех </a:t>
+                </a:r>
+                <a14:m>
+                  <m:oMath xmlns:m="http://schemas.openxmlformats.org/officeDocument/2006/math">
+                    <m:r>
+                      <a:rPr lang="en-US" sz="1200" b="0" i="1" smtClean="0">
+                        <a:latin typeface="Cambria Math" panose="02040503050406030204" pitchFamily="18" charset="0"/>
+                        <a:ea typeface="Manrope"/>
+                        <a:cs typeface="Manrope"/>
+                        <a:sym typeface="Manrope"/>
+                      </a:rPr>
+                      <m:t>𝑖</m:t>
+                    </m:r>
+                    <m:r>
+                      <a:rPr lang="en-US" sz="1200" b="0" i="1" smtClean="0">
+                        <a:latin typeface="Cambria Math" panose="02040503050406030204" pitchFamily="18" charset="0"/>
+                        <a:ea typeface="Manrope"/>
+                        <a:cs typeface="Manrope"/>
+                        <a:sym typeface="Manrope"/>
+                      </a:rPr>
+                      <m:t>=</m:t>
+                    </m:r>
+                    <m:r>
+                      <a:rPr lang="en-US" sz="1200" b="0" i="1" smtClean="0">
+                        <a:latin typeface="Cambria Math" panose="02040503050406030204" pitchFamily="18" charset="0"/>
+                        <a:ea typeface="Manrope"/>
+                        <a:cs typeface="Manrope"/>
+                        <a:sym typeface="Manrope"/>
+                      </a:rPr>
+                      <m:t>1</m:t>
+                    </m:r>
+                    <m:r>
+                      <a:rPr lang="en-US" sz="1200" b="0" i="1" smtClean="0">
+                        <a:latin typeface="Cambria Math" panose="02040503050406030204" pitchFamily="18" charset="0"/>
+                        <a:ea typeface="Manrope"/>
+                        <a:cs typeface="Manrope"/>
+                        <a:sym typeface="Manrope"/>
+                      </a:rPr>
+                      <m:t>, </m:t>
+                    </m:r>
+                    <m:r>
+                      <a:rPr lang="en-US" sz="1200" b="0" i="1" smtClean="0">
+                        <a:latin typeface="Cambria Math" panose="02040503050406030204" pitchFamily="18" charset="0"/>
+                        <a:ea typeface="Manrope"/>
+                        <a:cs typeface="Manrope"/>
+                        <a:sym typeface="Manrope"/>
+                      </a:rPr>
+                      <m:t>2</m:t>
+                    </m:r>
+                    <m:r>
+                      <a:rPr lang="en-US" sz="1200" b="0" i="1" smtClean="0">
+                        <a:latin typeface="Cambria Math" panose="02040503050406030204" pitchFamily="18" charset="0"/>
+                        <a:ea typeface="Manrope"/>
+                        <a:cs typeface="Manrope"/>
+                        <a:sym typeface="Manrope"/>
+                      </a:rPr>
+                      <m:t>,…,</m:t>
+                    </m:r>
+                    <m:r>
+                      <a:rPr lang="en-US" sz="1200" b="0" i="1" smtClean="0">
+                        <a:latin typeface="Cambria Math" panose="02040503050406030204" pitchFamily="18" charset="0"/>
+                        <a:ea typeface="Manrope"/>
+                        <a:cs typeface="Manrope"/>
+                        <a:sym typeface="Manrope"/>
+                      </a:rPr>
+                      <m:t>𝑛</m:t>
+                    </m:r>
+                  </m:oMath>
+                </a14:m>
+                <a:r>
+                  <a:rPr lang="ru-RU" sz="1200" dirty="0">
+                    <a:latin typeface="Manrope"/>
+                    <a:ea typeface="Manrope"/>
+                    <a:cs typeface="Manrope"/>
+                    <a:sym typeface="Manrope"/>
+                  </a:rPr>
+                  <a:t>, и функция </a:t>
+                </a:r>
+                <a14:m>
+                  <m:oMath xmlns:m="http://schemas.openxmlformats.org/officeDocument/2006/math">
+                    <m:r>
+                      <a:rPr lang="en-US" sz="1200" b="0" i="1" smtClean="0">
+                        <a:latin typeface="Cambria Math" panose="02040503050406030204" pitchFamily="18" charset="0"/>
+                        <a:ea typeface="Manrope"/>
+                        <a:cs typeface="Manrope"/>
+                        <a:sym typeface="Manrope"/>
+                      </a:rPr>
+                      <m:t>𝐹</m:t>
+                    </m:r>
+                    <m:d>
+                      <m:dPr>
+                        <m:ctrlPr>
+                          <a:rPr lang="en-US" sz="1200" b="0" i="1" smtClean="0">
+                            <a:latin typeface="Cambria Math" panose="02040503050406030204" pitchFamily="18" charset="0"/>
+                            <a:ea typeface="Manrope"/>
+                            <a:cs typeface="Manrope"/>
+                            <a:sym typeface="Manrope"/>
+                          </a:rPr>
+                        </m:ctrlPr>
+                      </m:dPr>
+                      <m:e>
+                        <m:r>
+                          <a:rPr lang="en-US" sz="1200" b="0" i="1" smtClean="0">
+                            <a:latin typeface="Cambria Math" panose="02040503050406030204" pitchFamily="18" charset="0"/>
+                            <a:ea typeface="Manrope"/>
+                            <a:cs typeface="Manrope"/>
+                            <a:sym typeface="Manrope"/>
+                          </a:rPr>
+                          <m:t>𝑥</m:t>
+                        </m:r>
+                      </m:e>
+                    </m:d>
+                    <m:r>
+                      <a:rPr lang="en-US" sz="1200" b="0" i="1" smtClean="0">
+                        <a:latin typeface="Cambria Math" panose="02040503050406030204" pitchFamily="18" charset="0"/>
+                        <a:ea typeface="Manrope"/>
+                        <a:cs typeface="Manrope"/>
+                        <a:sym typeface="Manrope"/>
+                      </a:rPr>
+                      <m:t>&gt;</m:t>
+                    </m:r>
+                    <m:r>
+                      <a:rPr lang="en-US" sz="1200" b="0" i="1" smtClean="0">
+                        <a:latin typeface="Cambria Math" panose="02040503050406030204" pitchFamily="18" charset="0"/>
+                        <a:ea typeface="Manrope"/>
+                        <a:cs typeface="Manrope"/>
+                        <a:sym typeface="Manrope"/>
+                      </a:rPr>
+                      <m:t>0</m:t>
+                    </m:r>
+                  </m:oMath>
+                </a14:m>
+                <a:r>
+                  <a:rPr lang="en-US" sz="1200" dirty="0">
+                    <a:latin typeface="Manrope"/>
+                    <a:ea typeface="Manrope"/>
+                    <a:cs typeface="Manrope"/>
+                    <a:sym typeface="Manrope"/>
+                  </a:rPr>
+                  <a:t>, </a:t>
+                </a:r>
+                <a:r>
+                  <a:rPr lang="ru-RU" sz="1200" dirty="0">
+                    <a:latin typeface="Manrope"/>
+                    <a:ea typeface="Manrope"/>
+                    <a:cs typeface="Manrope"/>
+                    <a:sym typeface="Manrope"/>
+                  </a:rPr>
+                  <a:t>непрерывная в нем.</a:t>
+                </a:r>
+              </a:p>
+            </p:txBody>
+          </p:sp>
+        </mc:Choice>
+        <mc:Fallback>
+          <p:sp>
+            <p:nvSpPr>
+              <p:cNvPr id="312" name="Google Shape;312;p62"/>
+              <p:cNvSpPr txBox="1">
+                <a:spLocks noRot="1" noChangeAspect="1" noMove="1" noResize="1" noEditPoints="1" noAdjustHandles="1" noChangeArrowheads="1" noChangeShapeType="1" noTextEdit="1"/>
+              </p:cNvSpPr>
+              <p:nvPr/>
+            </p:nvSpPr>
+            <p:spPr>
+              <a:xfrm>
+                <a:off x="452625" y="1042516"/>
+                <a:ext cx="6375900" cy="591957"/>
+              </a:xfrm>
+              <a:prstGeom prst="rect">
+                <a:avLst/>
+              </a:prstGeom>
+              <a:blipFill>
+                <a:blip r:embed="rId3"/>
+                <a:stretch>
+                  <a:fillRect l="-1434" b="-9278"/>
+                </a:stretch>
+              </a:blipFill>
+              <a:ln>
+                <a:noFill/>
+              </a:ln>
+            </p:spPr>
+            <p:txBody>
+              <a:bodyPr/>
+              <a:lstStyle/>
+              <a:p>
+                <a:r>
+                  <a:rPr lang="ru-RU">
+                    <a:noFill/>
+                  </a:rPr>
+                  <a:t> </a:t>
+                </a:r>
+              </a:p>
+            </p:txBody>
+          </p:sp>
+        </mc:Fallback>
+      </mc:AlternateContent>
       <p:sp>
         <p:nvSpPr>
           <p:cNvPr id="315" name="Google Shape;315;p62"/>
@@ -12648,6 +14082,1193 @@
           </a:p>
         </p:txBody>
       </p:sp>
+      <mc:AlternateContent xmlns:mc="http://schemas.openxmlformats.org/markup-compatibility/2006">
+        <mc:Choice xmlns:a14="http://schemas.microsoft.com/office/drawing/2010/main" Requires="a14">
+          <p:sp>
+            <p:nvSpPr>
+              <p:cNvPr id="8" name="TextBox 7">
+                <a:extLst>
+                  <a:ext uri="{FF2B5EF4-FFF2-40B4-BE49-F238E27FC236}">
+                    <a16:creationId xmlns:a16="http://schemas.microsoft.com/office/drawing/2014/main" id="{7780963B-67B5-4305-BE26-F241AC72E786}"/>
+                  </a:ext>
+                </a:extLst>
+              </p:cNvPr>
+              <p:cNvSpPr txBox="1"/>
+              <p:nvPr/>
+            </p:nvSpPr>
+            <p:spPr>
+              <a:xfrm>
+                <a:off x="358028" y="1901254"/>
+                <a:ext cx="8100172" cy="1696490"/>
+              </a:xfrm>
+              <a:prstGeom prst="rect">
+                <a:avLst/>
+              </a:prstGeom>
+              <a:noFill/>
+            </p:spPr>
+            <p:txBody>
+              <a:bodyPr wrap="square">
+                <a:spAutoFit/>
+              </a:bodyPr>
+              <a:lstStyle/>
+              <a:p>
+                <a:pPr marL="0" lvl="0" indent="0">
+                  <a:buNone/>
+                </a:pPr>
+                <a:r>
+                  <a:rPr lang="ru-RU" sz="1200" dirty="0">
+                    <a:solidFill>
+                      <a:srgbClr val="333333"/>
+                    </a:solidFill>
+                    <a:latin typeface="Manrope Medium"/>
+                    <a:ea typeface="Manrope"/>
+                    <a:cs typeface="Manrope"/>
+                  </a:rPr>
+                  <a:t>Требуется найти точки глобального максимума (минимума) функции </a:t>
+                </a:r>
+                <a14:m>
+                  <m:oMath xmlns:m="http://schemas.openxmlformats.org/officeDocument/2006/math">
+                    <m:r>
+                      <a:rPr lang="ru-RU" sz="1200">
+                        <a:solidFill>
+                          <a:srgbClr val="333333"/>
+                        </a:solidFill>
+                        <a:latin typeface="Cambria Math" panose="02040503050406030204" pitchFamily="18" charset="0"/>
+                        <a:ea typeface="Cambria Math" panose="02040503050406030204" pitchFamily="18" charset="0"/>
+                        <a:cs typeface="Manrope"/>
+                      </a:rPr>
+                      <m:t>𝐹</m:t>
+                    </m:r>
+                  </m:oMath>
+                </a14:m>
+                <a:r>
+                  <a:rPr lang="ru-RU" sz="1200" dirty="0">
+                    <a:solidFill>
+                      <a:srgbClr val="333333"/>
+                    </a:solidFill>
+                    <a:latin typeface="Manrope Medium"/>
+                    <a:ea typeface="Manrope"/>
+                    <a:cs typeface="Manrope"/>
+                  </a:rPr>
+                  <a:t> в области </a:t>
+                </a:r>
+                <a14:m>
+                  <m:oMath xmlns:m="http://schemas.openxmlformats.org/officeDocument/2006/math">
+                    <m:r>
+                      <m:rPr>
+                        <m:sty m:val="p"/>
+                      </m:rPr>
+                      <a:rPr lang="el-GR" sz="1200">
+                        <a:solidFill>
+                          <a:srgbClr val="333333"/>
+                        </a:solidFill>
+                        <a:latin typeface="Cambria Math" panose="02040503050406030204" pitchFamily="18" charset="0"/>
+                        <a:ea typeface="Cambria Math" panose="02040503050406030204" pitchFamily="18" charset="0"/>
+                        <a:cs typeface="Manrope"/>
+                      </a:rPr>
+                      <m:t>Π</m:t>
+                    </m:r>
+                  </m:oMath>
+                </a14:m>
+                <a:r>
+                  <a:rPr lang="el-GR" sz="1200" dirty="0">
+                    <a:solidFill>
+                      <a:srgbClr val="333333"/>
+                    </a:solidFill>
+                    <a:latin typeface="Manrope Medium"/>
+                    <a:ea typeface="Manrope"/>
+                    <a:cs typeface="Manrope"/>
+                  </a:rPr>
+                  <a:t>. </a:t>
+                </a:r>
+                <a:r>
+                  <a:rPr lang="ru-RU" sz="1200" dirty="0">
+                    <a:solidFill>
+                      <a:srgbClr val="333333"/>
+                    </a:solidFill>
+                    <a:latin typeface="Manrope Medium"/>
+                    <a:ea typeface="Manrope"/>
+                    <a:cs typeface="Manrope"/>
+                  </a:rPr>
+                  <a:t>Формально, требуется найти точку (или множество точек) </a:t>
+                </a:r>
+                <a14:m>
+                  <m:oMath xmlns:m="http://schemas.openxmlformats.org/officeDocument/2006/math">
+                    <m:sSup>
+                      <m:sSupPr>
+                        <m:ctrlPr>
+                          <a:rPr lang="ar-AE" sz="1200">
+                            <a:solidFill>
+                              <a:srgbClr val="333333"/>
+                            </a:solidFill>
+                            <a:latin typeface="Cambria Math" panose="02040503050406030204" pitchFamily="18" charset="0"/>
+                            <a:ea typeface="Cambria Math" panose="02040503050406030204" pitchFamily="18" charset="0"/>
+                            <a:cs typeface="Manrope"/>
+                          </a:rPr>
+                        </m:ctrlPr>
+                      </m:sSupPr>
+                      <m:e>
+                        <m:r>
+                          <a:rPr lang="ar-AE" sz="1200">
+                            <a:solidFill>
+                              <a:srgbClr val="333333"/>
+                            </a:solidFill>
+                            <a:latin typeface="Cambria Math" panose="02040503050406030204" pitchFamily="18" charset="0"/>
+                            <a:ea typeface="Cambria Math" panose="02040503050406030204" pitchFamily="18" charset="0"/>
+                            <a:cs typeface="Manrope"/>
+                          </a:rPr>
+                          <m:t>𝐱</m:t>
+                        </m:r>
+                      </m:e>
+                      <m:sup>
+                        <m:r>
+                          <a:rPr lang="ar-AE" sz="1200">
+                            <a:solidFill>
+                              <a:srgbClr val="333333"/>
+                            </a:solidFill>
+                            <a:latin typeface="Cambria Math" panose="02040503050406030204" pitchFamily="18" charset="0"/>
+                            <a:ea typeface="Cambria Math" panose="02040503050406030204" pitchFamily="18" charset="0"/>
+                            <a:cs typeface="Manrope"/>
+                          </a:rPr>
+                          <m:t>∗</m:t>
+                        </m:r>
+                      </m:sup>
+                    </m:sSup>
+                    <m:r>
+                      <a:rPr lang="ar-AE" sz="1200">
+                        <a:solidFill>
+                          <a:srgbClr val="333333"/>
+                        </a:solidFill>
+                        <a:latin typeface="Cambria Math" panose="02040503050406030204" pitchFamily="18" charset="0"/>
+                        <a:ea typeface="Cambria Math" panose="02040503050406030204" pitchFamily="18" charset="0"/>
+                        <a:cs typeface="Manrope"/>
+                      </a:rPr>
+                      <m:t>∈</m:t>
+                    </m:r>
+                    <m:r>
+                      <m:rPr>
+                        <m:sty m:val="p"/>
+                      </m:rPr>
+                      <a:rPr lang="el-GR" sz="1200">
+                        <a:solidFill>
+                          <a:srgbClr val="333333"/>
+                        </a:solidFill>
+                        <a:latin typeface="Cambria Math" panose="02040503050406030204" pitchFamily="18" charset="0"/>
+                        <a:ea typeface="Cambria Math" panose="02040503050406030204" pitchFamily="18" charset="0"/>
+                        <a:cs typeface="Manrope"/>
+                      </a:rPr>
+                      <m:t>Π</m:t>
+                    </m:r>
+                  </m:oMath>
+                </a14:m>
+                <a:r>
+                  <a:rPr lang="el-GR" sz="1200" dirty="0">
+                    <a:solidFill>
+                      <a:srgbClr val="333333"/>
+                    </a:solidFill>
+                    <a:latin typeface="Manrope Medium"/>
+                    <a:ea typeface="Manrope"/>
+                    <a:cs typeface="Manrope"/>
+                  </a:rPr>
+                  <a:t> </a:t>
+                </a:r>
+                <a:r>
+                  <a:rPr lang="ru-RU" sz="1200" dirty="0">
+                    <a:solidFill>
+                      <a:srgbClr val="333333"/>
+                    </a:solidFill>
+                    <a:latin typeface="Manrope Medium"/>
+                    <a:ea typeface="Manrope"/>
+                    <a:cs typeface="Manrope"/>
+                  </a:rPr>
+                  <a:t>и соответствующее значение </a:t>
+                </a:r>
+                <a14:m>
+                  <m:oMath xmlns:m="http://schemas.openxmlformats.org/officeDocument/2006/math">
+                    <m:sSup>
+                      <m:sSupPr>
+                        <m:ctrlPr>
+                          <a:rPr lang="ar-AE" sz="1200">
+                            <a:solidFill>
+                              <a:srgbClr val="333333"/>
+                            </a:solidFill>
+                            <a:latin typeface="Cambria Math" panose="02040503050406030204" pitchFamily="18" charset="0"/>
+                            <a:ea typeface="Cambria Math" panose="02040503050406030204" pitchFamily="18" charset="0"/>
+                            <a:cs typeface="Manrope"/>
+                          </a:rPr>
+                        </m:ctrlPr>
+                      </m:sSupPr>
+                      <m:e>
+                        <m:r>
+                          <a:rPr lang="ar-AE" sz="1200">
+                            <a:solidFill>
+                              <a:srgbClr val="333333"/>
+                            </a:solidFill>
+                            <a:latin typeface="Cambria Math" panose="02040503050406030204" pitchFamily="18" charset="0"/>
+                            <a:ea typeface="Cambria Math" panose="02040503050406030204" pitchFamily="18" charset="0"/>
+                            <a:cs typeface="Manrope"/>
+                          </a:rPr>
+                          <m:t>𝐹</m:t>
+                        </m:r>
+                      </m:e>
+                      <m:sup>
+                        <m:r>
+                          <a:rPr lang="ar-AE" sz="1200">
+                            <a:solidFill>
+                              <a:srgbClr val="333333"/>
+                            </a:solidFill>
+                            <a:latin typeface="Cambria Math" panose="02040503050406030204" pitchFamily="18" charset="0"/>
+                            <a:ea typeface="Cambria Math" panose="02040503050406030204" pitchFamily="18" charset="0"/>
+                            <a:cs typeface="Manrope"/>
+                          </a:rPr>
+                          <m:t>∗</m:t>
+                        </m:r>
+                      </m:sup>
+                    </m:sSup>
+                  </m:oMath>
+                </a14:m>
+                <a:r>
+                  <a:rPr lang="ar-AE" sz="1200" dirty="0">
+                    <a:solidFill>
+                      <a:srgbClr val="333333"/>
+                    </a:solidFill>
+                    <a:latin typeface="Manrope Medium"/>
+                    <a:ea typeface="Manrope"/>
+                    <a:cs typeface="Manrope"/>
+                  </a:rPr>
+                  <a:t>, </a:t>
+                </a:r>
+                <a:r>
+                  <a:rPr lang="ru-RU" sz="1200" dirty="0">
+                    <a:solidFill>
+                      <a:srgbClr val="333333"/>
+                    </a:solidFill>
+                    <a:latin typeface="Manrope Medium"/>
+                    <a:ea typeface="Manrope"/>
+                    <a:cs typeface="Manrope"/>
+                  </a:rPr>
+                  <a:t>такие что:</a:t>
+                </a:r>
+                <a:endParaRPr lang="en-US" sz="1200" dirty="0">
+                  <a:solidFill>
+                    <a:srgbClr val="333333"/>
+                  </a:solidFill>
+                  <a:latin typeface="Manrope Medium"/>
+                  <a:ea typeface="Manrope"/>
+                  <a:cs typeface="Manrope"/>
+                </a:endParaRPr>
+              </a:p>
+              <a:p>
+                <a:pPr marL="0" lvl="0" indent="0">
+                  <a:buNone/>
+                </a:pPr>
+                <a:endParaRPr lang="ru-RU" sz="1200" dirty="0">
+                  <a:solidFill>
+                    <a:srgbClr val="333333"/>
+                  </a:solidFill>
+                  <a:latin typeface="Manrope Medium"/>
+                  <a:ea typeface="Manrope"/>
+                  <a:cs typeface="Manrope"/>
+                </a:endParaRPr>
+              </a:p>
+              <a:p>
+                <a:pPr marL="0" lvl="0" indent="0">
+                  <a:buNone/>
+                </a:pPr>
+                <a14:m>
+                  <m:oMathPara xmlns:m="http://schemas.openxmlformats.org/officeDocument/2006/math">
+                    <m:oMathParaPr>
+                      <m:jc m:val="center"/>
+                    </m:oMathParaPr>
+                    <m:oMath xmlns:m="http://schemas.openxmlformats.org/officeDocument/2006/math">
+                      <m:sSup>
+                        <m:sSupPr>
+                          <m:ctrlPr>
+                            <a:rPr lang="ar-AE">
+                              <a:solidFill>
+                                <a:srgbClr val="333333"/>
+                              </a:solidFill>
+                              <a:latin typeface="Cambria Math" panose="02040503050406030204" pitchFamily="18" charset="0"/>
+                              <a:ea typeface="Cambria Math" panose="02040503050406030204" pitchFamily="18" charset="0"/>
+                              <a:cs typeface="Manrope"/>
+                            </a:rPr>
+                          </m:ctrlPr>
+                        </m:sSupPr>
+                        <m:e>
+                          <m:r>
+                            <a:rPr lang="ar-AE">
+                              <a:solidFill>
+                                <a:srgbClr val="333333"/>
+                              </a:solidFill>
+                              <a:latin typeface="Cambria Math" panose="02040503050406030204" pitchFamily="18" charset="0"/>
+                              <a:ea typeface="Cambria Math" panose="02040503050406030204" pitchFamily="18" charset="0"/>
+                              <a:cs typeface="Manrope"/>
+                            </a:rPr>
+                            <m:t>𝐹</m:t>
+                          </m:r>
+                        </m:e>
+                        <m:sup>
+                          <m:r>
+                            <a:rPr lang="ar-AE">
+                              <a:solidFill>
+                                <a:srgbClr val="333333"/>
+                              </a:solidFill>
+                              <a:latin typeface="Cambria Math" panose="02040503050406030204" pitchFamily="18" charset="0"/>
+                              <a:ea typeface="Cambria Math" panose="02040503050406030204" pitchFamily="18" charset="0"/>
+                              <a:cs typeface="Manrope"/>
+                            </a:rPr>
+                            <m:t>∗</m:t>
+                          </m:r>
+                        </m:sup>
+                      </m:sSup>
+                      <m:r>
+                        <a:rPr lang="ar-AE">
+                          <a:solidFill>
+                            <a:srgbClr val="333333"/>
+                          </a:solidFill>
+                          <a:latin typeface="Cambria Math" panose="02040503050406030204" pitchFamily="18" charset="0"/>
+                          <a:ea typeface="Cambria Math" panose="02040503050406030204" pitchFamily="18" charset="0"/>
+                          <a:cs typeface="Manrope"/>
+                        </a:rPr>
+                        <m:t>=</m:t>
+                      </m:r>
+                      <m:r>
+                        <a:rPr lang="ar-AE">
+                          <a:solidFill>
+                            <a:srgbClr val="333333"/>
+                          </a:solidFill>
+                          <a:latin typeface="Cambria Math" panose="02040503050406030204" pitchFamily="18" charset="0"/>
+                          <a:ea typeface="Cambria Math" panose="02040503050406030204" pitchFamily="18" charset="0"/>
+                          <a:cs typeface="Manrope"/>
+                        </a:rPr>
+                        <m:t>𝐹</m:t>
+                      </m:r>
+                      <m:r>
+                        <a:rPr lang="ar-AE">
+                          <a:solidFill>
+                            <a:srgbClr val="333333"/>
+                          </a:solidFill>
+                          <a:latin typeface="Cambria Math" panose="02040503050406030204" pitchFamily="18" charset="0"/>
+                          <a:ea typeface="Cambria Math" panose="02040503050406030204" pitchFamily="18" charset="0"/>
+                          <a:cs typeface="Manrope"/>
+                        </a:rPr>
+                        <m:t>(</m:t>
+                      </m:r>
+                      <m:sSup>
+                        <m:sSupPr>
+                          <m:ctrlPr>
+                            <a:rPr lang="ar-AE">
+                              <a:solidFill>
+                                <a:srgbClr val="333333"/>
+                              </a:solidFill>
+                              <a:latin typeface="Cambria Math" panose="02040503050406030204" pitchFamily="18" charset="0"/>
+                              <a:ea typeface="Cambria Math" panose="02040503050406030204" pitchFamily="18" charset="0"/>
+                              <a:cs typeface="Manrope"/>
+                            </a:rPr>
+                          </m:ctrlPr>
+                        </m:sSupPr>
+                        <m:e>
+                          <m:r>
+                            <a:rPr lang="ar-AE">
+                              <a:solidFill>
+                                <a:srgbClr val="333333"/>
+                              </a:solidFill>
+                              <a:latin typeface="Cambria Math" panose="02040503050406030204" pitchFamily="18" charset="0"/>
+                              <a:ea typeface="Cambria Math" panose="02040503050406030204" pitchFamily="18" charset="0"/>
+                              <a:cs typeface="Manrope"/>
+                            </a:rPr>
+                            <m:t>𝐱</m:t>
+                          </m:r>
+                        </m:e>
+                        <m:sup>
+                          <m:r>
+                            <a:rPr lang="ar-AE">
+                              <a:solidFill>
+                                <a:srgbClr val="333333"/>
+                              </a:solidFill>
+                              <a:latin typeface="Cambria Math" panose="02040503050406030204" pitchFamily="18" charset="0"/>
+                              <a:ea typeface="Cambria Math" panose="02040503050406030204" pitchFamily="18" charset="0"/>
+                              <a:cs typeface="Manrope"/>
+                            </a:rPr>
+                            <m:t>∗</m:t>
+                          </m:r>
+                        </m:sup>
+                      </m:sSup>
+                      <m:r>
+                        <a:rPr lang="ar-AE">
+                          <a:solidFill>
+                            <a:srgbClr val="333333"/>
+                          </a:solidFill>
+                          <a:latin typeface="Cambria Math" panose="02040503050406030204" pitchFamily="18" charset="0"/>
+                          <a:ea typeface="Cambria Math" panose="02040503050406030204" pitchFamily="18" charset="0"/>
+                          <a:cs typeface="Manrope"/>
+                        </a:rPr>
+                        <m:t>)=</m:t>
+                      </m:r>
+                      <m:limLow>
+                        <m:limLowPr>
+                          <m:ctrlPr>
+                            <a:rPr lang="ar-AE">
+                              <a:solidFill>
+                                <a:srgbClr val="333333"/>
+                              </a:solidFill>
+                              <a:latin typeface="Cambria Math" panose="02040503050406030204" pitchFamily="18" charset="0"/>
+                              <a:ea typeface="Cambria Math" panose="02040503050406030204" pitchFamily="18" charset="0"/>
+                              <a:cs typeface="Manrope"/>
+                            </a:rPr>
+                          </m:ctrlPr>
+                        </m:limLowPr>
+                        <m:e>
+                          <m:r>
+                            <m:rPr>
+                              <m:sty m:val="p"/>
+                            </m:rPr>
+                            <a:rPr lang="en-US">
+                              <a:solidFill>
+                                <a:srgbClr val="333333"/>
+                              </a:solidFill>
+                              <a:latin typeface="Cambria Math" panose="02040503050406030204" pitchFamily="18" charset="0"/>
+                              <a:ea typeface="Cambria Math" panose="02040503050406030204" pitchFamily="18" charset="0"/>
+                              <a:cs typeface="Manrope"/>
+                            </a:rPr>
+                            <m:t>max</m:t>
+                          </m:r>
+                        </m:e>
+                        <m:lim>
+                          <m:r>
+                            <a:rPr lang="ar-AE">
+                              <a:solidFill>
+                                <a:srgbClr val="333333"/>
+                              </a:solidFill>
+                              <a:latin typeface="Cambria Math" panose="02040503050406030204" pitchFamily="18" charset="0"/>
+                              <a:ea typeface="Cambria Math" panose="02040503050406030204" pitchFamily="18" charset="0"/>
+                              <a:cs typeface="Manrope"/>
+                            </a:rPr>
+                            <m:t>𝐱</m:t>
+                          </m:r>
+                          <m:r>
+                            <a:rPr lang="ar-AE">
+                              <a:solidFill>
+                                <a:srgbClr val="333333"/>
+                              </a:solidFill>
+                              <a:latin typeface="Cambria Math" panose="02040503050406030204" pitchFamily="18" charset="0"/>
+                              <a:ea typeface="Cambria Math" panose="02040503050406030204" pitchFamily="18" charset="0"/>
+                              <a:cs typeface="Manrope"/>
+                            </a:rPr>
+                            <m:t>∈</m:t>
+                          </m:r>
+                          <m:r>
+                            <m:rPr>
+                              <m:sty m:val="p"/>
+                            </m:rPr>
+                            <a:rPr lang="el-GR">
+                              <a:solidFill>
+                                <a:srgbClr val="333333"/>
+                              </a:solidFill>
+                              <a:latin typeface="Cambria Math" panose="02040503050406030204" pitchFamily="18" charset="0"/>
+                              <a:ea typeface="Cambria Math" panose="02040503050406030204" pitchFamily="18" charset="0"/>
+                              <a:cs typeface="Manrope"/>
+                            </a:rPr>
+                            <m:t>Π</m:t>
+                          </m:r>
+                        </m:lim>
+                      </m:limLow>
+                      <m:r>
+                        <a:rPr lang="ar-AE">
+                          <a:solidFill>
+                            <a:srgbClr val="333333"/>
+                          </a:solidFill>
+                          <a:latin typeface="Cambria Math" panose="02040503050406030204" pitchFamily="18" charset="0"/>
+                          <a:ea typeface="Cambria Math" panose="02040503050406030204" pitchFamily="18" charset="0"/>
+                          <a:cs typeface="Manrope"/>
+                        </a:rPr>
+                        <m:t>𝐹</m:t>
+                      </m:r>
+                      <m:r>
+                        <a:rPr lang="ar-AE">
+                          <a:solidFill>
+                            <a:srgbClr val="333333"/>
+                          </a:solidFill>
+                          <a:latin typeface="Cambria Math" panose="02040503050406030204" pitchFamily="18" charset="0"/>
+                          <a:ea typeface="Cambria Math" panose="02040503050406030204" pitchFamily="18" charset="0"/>
+                          <a:cs typeface="Manrope"/>
+                        </a:rPr>
+                        <m:t>(</m:t>
+                      </m:r>
+                      <m:r>
+                        <a:rPr lang="ar-AE">
+                          <a:solidFill>
+                            <a:srgbClr val="333333"/>
+                          </a:solidFill>
+                          <a:latin typeface="Cambria Math" panose="02040503050406030204" pitchFamily="18" charset="0"/>
+                          <a:ea typeface="Cambria Math" panose="02040503050406030204" pitchFamily="18" charset="0"/>
+                          <a:cs typeface="Manrope"/>
+                        </a:rPr>
+                        <m:t>𝐱</m:t>
+                      </m:r>
+                      <m:r>
+                        <a:rPr lang="ar-AE">
+                          <a:solidFill>
+                            <a:srgbClr val="333333"/>
+                          </a:solidFill>
+                          <a:latin typeface="Cambria Math" panose="02040503050406030204" pitchFamily="18" charset="0"/>
+                          <a:ea typeface="Cambria Math" panose="02040503050406030204" pitchFamily="18" charset="0"/>
+                          <a:cs typeface="Manrope"/>
+                        </a:rPr>
+                        <m:t>)</m:t>
+                      </m:r>
+                    </m:oMath>
+                  </m:oMathPara>
+                </a14:m>
+                <a:endParaRPr lang="en-US" dirty="0">
+                  <a:solidFill>
+                    <a:srgbClr val="333333"/>
+                  </a:solidFill>
+                  <a:latin typeface="Cambria Math" panose="02040503050406030204" pitchFamily="18" charset="0"/>
+                  <a:ea typeface="Cambria Math" panose="02040503050406030204" pitchFamily="18" charset="0"/>
+                  <a:cs typeface="Manrope"/>
+                </a:endParaRPr>
+              </a:p>
+              <a:p>
+                <a:pPr marL="0" lvl="0" indent="0">
+                  <a:buNone/>
+                </a:pPr>
+                <a:endParaRPr lang="ar-AE" sz="1200" dirty="0">
+                  <a:solidFill>
+                    <a:srgbClr val="333333"/>
+                  </a:solidFill>
+                  <a:latin typeface="Manrope Medium"/>
+                  <a:ea typeface="Manrope"/>
+                  <a:cs typeface="Manrope"/>
+                </a:endParaRPr>
+              </a:p>
+              <a:p>
+                <a:pPr marL="0" lvl="0" indent="0">
+                  <a:buNone/>
+                </a:pPr>
+                <a:r>
+                  <a:rPr lang="ru-RU" sz="1200" dirty="0">
+                    <a:solidFill>
+                      <a:srgbClr val="333333"/>
+                    </a:solidFill>
+                    <a:latin typeface="Manrope Medium"/>
+                    <a:ea typeface="Manrope"/>
+                    <a:cs typeface="Manrope"/>
+                  </a:rPr>
+                  <a:t>Это означает, что для любого </a:t>
+                </a:r>
+                <a14:m>
+                  <m:oMath xmlns:m="http://schemas.openxmlformats.org/officeDocument/2006/math">
+                    <m:r>
+                      <a:rPr lang="ru-RU" sz="1200">
+                        <a:solidFill>
+                          <a:srgbClr val="333333"/>
+                        </a:solidFill>
+                        <a:latin typeface="Manrope Medium"/>
+                        <a:ea typeface="Manrope"/>
+                        <a:cs typeface="Manrope"/>
+                      </a:rPr>
+                      <m:t>𝐱</m:t>
+                    </m:r>
+                    <m:r>
+                      <a:rPr lang="ru-RU" sz="1200">
+                        <a:solidFill>
+                          <a:srgbClr val="333333"/>
+                        </a:solidFill>
+                        <a:latin typeface="Manrope Medium"/>
+                        <a:ea typeface="Manrope"/>
+                        <a:cs typeface="Manrope"/>
+                      </a:rPr>
+                      <m:t>∈</m:t>
+                    </m:r>
+                    <m:r>
+                      <m:rPr>
+                        <m:sty m:val="p"/>
+                      </m:rPr>
+                      <a:rPr lang="el-GR" sz="1200">
+                        <a:solidFill>
+                          <a:srgbClr val="333333"/>
+                        </a:solidFill>
+                        <a:latin typeface="Manrope Medium"/>
+                        <a:ea typeface="Manrope"/>
+                        <a:cs typeface="Manrope"/>
+                      </a:rPr>
+                      <m:t>Π</m:t>
+                    </m:r>
+                  </m:oMath>
+                </a14:m>
+                <a:r>
+                  <a:rPr lang="el-GR" sz="1200" dirty="0">
+                    <a:solidFill>
+                      <a:srgbClr val="333333"/>
+                    </a:solidFill>
+                    <a:latin typeface="Manrope Medium"/>
+                    <a:ea typeface="Manrope"/>
+                    <a:cs typeface="Manrope"/>
+                  </a:rPr>
+                  <a:t> </a:t>
+                </a:r>
+                <a:r>
+                  <a:rPr lang="ru-RU" sz="1200" dirty="0">
+                    <a:solidFill>
+                      <a:srgbClr val="333333"/>
+                    </a:solidFill>
+                    <a:latin typeface="Manrope Medium"/>
+                    <a:ea typeface="Manrope"/>
+                    <a:cs typeface="Manrope"/>
+                  </a:rPr>
+                  <a:t>выполняется неравенство:</a:t>
+                </a:r>
+                <a:endParaRPr lang="en-US" sz="1200" dirty="0">
+                  <a:solidFill>
+                    <a:srgbClr val="333333"/>
+                  </a:solidFill>
+                  <a:latin typeface="Manrope Medium"/>
+                  <a:ea typeface="Manrope"/>
+                  <a:cs typeface="Manrope"/>
+                </a:endParaRPr>
+              </a:p>
+              <a:p>
+                <a:pPr marL="0" lvl="0" indent="0">
+                  <a:buNone/>
+                </a:pPr>
+                <a:endParaRPr lang="ru-RU" sz="1200" dirty="0">
+                  <a:solidFill>
+                    <a:srgbClr val="333333"/>
+                  </a:solidFill>
+                  <a:latin typeface="Manrope Medium"/>
+                  <a:ea typeface="Manrope"/>
+                  <a:cs typeface="Manrope"/>
+                </a:endParaRPr>
+              </a:p>
+              <a:p>
+                <a:pPr marL="0" lvl="0" indent="0">
+                  <a:buNone/>
+                </a:pPr>
+                <a14:m>
+                  <m:oMathPara xmlns:m="http://schemas.openxmlformats.org/officeDocument/2006/math">
+                    <m:oMathParaPr>
+                      <m:jc m:val="center"/>
+                    </m:oMathParaPr>
+                    <m:oMath xmlns:m="http://schemas.openxmlformats.org/officeDocument/2006/math">
+                      <m:r>
+                        <a:rPr lang="ru-RU">
+                          <a:solidFill>
+                            <a:srgbClr val="333333"/>
+                          </a:solidFill>
+                          <a:latin typeface="Cambria Math" panose="02040503050406030204" pitchFamily="18" charset="0"/>
+                          <a:ea typeface="Cambria Math" panose="02040503050406030204" pitchFamily="18" charset="0"/>
+                          <a:cs typeface="Manrope"/>
+                        </a:rPr>
+                        <m:t>𝐹</m:t>
+                      </m:r>
+                      <m:r>
+                        <a:rPr lang="ru-RU">
+                          <a:solidFill>
+                            <a:srgbClr val="333333"/>
+                          </a:solidFill>
+                          <a:latin typeface="Cambria Math" panose="02040503050406030204" pitchFamily="18" charset="0"/>
+                          <a:ea typeface="Cambria Math" panose="02040503050406030204" pitchFamily="18" charset="0"/>
+                          <a:cs typeface="Manrope"/>
+                        </a:rPr>
+                        <m:t>(</m:t>
+                      </m:r>
+                      <m:sSup>
+                        <m:sSupPr>
+                          <m:ctrlPr>
+                            <a:rPr lang="ar-AE">
+                              <a:solidFill>
+                                <a:srgbClr val="333333"/>
+                              </a:solidFill>
+                              <a:latin typeface="Cambria Math" panose="02040503050406030204" pitchFamily="18" charset="0"/>
+                              <a:ea typeface="Cambria Math" panose="02040503050406030204" pitchFamily="18" charset="0"/>
+                              <a:cs typeface="Manrope"/>
+                            </a:rPr>
+                          </m:ctrlPr>
+                        </m:sSupPr>
+                        <m:e>
+                          <m:r>
+                            <a:rPr lang="ar-AE">
+                              <a:solidFill>
+                                <a:srgbClr val="333333"/>
+                              </a:solidFill>
+                              <a:latin typeface="Cambria Math" panose="02040503050406030204" pitchFamily="18" charset="0"/>
+                              <a:ea typeface="Cambria Math" panose="02040503050406030204" pitchFamily="18" charset="0"/>
+                              <a:cs typeface="Manrope"/>
+                            </a:rPr>
+                            <m:t>𝐱</m:t>
+                          </m:r>
+                        </m:e>
+                        <m:sup>
+                          <m:r>
+                            <a:rPr lang="ar-AE">
+                              <a:solidFill>
+                                <a:srgbClr val="333333"/>
+                              </a:solidFill>
+                              <a:latin typeface="Cambria Math" panose="02040503050406030204" pitchFamily="18" charset="0"/>
+                              <a:ea typeface="Cambria Math" panose="02040503050406030204" pitchFamily="18" charset="0"/>
+                              <a:cs typeface="Manrope"/>
+                            </a:rPr>
+                            <m:t>∗</m:t>
+                          </m:r>
+                        </m:sup>
+                      </m:sSup>
+                      <m:r>
+                        <a:rPr lang="ar-AE">
+                          <a:solidFill>
+                            <a:srgbClr val="333333"/>
+                          </a:solidFill>
+                          <a:latin typeface="Cambria Math" panose="02040503050406030204" pitchFamily="18" charset="0"/>
+                          <a:ea typeface="Cambria Math" panose="02040503050406030204" pitchFamily="18" charset="0"/>
+                          <a:cs typeface="Manrope"/>
+                        </a:rPr>
+                        <m:t>)≥</m:t>
+                      </m:r>
+                      <m:r>
+                        <a:rPr lang="ar-AE">
+                          <a:solidFill>
+                            <a:srgbClr val="333333"/>
+                          </a:solidFill>
+                          <a:latin typeface="Cambria Math" panose="02040503050406030204" pitchFamily="18" charset="0"/>
+                          <a:ea typeface="Cambria Math" panose="02040503050406030204" pitchFamily="18" charset="0"/>
+                          <a:cs typeface="Manrope"/>
+                        </a:rPr>
+                        <m:t>𝐹</m:t>
+                      </m:r>
+                      <m:r>
+                        <a:rPr lang="ar-AE">
+                          <a:solidFill>
+                            <a:srgbClr val="333333"/>
+                          </a:solidFill>
+                          <a:latin typeface="Cambria Math" panose="02040503050406030204" pitchFamily="18" charset="0"/>
+                          <a:ea typeface="Cambria Math" panose="02040503050406030204" pitchFamily="18" charset="0"/>
+                          <a:cs typeface="Manrope"/>
+                        </a:rPr>
+                        <m:t>(</m:t>
+                      </m:r>
+                      <m:r>
+                        <a:rPr lang="ar-AE">
+                          <a:solidFill>
+                            <a:srgbClr val="333333"/>
+                          </a:solidFill>
+                          <a:latin typeface="Cambria Math" panose="02040503050406030204" pitchFamily="18" charset="0"/>
+                          <a:ea typeface="Cambria Math" panose="02040503050406030204" pitchFamily="18" charset="0"/>
+                          <a:cs typeface="Manrope"/>
+                        </a:rPr>
+                        <m:t>𝐱</m:t>
+                      </m:r>
+                      <m:r>
+                        <a:rPr lang="ar-AE">
+                          <a:solidFill>
+                            <a:srgbClr val="333333"/>
+                          </a:solidFill>
+                          <a:latin typeface="Cambria Math" panose="02040503050406030204" pitchFamily="18" charset="0"/>
+                          <a:ea typeface="Cambria Math" panose="02040503050406030204" pitchFamily="18" charset="0"/>
+                          <a:cs typeface="Manrope"/>
+                        </a:rPr>
+                        <m:t>).</m:t>
+                      </m:r>
+                    </m:oMath>
+                  </m:oMathPara>
+                </a14:m>
+                <a:endParaRPr lang="ar-AE" dirty="0">
+                  <a:solidFill>
+                    <a:srgbClr val="333333"/>
+                  </a:solidFill>
+                  <a:latin typeface="Cambria Math" panose="02040503050406030204" pitchFamily="18" charset="0"/>
+                  <a:ea typeface="Cambria Math" panose="02040503050406030204" pitchFamily="18" charset="0"/>
+                  <a:cs typeface="Manrope"/>
+                </a:endParaRPr>
+              </a:p>
+            </p:txBody>
+          </p:sp>
+        </mc:Choice>
+        <mc:Fallback>
+          <p:sp>
+            <p:nvSpPr>
+              <p:cNvPr id="8" name="TextBox 7">
+                <a:extLst>
+                  <a:ext uri="{FF2B5EF4-FFF2-40B4-BE49-F238E27FC236}">
+                    <a16:creationId xmlns:a16="http://schemas.microsoft.com/office/drawing/2014/main" id="{7780963B-67B5-4305-BE26-F241AC72E786}"/>
+                  </a:ext>
+                </a:extLst>
+              </p:cNvPr>
+              <p:cNvSpPr txBox="1">
+                <a:spLocks noRot="1" noChangeAspect="1" noMove="1" noResize="1" noEditPoints="1" noAdjustHandles="1" noChangeArrowheads="1" noChangeShapeType="1" noTextEdit="1"/>
+              </p:cNvSpPr>
+              <p:nvPr/>
+            </p:nvSpPr>
+            <p:spPr>
+              <a:xfrm>
+                <a:off x="358028" y="1901254"/>
+                <a:ext cx="8100172" cy="1696490"/>
+              </a:xfrm>
+              <a:prstGeom prst="rect">
+                <a:avLst/>
+              </a:prstGeom>
+              <a:blipFill>
+                <a:blip r:embed="rId4"/>
+                <a:stretch>
+                  <a:fillRect l="-75" t="-360" b="-2878"/>
+                </a:stretch>
+              </a:blipFill>
+            </p:spPr>
+            <p:txBody>
+              <a:bodyPr/>
+              <a:lstStyle/>
+              <a:p>
+                <a:r>
+                  <a:rPr lang="ru-RU">
+                    <a:noFill/>
+                  </a:rPr>
+                  <a:t> </a:t>
+                </a:r>
+              </a:p>
+            </p:txBody>
+          </p:sp>
+        </mc:Fallback>
+      </mc:AlternateContent>
+      <mc:AlternateContent xmlns:mc="http://schemas.openxmlformats.org/markup-compatibility/2006">
+        <mc:Choice xmlns:a14="http://schemas.microsoft.com/office/drawing/2010/main" Requires="a14">
+          <p:sp>
+            <p:nvSpPr>
+              <p:cNvPr id="10" name="TextBox 9">
+                <a:extLst>
+                  <a:ext uri="{FF2B5EF4-FFF2-40B4-BE49-F238E27FC236}">
+                    <a16:creationId xmlns:a16="http://schemas.microsoft.com/office/drawing/2014/main" id="{E27429E7-477E-4274-B5D1-8AD41E205E9C}"/>
+                  </a:ext>
+                </a:extLst>
+              </p:cNvPr>
+              <p:cNvSpPr txBox="1"/>
+              <p:nvPr/>
+            </p:nvSpPr>
+            <p:spPr>
+              <a:xfrm>
+                <a:off x="358028" y="3723331"/>
+                <a:ext cx="4575362" cy="1015663"/>
+              </a:xfrm>
+              <a:prstGeom prst="rect">
+                <a:avLst/>
+              </a:prstGeom>
+              <a:noFill/>
+            </p:spPr>
+            <p:txBody>
+              <a:bodyPr wrap="square">
+                <a:spAutoFit/>
+              </a:bodyPr>
+              <a:lstStyle/>
+              <a:p>
+                <a:pPr marL="0" lvl="0" indent="0">
+                  <a:spcBef>
+                    <a:spcPts val="3000"/>
+                  </a:spcBef>
+                  <a:buNone/>
+                </a:pPr>
+                <a:r>
+                  <a:rPr lang="ru-RU" sz="1200" dirty="0">
+                    <a:solidFill>
+                      <a:srgbClr val="333333"/>
+                    </a:solidFill>
+                    <a:latin typeface="Manrope Medium"/>
+                  </a:rPr>
+                  <a:t>Обозначения:</a:t>
+                </a:r>
+              </a:p>
+              <a:p>
+                <a:pPr marL="171450" lvl="0" indent="-171450">
+                  <a:buFont typeface="Arial" panose="020B0604020202020204" pitchFamily="34" charset="0"/>
+                  <a:buChar char="•"/>
+                </a:pPr>
+                <a14:m>
+                  <m:oMath xmlns:m="http://schemas.openxmlformats.org/officeDocument/2006/math">
+                    <m:sSup>
+                      <m:sSupPr>
+                        <m:ctrlPr>
+                          <a:rPr lang="ar-AE" sz="1200">
+                            <a:solidFill>
+                              <a:srgbClr val="333333"/>
+                            </a:solidFill>
+                            <a:latin typeface="Cambria Math" panose="02040503050406030204" pitchFamily="18" charset="0"/>
+                            <a:ea typeface="Cambria Math" panose="02040503050406030204" pitchFamily="18" charset="0"/>
+                          </a:rPr>
+                        </m:ctrlPr>
+                      </m:sSupPr>
+                      <m:e>
+                        <m:r>
+                          <a:rPr lang="ar-AE" sz="1200">
+                            <a:solidFill>
+                              <a:srgbClr val="333333"/>
+                            </a:solidFill>
+                            <a:latin typeface="Cambria Math" panose="02040503050406030204" pitchFamily="18" charset="0"/>
+                            <a:ea typeface="Cambria Math" panose="02040503050406030204" pitchFamily="18" charset="0"/>
+                          </a:rPr>
+                          <m:t>𝐱</m:t>
+                        </m:r>
+                      </m:e>
+                      <m:sup>
+                        <m:r>
+                          <a:rPr lang="ar-AE" sz="1200">
+                            <a:solidFill>
+                              <a:srgbClr val="333333"/>
+                            </a:solidFill>
+                            <a:latin typeface="Cambria Math" panose="02040503050406030204" pitchFamily="18" charset="0"/>
+                            <a:ea typeface="Cambria Math" panose="02040503050406030204" pitchFamily="18" charset="0"/>
+                          </a:rPr>
+                          <m:t>∗</m:t>
+                        </m:r>
+                      </m:sup>
+                    </m:sSup>
+                  </m:oMath>
+                </a14:m>
+                <a:r>
+                  <a:rPr lang="ar-AE" sz="1200" dirty="0">
+                    <a:solidFill>
+                      <a:srgbClr val="333333"/>
+                    </a:solidFill>
+                    <a:latin typeface="Manrope Medium"/>
+                  </a:rPr>
+                  <a:t> — </a:t>
+                </a:r>
+                <a:r>
+                  <a:rPr lang="ru-RU" sz="1200" dirty="0">
+                    <a:solidFill>
+                      <a:srgbClr val="333333"/>
+                    </a:solidFill>
+                    <a:latin typeface="Manrope Medium"/>
+                  </a:rPr>
+                  <a:t>точка глобального максимума (глобальный </a:t>
+                </a:r>
+                <a:r>
+                  <a:rPr lang="ru-RU" sz="1200" dirty="0" err="1">
+                    <a:solidFill>
+                      <a:srgbClr val="333333"/>
+                    </a:solidFill>
+                    <a:latin typeface="Manrope Medium"/>
+                  </a:rPr>
+                  <a:t>максимизатор</a:t>
+                </a:r>
+                <a:r>
+                  <a:rPr lang="ru-RU" sz="1200" dirty="0">
+                    <a:solidFill>
+                      <a:srgbClr val="333333"/>
+                    </a:solidFill>
+                    <a:latin typeface="Manrope Medium"/>
+                  </a:rPr>
+                  <a:t>);</a:t>
+                </a:r>
+              </a:p>
+              <a:p>
+                <a:pPr marL="171450" lvl="0" indent="-171450">
+                  <a:buFont typeface="Arial" panose="020B0604020202020204" pitchFamily="34" charset="0"/>
+                  <a:buChar char="•"/>
+                </a:pPr>
+                <a14:m>
+                  <m:oMath xmlns:m="http://schemas.openxmlformats.org/officeDocument/2006/math">
+                    <m:sSup>
+                      <m:sSupPr>
+                        <m:ctrlPr>
+                          <a:rPr lang="ar-AE" sz="1200">
+                            <a:solidFill>
+                              <a:srgbClr val="333333"/>
+                            </a:solidFill>
+                            <a:latin typeface="Cambria Math" panose="02040503050406030204" pitchFamily="18" charset="0"/>
+                            <a:ea typeface="Cambria Math" panose="02040503050406030204" pitchFamily="18" charset="0"/>
+                          </a:rPr>
+                        </m:ctrlPr>
+                      </m:sSupPr>
+                      <m:e>
+                        <m:r>
+                          <a:rPr lang="ar-AE" sz="1200">
+                            <a:solidFill>
+                              <a:srgbClr val="333333"/>
+                            </a:solidFill>
+                            <a:latin typeface="Cambria Math" panose="02040503050406030204" pitchFamily="18" charset="0"/>
+                            <a:ea typeface="Cambria Math" panose="02040503050406030204" pitchFamily="18" charset="0"/>
+                          </a:rPr>
+                          <m:t>𝐹</m:t>
+                        </m:r>
+                      </m:e>
+                      <m:sup>
+                        <m:r>
+                          <a:rPr lang="ar-AE" sz="1200">
+                            <a:solidFill>
+                              <a:srgbClr val="333333"/>
+                            </a:solidFill>
+                            <a:latin typeface="Cambria Math" panose="02040503050406030204" pitchFamily="18" charset="0"/>
+                            <a:ea typeface="Cambria Math" panose="02040503050406030204" pitchFamily="18" charset="0"/>
+                          </a:rPr>
+                          <m:t>∗</m:t>
+                        </m:r>
+                      </m:sup>
+                    </m:sSup>
+                  </m:oMath>
+                </a14:m>
+                <a:r>
+                  <a:rPr lang="ar-AE" sz="1200" dirty="0">
+                    <a:solidFill>
+                      <a:srgbClr val="333333"/>
+                    </a:solidFill>
+                    <a:latin typeface="Manrope Medium"/>
+                  </a:rPr>
+                  <a:t> — </a:t>
+                </a:r>
+                <a:r>
+                  <a:rPr lang="ru-RU" sz="1200" dirty="0" err="1">
+                    <a:solidFill>
+                      <a:srgbClr val="333333"/>
+                    </a:solidFill>
+                    <a:latin typeface="Manrope Medium"/>
+                  </a:rPr>
+                  <a:t>глобальный</a:t>
+                </a:r>
+                <a:r>
+                  <a:rPr lang="ru-RU" sz="1200" dirty="0">
+                    <a:solidFill>
+                      <a:srgbClr val="333333"/>
+                    </a:solidFill>
+                    <a:latin typeface="Manrope Medium"/>
+                  </a:rPr>
+                  <a:t> </a:t>
+                </a:r>
+                <a:r>
+                  <a:rPr lang="ru-RU" sz="1200" dirty="0" err="1">
+                    <a:solidFill>
+                      <a:srgbClr val="333333"/>
+                    </a:solidFill>
+                    <a:latin typeface="Manrope Medium"/>
+                  </a:rPr>
+                  <a:t>максимум</a:t>
+                </a:r>
+                <a:r>
+                  <a:rPr lang="ru-RU" sz="1200" dirty="0">
+                    <a:solidFill>
+                      <a:srgbClr val="333333"/>
+                    </a:solidFill>
+                    <a:latin typeface="Manrope Medium"/>
+                  </a:rPr>
+                  <a:t> (</a:t>
+                </a:r>
+                <a:r>
+                  <a:rPr lang="ru-RU" sz="1200" dirty="0" err="1">
+                    <a:solidFill>
+                      <a:srgbClr val="333333"/>
+                    </a:solidFill>
+                    <a:latin typeface="Manrope Medium"/>
+                  </a:rPr>
+                  <a:t>значение</a:t>
+                </a:r>
+                <a:r>
+                  <a:rPr lang="ru-RU" sz="1200" dirty="0">
+                    <a:solidFill>
+                      <a:srgbClr val="333333"/>
+                    </a:solidFill>
+                    <a:latin typeface="Manrope Medium"/>
+                  </a:rPr>
+                  <a:t> </a:t>
+                </a:r>
+                <a:r>
+                  <a:rPr lang="ru-RU" sz="1200" dirty="0" err="1">
+                    <a:solidFill>
+                      <a:srgbClr val="333333"/>
+                    </a:solidFill>
+                    <a:latin typeface="Manrope Medium"/>
+                  </a:rPr>
+                  <a:t>функции</a:t>
+                </a:r>
+                <a:r>
+                  <a:rPr lang="ru-RU" sz="1200" dirty="0">
+                    <a:solidFill>
+                      <a:srgbClr val="333333"/>
+                    </a:solidFill>
+                    <a:latin typeface="Manrope Medium"/>
+                  </a:rPr>
+                  <a:t> в </a:t>
+                </a:r>
+                <a:r>
+                  <a:rPr lang="ru-RU" sz="1200" dirty="0" err="1">
+                    <a:solidFill>
+                      <a:srgbClr val="333333"/>
+                    </a:solidFill>
+                    <a:latin typeface="Manrope Medium"/>
+                  </a:rPr>
+                  <a:t>этой</a:t>
+                </a:r>
+                <a:r>
+                  <a:rPr lang="ru-RU" sz="1200" dirty="0">
+                    <a:solidFill>
+                      <a:srgbClr val="333333"/>
+                    </a:solidFill>
+                    <a:latin typeface="Manrope Medium"/>
+                  </a:rPr>
+                  <a:t> </a:t>
+                </a:r>
+                <a:r>
+                  <a:rPr lang="ru-RU" sz="1200" dirty="0" err="1">
+                    <a:solidFill>
+                      <a:srgbClr val="333333"/>
+                    </a:solidFill>
+                    <a:latin typeface="Manrope Medium"/>
+                  </a:rPr>
+                  <a:t>точке</a:t>
+                </a:r>
+                <a:r>
+                  <a:rPr lang="ru-RU" sz="1200" dirty="0">
+                    <a:solidFill>
+                      <a:srgbClr val="333333"/>
+                    </a:solidFill>
+                    <a:latin typeface="Manrope Medium"/>
+                  </a:rPr>
+                  <a:t>).</a:t>
+                </a:r>
+              </a:p>
+            </p:txBody>
+          </p:sp>
+        </mc:Choice>
+        <mc:Fallback>
+          <p:sp>
+            <p:nvSpPr>
+              <p:cNvPr id="10" name="TextBox 9">
+                <a:extLst>
+                  <a:ext uri="{FF2B5EF4-FFF2-40B4-BE49-F238E27FC236}">
+                    <a16:creationId xmlns:a16="http://schemas.microsoft.com/office/drawing/2014/main" id="{E27429E7-477E-4274-B5D1-8AD41E205E9C}"/>
+                  </a:ext>
+                </a:extLst>
+              </p:cNvPr>
+              <p:cNvSpPr txBox="1">
+                <a:spLocks noRot="1" noChangeAspect="1" noMove="1" noResize="1" noEditPoints="1" noAdjustHandles="1" noChangeArrowheads="1" noChangeShapeType="1" noTextEdit="1"/>
+              </p:cNvSpPr>
+              <p:nvPr/>
+            </p:nvSpPr>
+            <p:spPr>
+              <a:xfrm>
+                <a:off x="358028" y="3723331"/>
+                <a:ext cx="4575362" cy="1015663"/>
+              </a:xfrm>
+              <a:prstGeom prst="rect">
+                <a:avLst/>
+              </a:prstGeom>
+              <a:blipFill>
+                <a:blip r:embed="rId5"/>
+                <a:stretch>
+                  <a:fillRect l="-133" t="-1205" b="-3614"/>
+                </a:stretch>
+              </a:blipFill>
+            </p:spPr>
+            <p:txBody>
+              <a:bodyPr/>
+              <a:lstStyle/>
+              <a:p>
+                <a:r>
+                  <a:rPr lang="ru-RU">
+                    <a:noFill/>
+                  </a:rPr>
+                  <a:t> </a:t>
+                </a:r>
+              </a:p>
+            </p:txBody>
+          </p:sp>
+        </mc:Fallback>
+      </mc:AlternateContent>
     </p:spTree>
   </p:cSld>
   <p:clrMapOvr>
@@ -12657,6 +15278,967 @@
 </file>
 
 <file path=ppt/slides/slide7.xml><?xml version="1.0" encoding="utf-8"?>
+<p:sld xmlns:a="http://schemas.openxmlformats.org/drawingml/2006/main" xmlns:r="http://schemas.openxmlformats.org/officeDocument/2006/relationships" xmlns:p="http://schemas.openxmlformats.org/presentationml/2006/main">
+  <p:cSld>
+    <p:spTree>
+      <p:nvGrpSpPr>
+        <p:cNvPr id="1" name="Shape 311"/>
+        <p:cNvGrpSpPr/>
+        <p:nvPr/>
+      </p:nvGrpSpPr>
+      <p:grpSpPr>
+        <a:xfrm>
+          <a:off x="0" y="0"/>
+          <a:ext cx="0" cy="0"/>
+          <a:chOff x="0" y="0"/>
+          <a:chExt cx="0" cy="0"/>
+        </a:xfrm>
+      </p:grpSpPr>
+      <mc:AlternateContent xmlns:mc="http://schemas.openxmlformats.org/markup-compatibility/2006">
+        <mc:Choice xmlns:a14="http://schemas.microsoft.com/office/drawing/2010/main" Requires="a14">
+          <p:sp>
+            <p:nvSpPr>
+              <p:cNvPr id="312" name="Google Shape;312;p62"/>
+              <p:cNvSpPr txBox="1"/>
+              <p:nvPr/>
+            </p:nvSpPr>
+            <p:spPr>
+              <a:xfrm>
+                <a:off x="452624" y="1042516"/>
+                <a:ext cx="8113151" cy="1450269"/>
+              </a:xfrm>
+              <a:prstGeom prst="rect">
+                <a:avLst/>
+              </a:prstGeom>
+              <a:noFill/>
+              <a:ln>
+                <a:noFill/>
+              </a:ln>
+            </p:spPr>
+            <p:txBody>
+              <a:bodyPr spcFirstLastPara="1" wrap="square" lIns="0" tIns="0" rIns="0" bIns="0" anchor="t" anchorCtr="0">
+                <a:spAutoFit/>
+              </a:bodyPr>
+              <a:lstStyle/>
+              <a:p>
+                <a:pPr marL="0" lvl="0" indent="0">
+                  <a:buNone/>
+                </a:pPr>
+                <a:r>
+                  <a:rPr lang="ru-RU" sz="1200" dirty="0">
+                    <a:solidFill>
+                      <a:srgbClr val="333333"/>
+                    </a:solidFill>
+                    <a:latin typeface="Manrope Medium"/>
+                  </a:rPr>
+                  <a:t>Результатом решения является нахождение одной или более одной точки глобального экстремума (в нашем случае максимума), то есть такой точки множества </a:t>
+                </a:r>
+                <a14:m>
+                  <m:oMath xmlns:m="http://schemas.openxmlformats.org/officeDocument/2006/math">
+                    <m:r>
+                      <m:rPr>
+                        <m:sty m:val="p"/>
+                      </m:rPr>
+                      <a:rPr lang="el-GR" sz="1200">
+                        <a:solidFill>
+                          <a:srgbClr val="333333"/>
+                        </a:solidFill>
+                        <a:latin typeface="Cambria Math" panose="02040503050406030204" pitchFamily="18" charset="0"/>
+                        <a:ea typeface="Cambria Math" panose="02040503050406030204" pitchFamily="18" charset="0"/>
+                      </a:rPr>
+                      <m:t>Π</m:t>
+                    </m:r>
+                  </m:oMath>
+                </a14:m>
+                <a:r>
+                  <a:rPr lang="el-GR" sz="1200" dirty="0">
+                    <a:solidFill>
+                      <a:srgbClr val="333333"/>
+                    </a:solidFill>
+                    <a:latin typeface="Manrope Medium"/>
+                  </a:rPr>
+                  <a:t>, </a:t>
+                </a:r>
+                <a:r>
+                  <a:rPr lang="ru-RU" sz="1200" dirty="0">
+                    <a:solidFill>
+                      <a:srgbClr val="333333"/>
+                    </a:solidFill>
+                    <a:latin typeface="Manrope Medium"/>
+                  </a:rPr>
+                  <a:t>в которой функция </a:t>
+                </a:r>
+                <a14:m>
+                  <m:oMath xmlns:m="http://schemas.openxmlformats.org/officeDocument/2006/math">
+                    <m:r>
+                      <a:rPr lang="ru-RU" sz="1200">
+                        <a:solidFill>
+                          <a:srgbClr val="333333"/>
+                        </a:solidFill>
+                        <a:latin typeface="Cambria Math" panose="02040503050406030204" pitchFamily="18" charset="0"/>
+                        <a:ea typeface="Cambria Math" panose="02040503050406030204" pitchFamily="18" charset="0"/>
+                      </a:rPr>
+                      <m:t>𝐹</m:t>
+                    </m:r>
+                  </m:oMath>
+                </a14:m>
+                <a:r>
+                  <a:rPr lang="ru-RU" sz="1200" dirty="0">
+                    <a:solidFill>
+                      <a:srgbClr val="333333"/>
+                    </a:solidFill>
+                    <a:latin typeface="Manrope Medium"/>
+                  </a:rPr>
+                  <a:t> принимает наибольшее (или наименьшее) значение:</a:t>
+                </a:r>
+              </a:p>
+              <a:p>
+                <a:pPr marL="0" lvl="0" indent="0">
+                  <a:buNone/>
+                </a:pPr>
+                <a:endParaRPr lang="ru-RU" sz="1200" dirty="0">
+                  <a:solidFill>
+                    <a:srgbClr val="333333"/>
+                  </a:solidFill>
+                  <a:latin typeface="Manrope Medium"/>
+                </a:endParaRPr>
+              </a:p>
+              <a:p>
+                <a:pPr marL="0" lvl="0" indent="0">
+                  <a:buNone/>
+                </a:pPr>
+                <a14:m>
+                  <m:oMathPara xmlns:m="http://schemas.openxmlformats.org/officeDocument/2006/math">
+                    <m:oMathParaPr>
+                      <m:jc m:val="center"/>
+                    </m:oMathParaPr>
+                    <m:oMath xmlns:m="http://schemas.openxmlformats.org/officeDocument/2006/math">
+                      <m:sSup>
+                        <m:sSupPr>
+                          <m:ctrlPr>
+                            <a:rPr lang="ar-AE">
+                              <a:solidFill>
+                                <a:srgbClr val="333333"/>
+                              </a:solidFill>
+                              <a:latin typeface="Cambria Math" panose="02040503050406030204" pitchFamily="18" charset="0"/>
+                              <a:ea typeface="Cambria Math" panose="02040503050406030204" pitchFamily="18" charset="0"/>
+                            </a:rPr>
+                          </m:ctrlPr>
+                        </m:sSupPr>
+                        <m:e>
+                          <m:r>
+                            <a:rPr lang="ar-AE">
+                              <a:solidFill>
+                                <a:srgbClr val="333333"/>
+                              </a:solidFill>
+                              <a:latin typeface="Cambria Math" panose="02040503050406030204" pitchFamily="18" charset="0"/>
+                              <a:ea typeface="Cambria Math" panose="02040503050406030204" pitchFamily="18" charset="0"/>
+                            </a:rPr>
+                            <m:t>𝐹</m:t>
+                          </m:r>
+                        </m:e>
+                        <m:sup>
+                          <m:r>
+                            <a:rPr lang="ar-AE">
+                              <a:solidFill>
+                                <a:srgbClr val="333333"/>
+                              </a:solidFill>
+                              <a:latin typeface="Cambria Math" panose="02040503050406030204" pitchFamily="18" charset="0"/>
+                              <a:ea typeface="Cambria Math" panose="02040503050406030204" pitchFamily="18" charset="0"/>
+                            </a:rPr>
+                            <m:t>∗</m:t>
+                          </m:r>
+                        </m:sup>
+                      </m:sSup>
+                      <m:r>
+                        <a:rPr lang="ar-AE">
+                          <a:solidFill>
+                            <a:srgbClr val="333333"/>
+                          </a:solidFill>
+                          <a:latin typeface="Cambria Math" panose="02040503050406030204" pitchFamily="18" charset="0"/>
+                          <a:ea typeface="Cambria Math" panose="02040503050406030204" pitchFamily="18" charset="0"/>
+                        </a:rPr>
+                        <m:t>=</m:t>
+                      </m:r>
+                      <m:limLow>
+                        <m:limLowPr>
+                          <m:ctrlPr>
+                            <a:rPr lang="ar-AE">
+                              <a:solidFill>
+                                <a:srgbClr val="333333"/>
+                              </a:solidFill>
+                              <a:latin typeface="Cambria Math" panose="02040503050406030204" pitchFamily="18" charset="0"/>
+                              <a:ea typeface="Cambria Math" panose="02040503050406030204" pitchFamily="18" charset="0"/>
+                            </a:rPr>
+                          </m:ctrlPr>
+                        </m:limLowPr>
+                        <m:e>
+                          <m:r>
+                            <m:rPr>
+                              <m:sty m:val="p"/>
+                            </m:rPr>
+                            <a:rPr lang="en-US">
+                              <a:solidFill>
+                                <a:srgbClr val="333333"/>
+                              </a:solidFill>
+                              <a:latin typeface="Cambria Math" panose="02040503050406030204" pitchFamily="18" charset="0"/>
+                              <a:ea typeface="Cambria Math" panose="02040503050406030204" pitchFamily="18" charset="0"/>
+                            </a:rPr>
+                            <m:t>max</m:t>
+                          </m:r>
+                        </m:e>
+                        <m:lim>
+                          <m:r>
+                            <a:rPr lang="ar-AE">
+                              <a:solidFill>
+                                <a:srgbClr val="333333"/>
+                              </a:solidFill>
+                              <a:latin typeface="Cambria Math" panose="02040503050406030204" pitchFamily="18" charset="0"/>
+                              <a:ea typeface="Cambria Math" panose="02040503050406030204" pitchFamily="18" charset="0"/>
+                            </a:rPr>
+                            <m:t>𝐱</m:t>
+                          </m:r>
+                          <m:r>
+                            <a:rPr lang="ar-AE">
+                              <a:solidFill>
+                                <a:srgbClr val="333333"/>
+                              </a:solidFill>
+                              <a:latin typeface="Cambria Math" panose="02040503050406030204" pitchFamily="18" charset="0"/>
+                              <a:ea typeface="Cambria Math" panose="02040503050406030204" pitchFamily="18" charset="0"/>
+                            </a:rPr>
+                            <m:t>∈</m:t>
+                          </m:r>
+                          <m:r>
+                            <m:rPr>
+                              <m:sty m:val="p"/>
+                            </m:rPr>
+                            <a:rPr lang="el-GR">
+                              <a:solidFill>
+                                <a:srgbClr val="333333"/>
+                              </a:solidFill>
+                              <a:latin typeface="Cambria Math" panose="02040503050406030204" pitchFamily="18" charset="0"/>
+                              <a:ea typeface="Cambria Math" panose="02040503050406030204" pitchFamily="18" charset="0"/>
+                            </a:rPr>
+                            <m:t>Π</m:t>
+                          </m:r>
+                        </m:lim>
+                      </m:limLow>
+                      <m:r>
+                        <a:rPr lang="ar-AE">
+                          <a:solidFill>
+                            <a:srgbClr val="333333"/>
+                          </a:solidFill>
+                          <a:latin typeface="Cambria Math" panose="02040503050406030204" pitchFamily="18" charset="0"/>
+                          <a:ea typeface="Cambria Math" panose="02040503050406030204" pitchFamily="18" charset="0"/>
+                        </a:rPr>
+                        <m:t>𝐹</m:t>
+                      </m:r>
+                      <m:r>
+                        <a:rPr lang="ar-AE">
+                          <a:solidFill>
+                            <a:srgbClr val="333333"/>
+                          </a:solidFill>
+                          <a:latin typeface="Cambria Math" panose="02040503050406030204" pitchFamily="18" charset="0"/>
+                          <a:ea typeface="Cambria Math" panose="02040503050406030204" pitchFamily="18" charset="0"/>
+                        </a:rPr>
+                        <m:t>(</m:t>
+                      </m:r>
+                      <m:r>
+                        <a:rPr lang="ar-AE">
+                          <a:solidFill>
+                            <a:srgbClr val="333333"/>
+                          </a:solidFill>
+                          <a:latin typeface="Cambria Math" panose="02040503050406030204" pitchFamily="18" charset="0"/>
+                          <a:ea typeface="Cambria Math" panose="02040503050406030204" pitchFamily="18" charset="0"/>
+                        </a:rPr>
+                        <m:t>𝐱</m:t>
+                      </m:r>
+                      <m:r>
+                        <a:rPr lang="ar-AE">
+                          <a:solidFill>
+                            <a:srgbClr val="333333"/>
+                          </a:solidFill>
+                          <a:latin typeface="Cambria Math" panose="02040503050406030204" pitchFamily="18" charset="0"/>
+                          <a:ea typeface="Cambria Math" panose="02040503050406030204" pitchFamily="18" charset="0"/>
+                        </a:rPr>
+                        <m:t>)</m:t>
+                      </m:r>
+                    </m:oMath>
+                  </m:oMathPara>
+                </a14:m>
+                <a:endParaRPr lang="ru-RU" dirty="0">
+                  <a:solidFill>
+                    <a:srgbClr val="333333"/>
+                  </a:solidFill>
+                  <a:latin typeface="Cambria Math" panose="02040503050406030204" pitchFamily="18" charset="0"/>
+                  <a:ea typeface="Cambria Math" panose="02040503050406030204" pitchFamily="18" charset="0"/>
+                </a:endParaRPr>
+              </a:p>
+              <a:p>
+                <a:pPr marL="0" lvl="0" indent="0">
+                  <a:buNone/>
+                </a:pPr>
+                <a:endParaRPr lang="ar-AE" dirty="0">
+                  <a:solidFill>
+                    <a:srgbClr val="333333"/>
+                  </a:solidFill>
+                  <a:latin typeface="Cambria Math" panose="02040503050406030204" pitchFamily="18" charset="0"/>
+                  <a:ea typeface="Cambria Math" panose="02040503050406030204" pitchFamily="18" charset="0"/>
+                </a:endParaRPr>
+              </a:p>
+              <a:p>
+                <a:pPr marL="0" lvl="0" indent="0">
+                  <a:buNone/>
+                </a:pPr>
+                <a14:m>
+                  <m:oMathPara xmlns:m="http://schemas.openxmlformats.org/officeDocument/2006/math">
+                    <m:oMathParaPr>
+                      <m:jc m:val="center"/>
+                    </m:oMathParaPr>
+                    <m:oMath xmlns:m="http://schemas.openxmlformats.org/officeDocument/2006/math">
+                      <m:sSup>
+                        <m:sSupPr>
+                          <m:ctrlPr>
+                            <a:rPr lang="ar-AE">
+                              <a:solidFill>
+                                <a:srgbClr val="333333"/>
+                              </a:solidFill>
+                              <a:latin typeface="Cambria Math" panose="02040503050406030204" pitchFamily="18" charset="0"/>
+                              <a:ea typeface="Cambria Math" panose="02040503050406030204" pitchFamily="18" charset="0"/>
+                            </a:rPr>
+                          </m:ctrlPr>
+                        </m:sSupPr>
+                        <m:e>
+                          <m:r>
+                            <a:rPr lang="ar-AE">
+                              <a:solidFill>
+                                <a:srgbClr val="333333"/>
+                              </a:solidFill>
+                              <a:latin typeface="Cambria Math" panose="02040503050406030204" pitchFamily="18" charset="0"/>
+                              <a:ea typeface="Cambria Math" panose="02040503050406030204" pitchFamily="18" charset="0"/>
+                            </a:rPr>
+                            <m:t>𝑋</m:t>
+                          </m:r>
+                        </m:e>
+                        <m:sup>
+                          <m:r>
+                            <a:rPr lang="ar-AE">
+                              <a:solidFill>
+                                <a:srgbClr val="333333"/>
+                              </a:solidFill>
+                              <a:latin typeface="Cambria Math" panose="02040503050406030204" pitchFamily="18" charset="0"/>
+                              <a:ea typeface="Cambria Math" panose="02040503050406030204" pitchFamily="18" charset="0"/>
+                            </a:rPr>
+                            <m:t>∗</m:t>
+                          </m:r>
+                        </m:sup>
+                      </m:sSup>
+                      <m:r>
+                        <a:rPr lang="ar-AE">
+                          <a:solidFill>
+                            <a:srgbClr val="333333"/>
+                          </a:solidFill>
+                          <a:latin typeface="Cambria Math" panose="02040503050406030204" pitchFamily="18" charset="0"/>
+                          <a:ea typeface="Cambria Math" panose="02040503050406030204" pitchFamily="18" charset="0"/>
+                        </a:rPr>
+                        <m:t>={</m:t>
+                      </m:r>
+                      <m:r>
+                        <a:rPr lang="ar-AE">
+                          <a:solidFill>
+                            <a:srgbClr val="333333"/>
+                          </a:solidFill>
+                          <a:latin typeface="Cambria Math" panose="02040503050406030204" pitchFamily="18" charset="0"/>
+                          <a:ea typeface="Cambria Math" panose="02040503050406030204" pitchFamily="18" charset="0"/>
+                        </a:rPr>
+                        <m:t>𝐱</m:t>
+                      </m:r>
+                      <m:r>
+                        <a:rPr lang="ar-AE">
+                          <a:solidFill>
+                            <a:srgbClr val="333333"/>
+                          </a:solidFill>
+                          <a:latin typeface="Cambria Math" panose="02040503050406030204" pitchFamily="18" charset="0"/>
+                          <a:ea typeface="Cambria Math" panose="02040503050406030204" pitchFamily="18" charset="0"/>
+                        </a:rPr>
+                        <m:t>∈</m:t>
+                      </m:r>
+                      <m:r>
+                        <m:rPr>
+                          <m:sty m:val="p"/>
+                        </m:rPr>
+                        <a:rPr lang="el-GR">
+                          <a:solidFill>
+                            <a:srgbClr val="333333"/>
+                          </a:solidFill>
+                          <a:latin typeface="Cambria Math" panose="02040503050406030204" pitchFamily="18" charset="0"/>
+                          <a:ea typeface="Cambria Math" panose="02040503050406030204" pitchFamily="18" charset="0"/>
+                        </a:rPr>
+                        <m:t>Π</m:t>
+                      </m:r>
+                      <m:r>
+                        <a:rPr lang="el-GR">
+                          <a:solidFill>
+                            <a:srgbClr val="333333"/>
+                          </a:solidFill>
+                          <a:latin typeface="Cambria Math" panose="02040503050406030204" pitchFamily="18" charset="0"/>
+                          <a:ea typeface="Cambria Math" panose="02040503050406030204" pitchFamily="18" charset="0"/>
+                        </a:rPr>
+                        <m:t>∣</m:t>
+                      </m:r>
+                      <m:r>
+                        <a:rPr lang="el-GR">
+                          <a:solidFill>
+                            <a:srgbClr val="333333"/>
+                          </a:solidFill>
+                          <a:latin typeface="Cambria Math" panose="02040503050406030204" pitchFamily="18" charset="0"/>
+                          <a:ea typeface="Cambria Math" panose="02040503050406030204" pitchFamily="18" charset="0"/>
+                        </a:rPr>
+                        <m:t>𝐹</m:t>
+                      </m:r>
+                      <m:r>
+                        <a:rPr lang="el-GR">
+                          <a:solidFill>
+                            <a:srgbClr val="333333"/>
+                          </a:solidFill>
+                          <a:latin typeface="Cambria Math" panose="02040503050406030204" pitchFamily="18" charset="0"/>
+                          <a:ea typeface="Cambria Math" panose="02040503050406030204" pitchFamily="18" charset="0"/>
+                        </a:rPr>
+                        <m:t>(</m:t>
+                      </m:r>
+                      <m:r>
+                        <a:rPr lang="el-GR">
+                          <a:solidFill>
+                            <a:srgbClr val="333333"/>
+                          </a:solidFill>
+                          <a:latin typeface="Cambria Math" panose="02040503050406030204" pitchFamily="18" charset="0"/>
+                          <a:ea typeface="Cambria Math" panose="02040503050406030204" pitchFamily="18" charset="0"/>
+                        </a:rPr>
+                        <m:t>𝐱</m:t>
+                      </m:r>
+                      <m:r>
+                        <a:rPr lang="el-GR">
+                          <a:solidFill>
+                            <a:srgbClr val="333333"/>
+                          </a:solidFill>
+                          <a:latin typeface="Cambria Math" panose="02040503050406030204" pitchFamily="18" charset="0"/>
+                          <a:ea typeface="Cambria Math" panose="02040503050406030204" pitchFamily="18" charset="0"/>
+                        </a:rPr>
+                        <m:t>)=</m:t>
+                      </m:r>
+                      <m:sSup>
+                        <m:sSupPr>
+                          <m:ctrlPr>
+                            <a:rPr lang="ar-AE">
+                              <a:solidFill>
+                                <a:srgbClr val="333333"/>
+                              </a:solidFill>
+                              <a:latin typeface="Cambria Math" panose="02040503050406030204" pitchFamily="18" charset="0"/>
+                              <a:ea typeface="Cambria Math" panose="02040503050406030204" pitchFamily="18" charset="0"/>
+                            </a:rPr>
+                          </m:ctrlPr>
+                        </m:sSupPr>
+                        <m:e>
+                          <m:r>
+                            <a:rPr lang="ar-AE">
+                              <a:solidFill>
+                                <a:srgbClr val="333333"/>
+                              </a:solidFill>
+                              <a:latin typeface="Cambria Math" panose="02040503050406030204" pitchFamily="18" charset="0"/>
+                              <a:ea typeface="Cambria Math" panose="02040503050406030204" pitchFamily="18" charset="0"/>
+                            </a:rPr>
+                            <m:t>𝐹</m:t>
+                          </m:r>
+                        </m:e>
+                        <m:sup>
+                          <m:r>
+                            <a:rPr lang="ar-AE">
+                              <a:solidFill>
+                                <a:srgbClr val="333333"/>
+                              </a:solidFill>
+                              <a:latin typeface="Cambria Math" panose="02040503050406030204" pitchFamily="18" charset="0"/>
+                              <a:ea typeface="Cambria Math" panose="02040503050406030204" pitchFamily="18" charset="0"/>
+                            </a:rPr>
+                            <m:t>∗</m:t>
+                          </m:r>
+                        </m:sup>
+                      </m:sSup>
+                      <m:r>
+                        <a:rPr lang="ar-AE">
+                          <a:solidFill>
+                            <a:srgbClr val="333333"/>
+                          </a:solidFill>
+                          <a:latin typeface="Cambria Math" panose="02040503050406030204" pitchFamily="18" charset="0"/>
+                          <a:ea typeface="Cambria Math" panose="02040503050406030204" pitchFamily="18" charset="0"/>
+                        </a:rPr>
+                        <m:t>}</m:t>
+                      </m:r>
+                    </m:oMath>
+                  </m:oMathPara>
+                </a14:m>
+                <a:endParaRPr lang="ar-AE" dirty="0">
+                  <a:solidFill>
+                    <a:srgbClr val="333333"/>
+                  </a:solidFill>
+                  <a:latin typeface="Cambria Math" panose="02040503050406030204" pitchFamily="18" charset="0"/>
+                  <a:ea typeface="Cambria Math" panose="02040503050406030204" pitchFamily="18" charset="0"/>
+                </a:endParaRPr>
+              </a:p>
+            </p:txBody>
+          </p:sp>
+        </mc:Choice>
+        <mc:Fallback>
+          <p:sp>
+            <p:nvSpPr>
+              <p:cNvPr id="312" name="Google Shape;312;p62"/>
+              <p:cNvSpPr txBox="1">
+                <a:spLocks noRot="1" noChangeAspect="1" noMove="1" noResize="1" noEditPoints="1" noAdjustHandles="1" noChangeArrowheads="1" noChangeShapeType="1" noTextEdit="1"/>
+              </p:cNvSpPr>
+              <p:nvPr/>
+            </p:nvSpPr>
+            <p:spPr>
+              <a:xfrm>
+                <a:off x="452624" y="1042516"/>
+                <a:ext cx="8113151" cy="1450269"/>
+              </a:xfrm>
+              <a:prstGeom prst="rect">
+                <a:avLst/>
+              </a:prstGeom>
+              <a:blipFill>
+                <a:blip r:embed="rId3"/>
+                <a:stretch>
+                  <a:fillRect l="-1127" t="-3782" b="-4622"/>
+                </a:stretch>
+              </a:blipFill>
+              <a:ln>
+                <a:noFill/>
+              </a:ln>
+            </p:spPr>
+            <p:txBody>
+              <a:bodyPr/>
+              <a:lstStyle/>
+              <a:p>
+                <a:r>
+                  <a:rPr lang="ru-RU">
+                    <a:noFill/>
+                  </a:rPr>
+                  <a:t> </a:t>
+                </a:r>
+              </a:p>
+            </p:txBody>
+          </p:sp>
+        </mc:Fallback>
+      </mc:AlternateContent>
+      <p:sp>
+        <p:nvSpPr>
+          <p:cNvPr id="315" name="Google Shape;315;p62"/>
+          <p:cNvSpPr txBox="1">
+            <a:spLocks noGrp="1"/>
+          </p:cNvSpPr>
+          <p:nvPr>
+            <p:ph type="title"/>
+          </p:nvPr>
+        </p:nvSpPr>
+        <p:spPr>
+          <a:xfrm>
+            <a:off x="452625" y="575025"/>
+            <a:ext cx="5280900" cy="354600"/>
+          </a:xfrm>
+          <a:prstGeom prst="rect">
+            <a:avLst/>
+          </a:prstGeom>
+        </p:spPr>
+        <p:txBody>
+          <a:bodyPr spcFirstLastPara="1" wrap="square" lIns="0" tIns="91425" rIns="91425" bIns="91425" anchor="ctr" anchorCtr="0">
+            <a:normAutofit fontScale="90000"/>
+          </a:bodyPr>
+          <a:lstStyle/>
+          <a:p>
+            <a:pPr marL="0" lvl="0" indent="0" algn="l" rtl="0">
+              <a:spcBef>
+                <a:spcPts val="0"/>
+              </a:spcBef>
+              <a:spcAft>
+                <a:spcPts val="0"/>
+              </a:spcAft>
+              <a:buNone/>
+            </a:pPr>
+            <a:r>
+              <a:rPr lang="ru-RU" dirty="0"/>
+              <a:t>Описание задачи</a:t>
+            </a:r>
+            <a:endParaRPr dirty="0"/>
+          </a:p>
+        </p:txBody>
+      </p:sp>
+      <mc:AlternateContent xmlns:mc="http://schemas.openxmlformats.org/markup-compatibility/2006">
+        <mc:Choice xmlns:a14="http://schemas.microsoft.com/office/drawing/2010/main" Requires="a14">
+          <p:sp>
+            <p:nvSpPr>
+              <p:cNvPr id="7" name="TextBox 6">
+                <a:extLst>
+                  <a:ext uri="{FF2B5EF4-FFF2-40B4-BE49-F238E27FC236}">
+                    <a16:creationId xmlns:a16="http://schemas.microsoft.com/office/drawing/2014/main" id="{7A910E7A-5752-44C8-8F30-1D71B7471A1D}"/>
+                  </a:ext>
+                </a:extLst>
+              </p:cNvPr>
+              <p:cNvSpPr txBox="1"/>
+              <p:nvPr/>
+            </p:nvSpPr>
+            <p:spPr>
+              <a:xfrm>
+                <a:off x="452624" y="3158139"/>
+                <a:ext cx="8113151" cy="742383"/>
+              </a:xfrm>
+              <a:prstGeom prst="rect">
+                <a:avLst/>
+              </a:prstGeom>
+              <a:noFill/>
+            </p:spPr>
+            <p:txBody>
+              <a:bodyPr wrap="square">
+                <a:spAutoFit/>
+              </a:bodyPr>
+              <a:lstStyle/>
+              <a:p>
+                <a:pPr marL="0" lvl="0" indent="0">
+                  <a:buNone/>
+                </a:pPr>
+                <a:r>
+                  <a:rPr lang="ru-RU" sz="1200" dirty="0">
+                    <a:solidFill>
+                      <a:srgbClr val="333333"/>
+                    </a:solidFill>
+                    <a:latin typeface="Manrope Medium"/>
+                  </a:rPr>
+                  <a:t>Если требуется найти глобальный минимум, задача формулируется как:</a:t>
+                </a:r>
+              </a:p>
+              <a:p>
+                <a:pPr marL="0" lvl="0" indent="0">
+                  <a:buNone/>
+                </a:pPr>
+                <a:endParaRPr lang="ru-RU" sz="1200" dirty="0">
+                  <a:solidFill>
+                    <a:srgbClr val="333333"/>
+                  </a:solidFill>
+                  <a:latin typeface="Manrope Medium"/>
+                </a:endParaRPr>
+              </a:p>
+              <a:p>
+                <a:pPr marL="0" lvl="0" indent="0">
+                  <a:buNone/>
+                </a:pPr>
+                <a14:m>
+                  <m:oMathPara xmlns:m="http://schemas.openxmlformats.org/officeDocument/2006/math">
+                    <m:oMathParaPr>
+                      <m:jc m:val="center"/>
+                    </m:oMathParaPr>
+                    <m:oMath xmlns:m="http://schemas.openxmlformats.org/officeDocument/2006/math">
+                      <m:limLow>
+                        <m:limLowPr>
+                          <m:ctrlPr>
+                            <a:rPr lang="ar-AE">
+                              <a:solidFill>
+                                <a:srgbClr val="333333"/>
+                              </a:solidFill>
+                              <a:latin typeface="Cambria Math" panose="02040503050406030204" pitchFamily="18" charset="0"/>
+                              <a:ea typeface="Cambria Math" panose="02040503050406030204" pitchFamily="18" charset="0"/>
+                            </a:rPr>
+                          </m:ctrlPr>
+                        </m:limLowPr>
+                        <m:e>
+                          <m:r>
+                            <m:rPr>
+                              <m:sty m:val="p"/>
+                            </m:rPr>
+                            <a:rPr lang="en-US">
+                              <a:solidFill>
+                                <a:srgbClr val="333333"/>
+                              </a:solidFill>
+                              <a:latin typeface="Cambria Math" panose="02040503050406030204" pitchFamily="18" charset="0"/>
+                              <a:ea typeface="Cambria Math" panose="02040503050406030204" pitchFamily="18" charset="0"/>
+                            </a:rPr>
+                            <m:t>min</m:t>
+                          </m:r>
+                        </m:e>
+                        <m:lim>
+                          <m:r>
+                            <a:rPr lang="ar-AE">
+                              <a:solidFill>
+                                <a:srgbClr val="333333"/>
+                              </a:solidFill>
+                              <a:latin typeface="Cambria Math" panose="02040503050406030204" pitchFamily="18" charset="0"/>
+                              <a:ea typeface="Cambria Math" panose="02040503050406030204" pitchFamily="18" charset="0"/>
+                            </a:rPr>
+                            <m:t>𝐱</m:t>
+                          </m:r>
+                          <m:r>
+                            <a:rPr lang="ar-AE">
+                              <a:solidFill>
+                                <a:srgbClr val="333333"/>
+                              </a:solidFill>
+                              <a:latin typeface="Cambria Math" panose="02040503050406030204" pitchFamily="18" charset="0"/>
+                              <a:ea typeface="Cambria Math" panose="02040503050406030204" pitchFamily="18" charset="0"/>
+                            </a:rPr>
+                            <m:t>∈</m:t>
+                          </m:r>
+                          <m:r>
+                            <m:rPr>
+                              <m:sty m:val="p"/>
+                            </m:rPr>
+                            <a:rPr lang="el-GR">
+                              <a:solidFill>
+                                <a:srgbClr val="333333"/>
+                              </a:solidFill>
+                              <a:latin typeface="Cambria Math" panose="02040503050406030204" pitchFamily="18" charset="0"/>
+                              <a:ea typeface="Cambria Math" panose="02040503050406030204" pitchFamily="18" charset="0"/>
+                            </a:rPr>
+                            <m:t>Π</m:t>
+                          </m:r>
+                        </m:lim>
+                      </m:limLow>
+                      <m:r>
+                        <a:rPr lang="ar-AE">
+                          <a:solidFill>
+                            <a:srgbClr val="333333"/>
+                          </a:solidFill>
+                          <a:latin typeface="Cambria Math" panose="02040503050406030204" pitchFamily="18" charset="0"/>
+                          <a:ea typeface="Cambria Math" panose="02040503050406030204" pitchFamily="18" charset="0"/>
+                        </a:rPr>
+                        <m:t>𝐹</m:t>
+                      </m:r>
+                      <m:r>
+                        <a:rPr lang="ar-AE">
+                          <a:solidFill>
+                            <a:srgbClr val="333333"/>
+                          </a:solidFill>
+                          <a:latin typeface="Cambria Math" panose="02040503050406030204" pitchFamily="18" charset="0"/>
+                          <a:ea typeface="Cambria Math" panose="02040503050406030204" pitchFamily="18" charset="0"/>
+                        </a:rPr>
+                        <m:t>(</m:t>
+                      </m:r>
+                      <m:r>
+                        <a:rPr lang="ar-AE">
+                          <a:solidFill>
+                            <a:srgbClr val="333333"/>
+                          </a:solidFill>
+                          <a:latin typeface="Cambria Math" panose="02040503050406030204" pitchFamily="18" charset="0"/>
+                          <a:ea typeface="Cambria Math" panose="02040503050406030204" pitchFamily="18" charset="0"/>
+                        </a:rPr>
+                        <m:t>𝐱</m:t>
+                      </m:r>
+                      <m:r>
+                        <a:rPr lang="ar-AE">
+                          <a:solidFill>
+                            <a:srgbClr val="333333"/>
+                          </a:solidFill>
+                          <a:latin typeface="Cambria Math" panose="02040503050406030204" pitchFamily="18" charset="0"/>
+                          <a:ea typeface="Cambria Math" panose="02040503050406030204" pitchFamily="18" charset="0"/>
+                        </a:rPr>
+                        <m:t>)=−</m:t>
+                      </m:r>
+                      <m:limLow>
+                        <m:limLowPr>
+                          <m:ctrlPr>
+                            <a:rPr lang="ar-AE">
+                              <a:solidFill>
+                                <a:srgbClr val="333333"/>
+                              </a:solidFill>
+                              <a:latin typeface="Cambria Math" panose="02040503050406030204" pitchFamily="18" charset="0"/>
+                              <a:ea typeface="Cambria Math" panose="02040503050406030204" pitchFamily="18" charset="0"/>
+                            </a:rPr>
+                          </m:ctrlPr>
+                        </m:limLowPr>
+                        <m:e>
+                          <m:r>
+                            <m:rPr>
+                              <m:sty m:val="p"/>
+                            </m:rPr>
+                            <a:rPr lang="en-US">
+                              <a:solidFill>
+                                <a:srgbClr val="333333"/>
+                              </a:solidFill>
+                              <a:latin typeface="Cambria Math" panose="02040503050406030204" pitchFamily="18" charset="0"/>
+                              <a:ea typeface="Cambria Math" panose="02040503050406030204" pitchFamily="18" charset="0"/>
+                            </a:rPr>
+                            <m:t>max</m:t>
+                          </m:r>
+                        </m:e>
+                        <m:lim>
+                          <m:r>
+                            <a:rPr lang="ar-AE">
+                              <a:solidFill>
+                                <a:srgbClr val="333333"/>
+                              </a:solidFill>
+                              <a:latin typeface="Cambria Math" panose="02040503050406030204" pitchFamily="18" charset="0"/>
+                              <a:ea typeface="Cambria Math" panose="02040503050406030204" pitchFamily="18" charset="0"/>
+                            </a:rPr>
+                            <m:t>𝐱</m:t>
+                          </m:r>
+                          <m:r>
+                            <a:rPr lang="ar-AE">
+                              <a:solidFill>
+                                <a:srgbClr val="333333"/>
+                              </a:solidFill>
+                              <a:latin typeface="Cambria Math" panose="02040503050406030204" pitchFamily="18" charset="0"/>
+                              <a:ea typeface="Cambria Math" panose="02040503050406030204" pitchFamily="18" charset="0"/>
+                            </a:rPr>
+                            <m:t>∈</m:t>
+                          </m:r>
+                          <m:r>
+                            <m:rPr>
+                              <m:sty m:val="p"/>
+                            </m:rPr>
+                            <a:rPr lang="el-GR">
+                              <a:solidFill>
+                                <a:srgbClr val="333333"/>
+                              </a:solidFill>
+                              <a:latin typeface="Cambria Math" panose="02040503050406030204" pitchFamily="18" charset="0"/>
+                              <a:ea typeface="Cambria Math" panose="02040503050406030204" pitchFamily="18" charset="0"/>
+                            </a:rPr>
+                            <m:t>Π</m:t>
+                          </m:r>
+                        </m:lim>
+                      </m:limLow>
+                      <m:d>
+                        <m:dPr>
+                          <m:ctrlPr>
+                            <a:rPr lang="ar-AE">
+                              <a:solidFill>
+                                <a:srgbClr val="333333"/>
+                              </a:solidFill>
+                              <a:latin typeface="Cambria Math" panose="02040503050406030204" pitchFamily="18" charset="0"/>
+                              <a:ea typeface="Cambria Math" panose="02040503050406030204" pitchFamily="18" charset="0"/>
+                            </a:rPr>
+                          </m:ctrlPr>
+                        </m:dPr>
+                        <m:e>
+                          <m:r>
+                            <a:rPr lang="ar-AE">
+                              <a:solidFill>
+                                <a:srgbClr val="333333"/>
+                              </a:solidFill>
+                              <a:latin typeface="Cambria Math" panose="02040503050406030204" pitchFamily="18" charset="0"/>
+                              <a:ea typeface="Cambria Math" panose="02040503050406030204" pitchFamily="18" charset="0"/>
+                            </a:rPr>
+                            <m:t>−</m:t>
+                          </m:r>
+                          <m:r>
+                            <a:rPr lang="ar-AE">
+                              <a:solidFill>
+                                <a:srgbClr val="333333"/>
+                              </a:solidFill>
+                              <a:latin typeface="Cambria Math" panose="02040503050406030204" pitchFamily="18" charset="0"/>
+                              <a:ea typeface="Cambria Math" panose="02040503050406030204" pitchFamily="18" charset="0"/>
+                            </a:rPr>
+                            <m:t>𝐹</m:t>
+                          </m:r>
+                          <m:r>
+                            <a:rPr lang="ar-AE">
+                              <a:solidFill>
+                                <a:srgbClr val="333333"/>
+                              </a:solidFill>
+                              <a:latin typeface="Cambria Math" panose="02040503050406030204" pitchFamily="18" charset="0"/>
+                              <a:ea typeface="Cambria Math" panose="02040503050406030204" pitchFamily="18" charset="0"/>
+                            </a:rPr>
+                            <m:t>(</m:t>
+                          </m:r>
+                          <m:r>
+                            <a:rPr lang="ar-AE">
+                              <a:solidFill>
+                                <a:srgbClr val="333333"/>
+                              </a:solidFill>
+                              <a:latin typeface="Cambria Math" panose="02040503050406030204" pitchFamily="18" charset="0"/>
+                              <a:ea typeface="Cambria Math" panose="02040503050406030204" pitchFamily="18" charset="0"/>
+                            </a:rPr>
+                            <m:t>𝐱</m:t>
+                          </m:r>
+                          <m:r>
+                            <a:rPr lang="ar-AE">
+                              <a:solidFill>
+                                <a:srgbClr val="333333"/>
+                              </a:solidFill>
+                              <a:latin typeface="Cambria Math" panose="02040503050406030204" pitchFamily="18" charset="0"/>
+                              <a:ea typeface="Cambria Math" panose="02040503050406030204" pitchFamily="18" charset="0"/>
+                            </a:rPr>
+                            <m:t>)</m:t>
+                          </m:r>
+                        </m:e>
+                      </m:d>
+                    </m:oMath>
+                  </m:oMathPara>
+                </a14:m>
+                <a:endParaRPr lang="ru-RU" dirty="0">
+                  <a:solidFill>
+                    <a:srgbClr val="333333"/>
+                  </a:solidFill>
+                  <a:latin typeface="Cambria Math" panose="02040503050406030204" pitchFamily="18" charset="0"/>
+                  <a:ea typeface="Cambria Math" panose="02040503050406030204" pitchFamily="18" charset="0"/>
+                </a:endParaRPr>
+              </a:p>
+            </p:txBody>
+          </p:sp>
+        </mc:Choice>
+        <mc:Fallback>
+          <p:sp>
+            <p:nvSpPr>
+              <p:cNvPr id="7" name="TextBox 6">
+                <a:extLst>
+                  <a:ext uri="{FF2B5EF4-FFF2-40B4-BE49-F238E27FC236}">
+                    <a16:creationId xmlns:a16="http://schemas.microsoft.com/office/drawing/2014/main" id="{7A910E7A-5752-44C8-8F30-1D71B7471A1D}"/>
+                  </a:ext>
+                </a:extLst>
+              </p:cNvPr>
+              <p:cNvSpPr txBox="1">
+                <a:spLocks noRot="1" noChangeAspect="1" noMove="1" noResize="1" noEditPoints="1" noAdjustHandles="1" noChangeArrowheads="1" noChangeShapeType="1" noTextEdit="1"/>
+              </p:cNvSpPr>
+              <p:nvPr/>
+            </p:nvSpPr>
+            <p:spPr>
+              <a:xfrm>
+                <a:off x="452624" y="3158139"/>
+                <a:ext cx="8113151" cy="742383"/>
+              </a:xfrm>
+              <a:prstGeom prst="rect">
+                <a:avLst/>
+              </a:prstGeom>
+              <a:blipFill>
+                <a:blip r:embed="rId4"/>
+                <a:stretch>
+                  <a:fillRect/>
+                </a:stretch>
+              </a:blipFill>
+            </p:spPr>
+            <p:txBody>
+              <a:bodyPr/>
+              <a:lstStyle/>
+              <a:p>
+                <a:r>
+                  <a:rPr lang="ru-RU">
+                    <a:noFill/>
+                  </a:rPr>
+                  <a:t> </a:t>
+                </a:r>
+              </a:p>
+            </p:txBody>
+          </p:sp>
+        </mc:Fallback>
+      </mc:AlternateContent>
+    </p:spTree>
+    <p:extLst>
+      <p:ext uri="{BB962C8B-B14F-4D97-AF65-F5344CB8AC3E}">
+        <p14:creationId xmlns:p14="http://schemas.microsoft.com/office/powerpoint/2010/main" val="2610227602"/>
+      </p:ext>
+    </p:extLst>
+  </p:cSld>
+  <p:clrMapOvr>
+    <a:masterClrMapping/>
+  </p:clrMapOvr>
+</p:sld>
+</file>
+
+<file path=ppt/slides/slide8.xml><?xml version="1.0" encoding="utf-8"?>
 <p:sld xmlns:a="http://schemas.openxmlformats.org/drawingml/2006/main" xmlns:r="http://schemas.openxmlformats.org/officeDocument/2006/relationships" xmlns:p="http://schemas.openxmlformats.org/presentationml/2006/main">
   <p:cSld>
     <p:spTree>
@@ -12732,7 +16314,7 @@
 </p:sld>
 </file>
 
-<file path=ppt/slides/slide8.xml><?xml version="1.0" encoding="utf-8"?>
+<file path=ppt/slides/slide9.xml><?xml version="1.0" encoding="utf-8"?>
 <p:sld xmlns:a="http://schemas.openxmlformats.org/drawingml/2006/main" xmlns:r="http://schemas.openxmlformats.org/officeDocument/2006/relationships" xmlns:p="http://schemas.openxmlformats.org/presentationml/2006/main">
   <p:cSld>
     <p:spTree>
@@ -13065,541 +16647,6 @@
           </a:effectLst>
         </p:spPr>
       </p:pic>
-    </p:spTree>
-  </p:cSld>
-  <p:clrMapOvr>
-    <a:masterClrMapping/>
-  </p:clrMapOvr>
-</p:sld>
-</file>
-
-<file path=ppt/slides/slide9.xml><?xml version="1.0" encoding="utf-8"?>
-<p:sld xmlns:a="http://schemas.openxmlformats.org/drawingml/2006/main" xmlns:r="http://schemas.openxmlformats.org/officeDocument/2006/relationships" xmlns:p="http://schemas.openxmlformats.org/presentationml/2006/main">
-  <p:cSld>
-    <p:spTree>
-      <p:nvGrpSpPr>
-        <p:cNvPr id="1" name="Shape 329"/>
-        <p:cNvGrpSpPr/>
-        <p:nvPr/>
-      </p:nvGrpSpPr>
-      <p:grpSpPr>
-        <a:xfrm>
-          <a:off x="0" y="0"/>
-          <a:ext cx="0" cy="0"/>
-          <a:chOff x="0" y="0"/>
-          <a:chExt cx="0" cy="0"/>
-        </a:xfrm>
-      </p:grpSpPr>
-      <p:sp>
-        <p:nvSpPr>
-          <p:cNvPr id="330" name="Google Shape;330;p64"/>
-          <p:cNvSpPr txBox="1">
-            <a:spLocks noGrp="1"/>
-          </p:cNvSpPr>
-          <p:nvPr>
-            <p:ph type="title"/>
-          </p:nvPr>
-        </p:nvSpPr>
-        <p:spPr>
-          <a:xfrm>
-            <a:off x="452625" y="575025"/>
-            <a:ext cx="5280900" cy="354600"/>
-          </a:xfrm>
-          <a:prstGeom prst="rect">
-            <a:avLst/>
-          </a:prstGeom>
-        </p:spPr>
-        <p:txBody>
-          <a:bodyPr spcFirstLastPara="1" wrap="square" lIns="0" tIns="91425" rIns="91425" bIns="91425" anchor="ctr" anchorCtr="0">
-            <a:normAutofit fontScale="90000"/>
-          </a:bodyPr>
-          <a:lstStyle/>
-          <a:p>
-            <a:pPr marL="0" lvl="0" indent="0" algn="l" rtl="0">
-              <a:spcBef>
-                <a:spcPts val="0"/>
-              </a:spcBef>
-              <a:spcAft>
-                <a:spcPts val="0"/>
-              </a:spcAft>
-              <a:buNone/>
-            </a:pPr>
-            <a:r>
-              <a:rPr lang="ru-RU" dirty="0"/>
-              <a:t>Функция </a:t>
-            </a:r>
-            <a:r>
-              <a:rPr lang="ru-RU" dirty="0" err="1"/>
-              <a:t>Растригина</a:t>
-            </a:r>
-            <a:endParaRPr dirty="0"/>
-          </a:p>
-        </p:txBody>
-      </p:sp>
-      <p:sp>
-        <p:nvSpPr>
-          <p:cNvPr id="331" name="Google Shape;331;p64"/>
-          <p:cNvSpPr txBox="1"/>
-          <p:nvPr/>
-        </p:nvSpPr>
-        <p:spPr>
-          <a:xfrm>
-            <a:off x="4396875" y="1632240"/>
-            <a:ext cx="3878400" cy="295466"/>
-          </a:xfrm>
-          <a:prstGeom prst="rect">
-            <a:avLst/>
-          </a:prstGeom>
-          <a:noFill/>
-          <a:ln>
-            <a:noFill/>
-          </a:ln>
-        </p:spPr>
-        <p:txBody>
-          <a:bodyPr spcFirstLastPara="1" wrap="square" lIns="0" tIns="0" rIns="0" bIns="0" anchor="t" anchorCtr="0">
-            <a:spAutoFit/>
-          </a:bodyPr>
-          <a:lstStyle/>
-          <a:p>
-            <a:pPr marL="0" marR="0" lvl="0" indent="0" algn="l" rtl="0">
-              <a:lnSpc>
-                <a:spcPct val="160000"/>
-              </a:lnSpc>
-              <a:spcBef>
-                <a:spcPts val="0"/>
-              </a:spcBef>
-              <a:spcAft>
-                <a:spcPts val="0"/>
-              </a:spcAft>
-              <a:buNone/>
-            </a:pPr>
-            <a:r>
-              <a:rPr lang="en-US" sz="1200" dirty="0">
-                <a:highlight>
-                  <a:srgbClr val="FFFF00"/>
-                </a:highlight>
-                <a:latin typeface="Manrope"/>
-                <a:ea typeface="Manrope"/>
-                <a:cs typeface="Manrope"/>
-                <a:sym typeface="Manrope"/>
-              </a:rPr>
-              <a:t>f(…) = … (</a:t>
-            </a:r>
-            <a:r>
-              <a:rPr lang="ru-RU" sz="1200" dirty="0">
-                <a:highlight>
-                  <a:srgbClr val="FFFF00"/>
-                </a:highlight>
-                <a:latin typeface="Manrope"/>
-                <a:ea typeface="Manrope"/>
-                <a:cs typeface="Manrope"/>
-                <a:sym typeface="Manrope"/>
-              </a:rPr>
-              <a:t>но нормальной формулой</a:t>
-            </a:r>
-            <a:r>
-              <a:rPr lang="en-US" sz="1200" dirty="0">
-                <a:highlight>
-                  <a:srgbClr val="FFFF00"/>
-                </a:highlight>
-                <a:latin typeface="Manrope"/>
-                <a:ea typeface="Manrope"/>
-                <a:cs typeface="Manrope"/>
-                <a:sym typeface="Manrope"/>
-              </a:rPr>
-              <a:t>, </a:t>
-            </a:r>
-            <a:r>
-              <a:rPr lang="ru-RU" sz="1200" dirty="0">
-                <a:highlight>
-                  <a:srgbClr val="FFFF00"/>
-                </a:highlight>
-                <a:latin typeface="Manrope"/>
-                <a:ea typeface="Manrope"/>
-                <a:cs typeface="Manrope"/>
-                <a:sym typeface="Manrope"/>
-              </a:rPr>
-              <a:t>а не текстом</a:t>
-            </a:r>
-            <a:r>
-              <a:rPr lang="en-US" sz="1200" dirty="0">
-                <a:highlight>
-                  <a:srgbClr val="FFFF00"/>
-                </a:highlight>
-                <a:latin typeface="Manrope"/>
-                <a:ea typeface="Manrope"/>
-                <a:cs typeface="Manrope"/>
-                <a:sym typeface="Manrope"/>
-              </a:rPr>
-              <a:t>)</a:t>
-            </a:r>
-            <a:endParaRPr lang="ru-RU" sz="1200" dirty="0">
-              <a:highlight>
-                <a:srgbClr val="FFFF00"/>
-              </a:highlight>
-              <a:latin typeface="Manrope"/>
-              <a:ea typeface="Manrope"/>
-              <a:cs typeface="Manrope"/>
-              <a:sym typeface="Manrope"/>
-            </a:endParaRPr>
-          </a:p>
-        </p:txBody>
-      </p:sp>
-      <p:sp>
-        <p:nvSpPr>
-          <p:cNvPr id="332" name="Google Shape;332;p64"/>
-          <p:cNvSpPr txBox="1"/>
-          <p:nvPr/>
-        </p:nvSpPr>
-        <p:spPr>
-          <a:xfrm>
-            <a:off x="4396878" y="2319858"/>
-            <a:ext cx="3878400" cy="1077218"/>
-          </a:xfrm>
-          <a:prstGeom prst="rect">
-            <a:avLst/>
-          </a:prstGeom>
-          <a:noFill/>
-          <a:ln>
-            <a:noFill/>
-          </a:ln>
-        </p:spPr>
-        <p:txBody>
-          <a:bodyPr spcFirstLastPara="1" wrap="square" lIns="0" tIns="0" rIns="0" bIns="0" anchor="t" anchorCtr="0">
-            <a:spAutoFit/>
-          </a:bodyPr>
-          <a:lstStyle/>
-          <a:p>
-            <a:pPr marL="254000" marR="0" lvl="1" indent="-114300" algn="l" rtl="0">
-              <a:lnSpc>
-                <a:spcPct val="150000"/>
-              </a:lnSpc>
-              <a:spcBef>
-                <a:spcPts val="1000"/>
-              </a:spcBef>
-              <a:spcAft>
-                <a:spcPts val="0"/>
-              </a:spcAft>
-              <a:buClr>
-                <a:srgbClr val="333333"/>
-              </a:buClr>
-              <a:buSzPts val="1000"/>
-              <a:buFont typeface="Manrope"/>
-              <a:buChar char="•"/>
-            </a:pPr>
-            <a:r>
-              <a:rPr lang="ru-RU" sz="1000" dirty="0" err="1">
-                <a:solidFill>
-                  <a:srgbClr val="333333"/>
-                </a:solidFill>
-                <a:highlight>
-                  <a:srgbClr val="FFFF00"/>
-                </a:highlight>
-                <a:latin typeface="Manrope"/>
-                <a:ea typeface="Manrope"/>
-                <a:cs typeface="Manrope"/>
-                <a:sym typeface="Manrope"/>
-              </a:rPr>
-              <a:t>Пункт1</a:t>
-            </a:r>
-            <a:r>
-              <a:rPr lang="en-US" sz="1000" dirty="0">
-                <a:solidFill>
-                  <a:srgbClr val="333333"/>
-                </a:solidFill>
-                <a:highlight>
-                  <a:srgbClr val="FFFF00"/>
-                </a:highlight>
-                <a:latin typeface="Manrope"/>
-                <a:ea typeface="Manrope"/>
-                <a:cs typeface="Manrope"/>
-                <a:sym typeface="Manrope"/>
-              </a:rPr>
-              <a:t>;</a:t>
-            </a:r>
-          </a:p>
-          <a:p>
-            <a:pPr marL="254000" marR="0" lvl="1" indent="-114300" algn="l" rtl="0">
-              <a:lnSpc>
-                <a:spcPct val="150000"/>
-              </a:lnSpc>
-              <a:spcBef>
-                <a:spcPts val="1000"/>
-              </a:spcBef>
-              <a:spcAft>
-                <a:spcPts val="0"/>
-              </a:spcAft>
-              <a:buClr>
-                <a:srgbClr val="333333"/>
-              </a:buClr>
-              <a:buSzPts val="1000"/>
-              <a:buFont typeface="Manrope"/>
-              <a:buChar char="•"/>
-            </a:pPr>
-            <a:r>
-              <a:rPr lang="ru-RU" sz="1000" dirty="0" err="1">
-                <a:solidFill>
-                  <a:srgbClr val="333333"/>
-                </a:solidFill>
-                <a:highlight>
-                  <a:srgbClr val="FFFF00"/>
-                </a:highlight>
-                <a:latin typeface="Manrope"/>
-                <a:ea typeface="Manrope"/>
-                <a:cs typeface="Manrope"/>
-                <a:sym typeface="Manrope"/>
-              </a:rPr>
-              <a:t>Пункт2</a:t>
-            </a:r>
-            <a:r>
-              <a:rPr lang="en-US" sz="1000" dirty="0">
-                <a:solidFill>
-                  <a:srgbClr val="333333"/>
-                </a:solidFill>
-                <a:highlight>
-                  <a:srgbClr val="FFFF00"/>
-                </a:highlight>
-                <a:latin typeface="Manrope"/>
-                <a:ea typeface="Manrope"/>
-                <a:cs typeface="Manrope"/>
-                <a:sym typeface="Manrope"/>
-              </a:rPr>
-              <a:t>;</a:t>
-            </a:r>
-          </a:p>
-          <a:p>
-            <a:pPr marL="254000" marR="0" lvl="1" indent="-114300" algn="l" rtl="0">
-              <a:lnSpc>
-                <a:spcPct val="150000"/>
-              </a:lnSpc>
-              <a:spcBef>
-                <a:spcPts val="1000"/>
-              </a:spcBef>
-              <a:spcAft>
-                <a:spcPts val="0"/>
-              </a:spcAft>
-              <a:buClr>
-                <a:srgbClr val="333333"/>
-              </a:buClr>
-              <a:buSzPts val="1000"/>
-              <a:buFont typeface="Manrope"/>
-              <a:buChar char="•"/>
-            </a:pPr>
-            <a:r>
-              <a:rPr lang="ru-RU" sz="1000" dirty="0" err="1">
-                <a:solidFill>
-                  <a:srgbClr val="333333"/>
-                </a:solidFill>
-                <a:highlight>
-                  <a:srgbClr val="FFFF00"/>
-                </a:highlight>
-                <a:latin typeface="Manrope"/>
-                <a:ea typeface="Manrope"/>
-                <a:cs typeface="Manrope"/>
-                <a:sym typeface="Manrope"/>
-              </a:rPr>
-              <a:t>Пункт3</a:t>
-            </a:r>
-            <a:r>
-              <a:rPr lang="en-US" sz="1000" dirty="0">
-                <a:solidFill>
-                  <a:srgbClr val="333333"/>
-                </a:solidFill>
-                <a:highlight>
-                  <a:srgbClr val="FFFF00"/>
-                </a:highlight>
-                <a:latin typeface="Manrope"/>
-                <a:ea typeface="Manrope"/>
-                <a:cs typeface="Manrope"/>
-                <a:sym typeface="Manrope"/>
-              </a:rPr>
-              <a:t>;</a:t>
-            </a:r>
-            <a:endParaRPr sz="1000" dirty="0">
-              <a:solidFill>
-                <a:srgbClr val="333333"/>
-              </a:solidFill>
-              <a:highlight>
-                <a:srgbClr val="FFFF00"/>
-              </a:highlight>
-              <a:latin typeface="Manrope"/>
-              <a:ea typeface="Manrope"/>
-              <a:cs typeface="Manrope"/>
-              <a:sym typeface="Manrope"/>
-            </a:endParaRPr>
-          </a:p>
-        </p:txBody>
-      </p:sp>
-      <p:sp>
-        <p:nvSpPr>
-          <p:cNvPr id="2" name="Google Shape;331;p64">
-            <a:extLst>
-              <a:ext uri="{FF2B5EF4-FFF2-40B4-BE49-F238E27FC236}">
-                <a16:creationId xmlns:a16="http://schemas.microsoft.com/office/drawing/2014/main" id="{6C02F778-99D4-1FA0-33A4-7882B5ADF2CA}"/>
-              </a:ext>
-            </a:extLst>
-          </p:cNvPr>
-          <p:cNvSpPr txBox="1"/>
-          <p:nvPr/>
-        </p:nvSpPr>
-        <p:spPr>
-          <a:xfrm>
-            <a:off x="4396875" y="1283764"/>
-            <a:ext cx="3878400" cy="295466"/>
-          </a:xfrm>
-          <a:prstGeom prst="rect">
-            <a:avLst/>
-          </a:prstGeom>
-          <a:noFill/>
-          <a:ln>
-            <a:noFill/>
-          </a:ln>
-        </p:spPr>
-        <p:txBody>
-          <a:bodyPr spcFirstLastPara="1" wrap="square" lIns="0" tIns="0" rIns="0" bIns="0" anchor="t" anchorCtr="0">
-            <a:spAutoFit/>
-          </a:bodyPr>
-          <a:lstStyle/>
-          <a:p>
-            <a:pPr marL="0" marR="0" lvl="0" indent="0" algn="l" rtl="0">
-              <a:lnSpc>
-                <a:spcPct val="160000"/>
-              </a:lnSpc>
-              <a:spcBef>
-                <a:spcPts val="0"/>
-              </a:spcBef>
-              <a:spcAft>
-                <a:spcPts val="0"/>
-              </a:spcAft>
-              <a:buNone/>
-            </a:pPr>
-            <a:r>
-              <a:rPr lang="ru-RU" sz="1200" dirty="0">
-                <a:highlight>
-                  <a:srgbClr val="FFFF00"/>
-                </a:highlight>
-                <a:latin typeface="Manrope"/>
-                <a:ea typeface="Manrope"/>
-                <a:cs typeface="Manrope"/>
-                <a:sym typeface="Manrope"/>
-              </a:rPr>
-              <a:t>Текст</a:t>
-            </a:r>
-          </a:p>
-        </p:txBody>
-      </p:sp>
-      <p:pic>
-        <p:nvPicPr>
-          <p:cNvPr id="8" name="Рисунок 7">
-            <a:extLst>
-              <a:ext uri="{FF2B5EF4-FFF2-40B4-BE49-F238E27FC236}">
-                <a16:creationId xmlns:a16="http://schemas.microsoft.com/office/drawing/2014/main" id="{AFA47CB7-E53D-9473-0555-34DD3074AA7E}"/>
-              </a:ext>
-            </a:extLst>
-          </p:cNvPr>
-          <p:cNvPicPr>
-            <a:picLocks noChangeAspect="1"/>
-          </p:cNvPicPr>
-          <p:nvPr/>
-        </p:nvPicPr>
-        <p:blipFill>
-          <a:blip r:embed="rId3"/>
-          <a:stretch>
-            <a:fillRect/>
-          </a:stretch>
-        </p:blipFill>
-        <p:spPr>
-          <a:xfrm>
-            <a:off x="260120" y="1243875"/>
-            <a:ext cx="3808447" cy="3103377"/>
-          </a:xfrm>
-          <a:prstGeom prst="rect">
-            <a:avLst/>
-          </a:prstGeom>
-          <a:effectLst>
-            <a:softEdge rad="266700"/>
-          </a:effectLst>
-        </p:spPr>
-      </p:pic>
-      <p:sp>
-        <p:nvSpPr>
-          <p:cNvPr id="9" name="Google Shape;331;p64">
-            <a:extLst>
-              <a:ext uri="{FF2B5EF4-FFF2-40B4-BE49-F238E27FC236}">
-                <a16:creationId xmlns:a16="http://schemas.microsoft.com/office/drawing/2014/main" id="{8413CDD0-0048-6393-5A61-E79532257A93}"/>
-              </a:ext>
-            </a:extLst>
-          </p:cNvPr>
-          <p:cNvSpPr txBox="1"/>
-          <p:nvPr/>
-        </p:nvSpPr>
-        <p:spPr>
-          <a:xfrm>
-            <a:off x="4396875" y="2024392"/>
-            <a:ext cx="3878400" cy="295466"/>
-          </a:xfrm>
-          <a:prstGeom prst="rect">
-            <a:avLst/>
-          </a:prstGeom>
-          <a:noFill/>
-          <a:ln>
-            <a:noFill/>
-          </a:ln>
-        </p:spPr>
-        <p:txBody>
-          <a:bodyPr spcFirstLastPara="1" wrap="square" lIns="0" tIns="0" rIns="0" bIns="0" anchor="t" anchorCtr="0">
-            <a:spAutoFit/>
-          </a:bodyPr>
-          <a:lstStyle/>
-          <a:p>
-            <a:pPr marL="0" marR="0" lvl="0" indent="0" algn="l" rtl="0">
-              <a:lnSpc>
-                <a:spcPct val="160000"/>
-              </a:lnSpc>
-              <a:spcBef>
-                <a:spcPts val="0"/>
-              </a:spcBef>
-              <a:spcAft>
-                <a:spcPts val="0"/>
-              </a:spcAft>
-              <a:buNone/>
-            </a:pPr>
-            <a:r>
-              <a:rPr lang="ru-RU" sz="1200" dirty="0">
-                <a:highlight>
-                  <a:srgbClr val="FFFF00"/>
-                </a:highlight>
-                <a:latin typeface="Manrope"/>
-                <a:ea typeface="Manrope"/>
-                <a:cs typeface="Manrope"/>
-                <a:sym typeface="Manrope"/>
-              </a:rPr>
-              <a:t>Особенности</a:t>
-            </a:r>
-            <a:r>
-              <a:rPr lang="en-US" sz="1200" dirty="0">
-                <a:highlight>
-                  <a:srgbClr val="FFFF00"/>
-                </a:highlight>
-                <a:latin typeface="Manrope"/>
-                <a:ea typeface="Manrope"/>
-                <a:cs typeface="Manrope"/>
-                <a:sym typeface="Manrope"/>
-              </a:rPr>
-              <a:t>:</a:t>
-            </a:r>
-            <a:endParaRPr lang="ru-RU" sz="1200" dirty="0">
-              <a:highlight>
-                <a:srgbClr val="FFFF00"/>
-              </a:highlight>
-              <a:latin typeface="Manrope"/>
-              <a:ea typeface="Manrope"/>
-              <a:cs typeface="Manrope"/>
-              <a:sym typeface="Manrope"/>
-            </a:endParaRPr>
-          </a:p>
-        </p:txBody>
-      </p:sp>
     </p:spTree>
   </p:cSld>
   <p:clrMapOvr>
